--- a/erm-migration/docs/ERM-Migration-Pitch-v3.pptx
+++ b/erm-migration/docs/ERM-Migration-Pitch-v3.pptx
@@ -16,10 +16,9 @@
     <p:sldId id="264" r:id="rId10"/>
     <p:sldId id="265" r:id="rId11"/>
     <p:sldId id="266" r:id="rId12"/>
-    <p:sldId id="267" r:id="rId13"/>
   </p:sldIdLst>
   <p:notesMasterIdLst>
-    <p:notesMasterId r:id="rId14"/>
+    <p:notesMasterId r:id="rId13"/>
   </p:notesMasterIdLst>
   <p:sldSz cx="12192000" cy="6858000"/>
   <p:notesSz cx="6858000" cy="12192000"/>
@@ -118,32 +117,31 @@
   <p:extLst>
     <p:ext uri="{521415D9-36F7-43E2-AB2F-B90AF26B5E84}">
       <p14:sectionLst xmlns:p14="http://schemas.microsoft.com/office/powerpoint/2010/main">
-        <p14:section name="Context" id="{88ced32f-1e07-2817-459e-087c76bfde46}">
+        <p14:section name="Context" id="{74acef77-42fe-5d1d-5426-c8099ced7e3d}">
           <p14:sldIdLst>
             <p14:sldId id="256"/>
             <p14:sldId id="257"/>
             <p14:sldId id="258"/>
             <p14:sldId id="259"/>
             <p14:sldId id="260"/>
+          </p14:sldIdLst>
+        </p14:section>
+        <p14:section name="Stakes" id="{5339293c-92ff-7bbd-baec-998a96db5c81}">
+          <p14:sldIdLst>
             <p14:sldId id="261"/>
           </p14:sldIdLst>
         </p14:section>
-        <p14:section name="Stakes" id="{01f2c5fe-3048-c1c5-d71b-2f6b66aaceee}">
+        <p14:section name="Transformation" id="{9c753879-8158-37f2-e115-7edee465dcf6}">
           <p14:sldIdLst>
             <p14:sldId id="262"/>
+            <p14:sldId id="263"/>
+            <p14:sldId id="264"/>
           </p14:sldIdLst>
         </p14:section>
-        <p14:section name="Transformation" id="{139d5b19-06b7-67e8-12b4-13d754b0d85b}">
+        <p14:section name="Fit and next" id="{2635bc02-4200-3942-3a39-37dc309f44a5}">
           <p14:sldIdLst>
-            <p14:sldId id="263"/>
-            <p14:sldId id="264"/>
             <p14:sldId id="265"/>
-          </p14:sldIdLst>
-        </p14:section>
-        <p14:section name="Fit and next" id="{4703f0dd-0d04-a562-4884-782c10d86812}">
-          <p14:sldIdLst>
             <p14:sldId id="266"/>
-            <p14:sldId id="267"/>
           </p14:sldIdLst>
         </p14:section>
       </p14:sectionLst>
@@ -1277,11 +1275,15 @@
           <a:p>
             <a:r>
               <a:rPr lang="en-US" dirty="0"/>
-              <a:t>These came from ERM stakeholders in September, and they talk about the team and the tool as a whole.
-The ERM Centre of Competence says that regular teamwork with the business, together with strong IT skills, turned an idea into a user-friendly industrial solution, and that the interface and performance have clearly improved. That word, industrial, is exactly the journey I described at the start.
-Another stakeholder calls it a tremendous addition to the ERM toolset, and says more and more people now prepare and run their risk reviews with it.
-And a Risk and Opportunity Manager says the new features make navigation easier and give a much clearer view of their data, and that whenever something went wrong, it was fixed quickly.
-So how does this fit where we're heading?</a:t>
+              <a:t>This lines up with four of our 2026 objectives.
+First, using AI to solve business problems: the AI-assisted migration recovered every feature of an app nobody had documented.
+Second, on time, on cost, on quality: one PI, two developers, about seventy-six percent less effort.
+Third, operational performance: a business-critical tool is now stable, documented and ready to leave Slate.
+Fourth, digital acumen: we wrote the method down as a playbook, so other teams can do the same.
+And it was a team effort from start to finish: Operations built it, FZR owns it, business users confirmed every feature, and data and security owners made sure restricted views stayed restricted.
+So, what's next?
+— — —
+Name the people and teams on the team strip if you can.</a:t>
             </a:r>
             <a:endParaRPr lang="en-US" dirty="0"/>
           </a:p>
@@ -1369,15 +1371,11 @@
           <a:p>
             <a:r>
               <a:rPr lang="en-US" dirty="0"/>
-              <a:t>This lines up with four of our 2026 objectives.
-First, using AI to solve business problems: the AI-assisted migration recovered every feature of an app nobody had documented.
-Second, on time, on cost, on quality: one PI, two developers, about seventy-six percent less effort.
-Third, operational performance: a business-critical tool is now stable, documented and ready to leave Slate.
-Fourth, digital acumen: we wrote the method down as a playbook, so other teams can do the same.
-And it was a team effort from start to finish: Operations built it, FZR owns it, business users confirmed every feature, and data and security owners made sure restricted views stayed restricted.
-So, what's next?
-— — —
-Name the people and teams on the team strip if you can.</a:t>
+              <a:t>What we'd like to leave behind isn't only a new ERM, it's a way of working. Five steps: gather the whole app for the AI, catalogue what it does, compare old and new, fix the gaps, and document as you go. The tools for each step are ready today.
+Next for ERM itself is go-live and the run phase with FZR. Beyond that, the same method fits any Slate app, and really any business-built tool where the knowledge lives in configuration and nobody wrote it down. There are plenty of those in our landscape.
+So here's our ask. We'd like your support to make this playbook a standard way to move business-built tools to industrial apps. We've already aligned with [Architect] to propose it at the architecture sync. (If you have one, name the first team outside DMS.)
+To sum up: from a business-built tool to an industrial product, and a method for the next app.
+Thank you. I'm happy to take your questions.</a:t>
             </a:r>
             <a:endParaRPr lang="en-US" dirty="0"/>
           </a:p>
@@ -1401,98 +1399,6 @@
             <a:fld id="{F7021451-1387-4CA6-816F-3879F97B5CBC}" type="slidenum">
               <a:rPr lang="en-US"/>
               <a:t>11</a:t>
-            </a:fld>
-            <a:endParaRPr lang="en-US"/>
-          </a:p>
-        </p:txBody>
-      </p:sp>
-    </p:spTree>
-    <p:extLst>
-      <p:ext uri="{BB962C8B-B14F-4D97-AF65-F5344CB8AC3E}">
-        <p14:creationId xmlns:p14="http://schemas.microsoft.com/office/powerpoint/2010/main" val="1024086991"/>
-      </p:ext>
-    </p:extLst>
-  </p:cSld>
-  <p:clrMapOvr>
-    <a:masterClrMapping/>
-  </p:clrMapOvr>
-</p:notes>
-</file>
-
-<file path=ppt/notesSlides/notesSlide12.xml><?xml version="1.0" encoding="utf-8"?>
-<p:notes xmlns:a="http://schemas.openxmlformats.org/drawingml/2006/main" xmlns:r="http://schemas.openxmlformats.org/officeDocument/2006/relationships" xmlns:p="http://schemas.openxmlformats.org/presentationml/2006/main">
-  <p:cSld>
-    <p:spTree>
-      <p:nvGrpSpPr>
-        <p:cNvPr id="1" name=""/>
-        <p:cNvGrpSpPr/>
-        <p:nvPr/>
-      </p:nvGrpSpPr>
-      <p:grpSpPr>
-        <a:xfrm>
-          <a:off x="0" y="0"/>
-          <a:ext cx="0" cy="0"/>
-          <a:chOff x="0" y="0"/>
-          <a:chExt cx="0" cy="0"/>
-        </a:xfrm>
-      </p:grpSpPr>
-      <p:sp>
-        <p:nvSpPr>
-          <p:cNvPr id="2" name="Slide Image Placeholder 1"/>
-          <p:cNvSpPr>
-            <a:spLocks noGrp="1" noRot="1" noChangeAspect="1"/>
-          </p:cNvSpPr>
-          <p:nvPr>
-            <p:ph type="sldImg"/>
-          </p:nvPr>
-        </p:nvSpPr>
-        <p:spPr/>
-      </p:sp>
-      <p:sp>
-        <p:nvSpPr>
-          <p:cNvPr id="3" name="Notes Placeholder 2"/>
-          <p:cNvSpPr>
-            <a:spLocks noGrp="1"/>
-          </p:cNvSpPr>
-          <p:nvPr>
-            <p:ph type="body" idx="1"/>
-          </p:nvPr>
-        </p:nvSpPr>
-        <p:spPr/>
-        <p:txBody>
-          <a:bodyPr/>
-          <a:lstStyle/>
-          <a:p>
-            <a:r>
-              <a:rPr lang="en-US" dirty="0"/>
-              <a:t>What we'd like to leave behind isn't only a new ERM, it's a way of working. Five steps: gather the whole app for the AI, catalogue what it does, compare old and new, fix the gaps, and document as you go. The tools for each step are ready today.
-Next for ERM itself is go-live and the run phase with FZR. Beyond that, the same method fits any Slate app, and really any business-built tool where the knowledge lives in configuration and nobody wrote it down. There are plenty of those in our landscape.
-So here's our ask. We'd like your support to make this playbook a standard way to move business-built tools to industrial apps. We've already aligned with [Architect] to propose it at the architecture sync. (If you have one, name the first team outside DMS.)
-To sum up: from a business-built tool to an industrial product, and a method for the next app.
-Thank you. I'm happy to take your questions.</a:t>
-            </a:r>
-            <a:endParaRPr lang="en-US" dirty="0"/>
-          </a:p>
-        </p:txBody>
-      </p:sp>
-      <p:sp>
-        <p:nvSpPr>
-          <p:cNvPr id="4" name="Slide Number Placeholder 3"/>
-          <p:cNvSpPr>
-            <a:spLocks noGrp="1"/>
-          </p:cNvSpPr>
-          <p:nvPr>
-            <p:ph type="sldNum" sz="quarter" idx="10"/>
-          </p:nvPr>
-        </p:nvSpPr>
-        <p:spPr/>
-        <p:txBody>
-          <a:bodyPr/>
-          <a:lstStyle/>
-          <a:p>
-            <a:fld id="{F7021451-1387-4CA6-816F-3879F97B5CBC}" type="slidenum">
-              <a:rPr lang="en-US"/>
-              <a:t>12</a:t>
             </a:fld>
             <a:endParaRPr lang="en-US"/>
           </a:p>
@@ -1649,7 +1555,7 @@
             <a:r>
               <a:rPr lang="en-US" dirty="0"/>
               <a:t>This one: ERM, Enterprise Risk Management. On a map like this it's one small box, but for the people who use it, it's where every risk review starts.
-(Click: the box opens up into ERM.)</a:t>
+(Click: ERM bursts out of its box and fills the screen. Click again for the next slide.)</a:t>
             </a:r>
             <a:endParaRPr lang="en-US" dirty="0"/>
           </a:p>
@@ -1737,7 +1643,10 @@
           <a:p>
             <a:r>
               <a:rPr lang="en-US" dirty="0"/>
-              <a:t>(This slide moves on by itself after a moment.)</a:t>
+              <a:t>So what is ERM? Enterprise risk management is the process that makes risk part of management and decision-making, so that stakeholders understand their risks and the actions they need to take. Our application streamlines that reporting, using risk data from Active Risk Manager, ARM, brought into Palantir Skywise.
+In practice, it gives people one place for their ARM data. They group risks and opportunities into their own dashboards, edit them live and follow the trends, release them through a governed quarterly workflow, and share them across divisions.
+On the right is the flow: risks and opportunities come in from ARM, people organise them on a dashboard, and out come the reports for their reviews, along with criticality, key messages, trends and status.
+But ERM didn't start with us.</a:t>
             </a:r>
             <a:endParaRPr lang="en-US" dirty="0"/>
           </a:p>
@@ -1825,9 +1734,9 @@
           <a:p>
             <a:r>
               <a:rPr lang="en-US" dirty="0"/>
-              <a:t>Inside our company performance management stream sits the DMS Performance Management suite: KPIs and data products, dashboards, and ERM. ERM is an integral part of it, because it's where performance meets risk.
-It takes risk and opportunity data from ARM, which runs on Riskonnect, and brings it to life on the Skywise platform. A risk manager opens the dashboard for their area, sees their risks on a heat map, updates them, and takes the one-pager or the report into their review. Every quarter the dashboards are validated and released, so management sees a governed picture.
-But ERM didn't start with us.</a:t>
+              <a:t>ERM was built by Operations, as a Business Owned Tool in Slate. It worked, and other functions wanted it too, so it spread quickly beyond Operations. Today the business owner is FZR.
+That growth is a good problem, but a tool built by the business isn't designed to carry the whole company. So we took it over. In 2024 we industrialised it: we standardised it, made it robust and kept improving it. In 2025 it scaled to more users and more functions, and that's when Slate started to show its limits. And in 2026 we migrated it: ERM 2.0, rebuilt and ready for go-live.
+Before I show you how, let me show you why it matters.</a:t>
             </a:r>
             <a:endParaRPr lang="en-US" dirty="0"/>
           </a:p>
@@ -1915,9 +1824,10 @@
           <a:p>
             <a:r>
               <a:rPr lang="en-US" dirty="0"/>
-              <a:t>ERM was built by Operations, as a Business Owned Tool in Slate. It worked, and other functions wanted it too, so it spread quickly beyond Operations. Today the business owner is FZR.
-That growth is a good problem, but a tool built by the business isn't designed to carry the whole company. So we took it over. In 2024 we industrialised it: we standardised it, made it robust and kept improving it. In 2025 it scaled to more users and more functions, and that's when Slate started to show its limits. And in 2026 we migrated it: ERM 2.0, rebuilt and ready for go-live.
-Before I show you how, let me show you why it matters.</a:t>
+              <a:t>And it really is used. Close to nine hundred people have used ERM, around three hundred in a busy month, and there are more than sixteen hundred dashboards, some of them updated every day. It's used by many functions, mostly in France and Germany, and also in the UK, Spain and Canada.
+So it isn't a side tool. If ERM breaks, risk reporting breaks. And under the surface, the Slate version was fragile.
+— — —
+Reference if asked: 892 lifetime unique users; 320+ active in a peak month; 1,600+ dashboards; 10+ updated every day. Largest function B (~345), then O, P, A, L, S, K and about a dozen smaller ones. France 314, Germany 205, UK 58, Spain 25, Canada 12; top sites Blagnac 271 and Hamburg 205. Chart values are read from the usage dashboard, so they are approximate.</a:t>
             </a:r>
             <a:endParaRPr lang="en-US" dirty="0"/>
           </a:p>
@@ -2005,10 +1915,13 @@
           <a:p>
             <a:r>
               <a:rPr lang="en-US" dirty="0"/>
-              <a:t>And it really is used. Close to nine hundred people have used ERM, around three hundred in a busy month, and there are more than sixteen hundred dashboards, some of them updated every day. It's used by many functions, mostly in France and Germany, and also in the UK, Spain and Canada.
-So it isn't a side tool. If ERM breaks, risk reporting breaks. And under the surface, the Slate version was fragile.
+              <a:t>Here is the problem and the solution on one picture.
+On the left is the Slate app we inherited. It worked, but everything was tangled together: one click set off a chain reaction behind the scenes, so a small change in one place could break a dashboard somewhere else. Switching tabs was slow. And nothing was documented, so the knowledge of what it really did lived in configuration and in a few people's heads.
+We took it through the portal: an AI-assisted migration. The AI did the heavy lifting of reading the old app and listing everything it does, and we checked every single feature on the other side.
+What came out is ERM 2.0: the same app people know, but stable, faster, documented and easy to extend. Rather than describe it, let me show you.
 — — —
-Reference if asked: 892 lifetime unique users; 320+ active in a peak month; 1,600+ dashboards; 10+ updated every day. Largest function B (~345), then O, P, A, L, S, K and about a dozen smaller ones. France 314, Germany 205, UK 58, Spain 25, Canada 12; top sites Blagnac 271 and Hamburg 205. Chart values are read from the usage dashboard, so they are approximate.</a:t>
+Play the trailer here: 1 min 34 s, full screen, sound on. Let it run without talking over it. It shows sample data only and ends on "Coming soon", which matches where we are: the app isn't live yet.
+Before you start: have docs/trailer-storyboard/erm2-trailer-1080p.mp4 open and cued, or embed it on this slide. Add about 1 min 40 s to your timing.</a:t>
             </a:r>
             <a:endParaRPr lang="en-US" dirty="0"/>
           </a:p>
@@ -2096,13 +2009,12 @@
           <a:p>
             <a:r>
               <a:rPr lang="en-US" dirty="0"/>
-              <a:t>Here is the problem and the solution on one picture.
-On the left is the Slate app we inherited. It worked, but everything was tangled together: one click set off a chain reaction behind the scenes, so a small change in one place could break a dashboard somewhere else. Switching tabs was slow. And nothing was documented, so the knowledge of what it really did lived in configuration and in a few people's heads.
-We took it through the portal: an AI-assisted migration. The AI did the heavy lifting of reading the old app and listing everything it does, and we checked every single feature on the other side.
-What came out is ERM 2.0: the same app people know, but stable, faster, documented and easy to extend. Rather than describe it, let me show you.
+              <a:t>That was ERM 2.0. One PI, two developers. Every one of the hundred and five features people rely on was carried over and checked. On top of that there are eleven new ones, like custom one-pager layouts and a slideshow mode for reviews. It's faster to move around, seven security issues were found and fixed along the way, and the app went from no documentation to ten documents.
+The number I'd like you to remember is this one: about seventy-six percent less effort than a traditional migration. Four sprints instead of roughly seventeen. That's around eighty thousand dollars saved, and roughly ten thousand a year less to maintain. These are estimates, and the basis is in the footnote.
+And it keeps paying back. Before, every change was risky. Now each feature stands on its own, so changes are quick and safe, and any team can pick it up.
+But I'd rather the business told you how it feels.
 — — —
-Play the trailer here: 1 min 34 s, full screen, sound on. Let it run without talking over it. It shows sample data only and ends on "Coming soon", which matches where we are: the app isn't live yet.
-Before you start: have docs/trailer-storyboard/erm2-trailer-1080p.mp4 open and cued, or embed it on this slide. Add about 1 min 40 s to your timing.</a:t>
+Reference if asked. The 11 new features: permissions-only edit for locked versions; a web address per tab; a searchable dashboard switcher; a criticality-differs filter; category and impact-category filters; a fourth one-pager layout with custom slots; resizable columns saved per board; report classification and cover toggle; slideshow mode; one-pager selection shortcuts; showing risks by ID or title. Security findings included unsafe rich text in five places and permission checks that were too loose; the dashboard sharing-access fix is deployed.</a:t>
             </a:r>
             <a:endParaRPr lang="en-US" dirty="0"/>
           </a:p>
@@ -2190,12 +2102,11 @@
           <a:p>
             <a:r>
               <a:rPr lang="en-US" dirty="0"/>
-              <a:t>That was ERM 2.0. One PI, two developers. Every one of the hundred and five features people rely on was carried over and checked. On top of that there are eleven new ones, like custom one-pager layouts and a slideshow mode for reviews. It's faster to move around, seven security issues were found and fixed along the way, and the app went from no documentation to ten documents.
-The number I'd like you to remember is this one: about seventy-six percent less effort than a traditional migration. Four sprints instead of roughly seventeen. That's around eighty thousand dollars saved, and roughly ten thousand a year less to maintain. These are estimates, and the basis is in the footnote.
-And it keeps paying back. Before, every change was risky. Now each feature stands on its own, so changes are quick and safe, and any team can pick it up.
-But I'd rather the business told you how it feels.
-— — —
-Reference if asked. The 11 new features: permissions-only edit for locked versions; a web address per tab; a searchable dashboard switcher; a criticality-differs filter; category and impact-category filters; a fourth one-pager layout with custom slots; resizable columns saved per board; report classification and cover toggle; slideshow mode; one-pager selection shortcuts; showing risks by ID or title. Security findings included unsafe rich text in five places and permission checks that were too loose; the dashboard sharing-access fix is deployed.</a:t>
+              <a:t>These came from ERM stakeholders in September, and they talk about the team and the tool as a whole.
+The ERM Centre of Competence says that regular teamwork with the business, together with strong IT skills, turned an idea into a user-friendly industrial solution, and that the interface and performance have clearly improved. That word, industrial, is exactly the journey I described at the start.
+Another stakeholder calls it a tremendous addition to the ERM toolset, and says more and more people now prepare and run their risk reviews with it.
+And a Risk and Opportunity Manager says the new features make navigation easier and give a much clearer view of their data, and that whenever something went wrong, it was fixed quickly.
+So how does this fit where we're heading?</a:t>
             </a:r>
             <a:endParaRPr lang="en-US" dirty="0"/>
           </a:p>
@@ -3128,1124 +3039,6 @@
                   <a:schemeClr val="accent3"/>
                 </a:solidFill>
               </a:rPr>
-              <a:t>VOICE OF THE BUSINESS</a:t>
-            </a:r>
-            <a:endParaRPr lang="en-US" sz="1100" dirty="0"/>
-          </a:p>
-        </p:txBody>
-      </p:sp>
-      <p:sp>
-        <p:nvSpPr>
-          <p:cNvPr id="3" name="Text 1"/>
-          <p:cNvSpPr/>
-          <p:nvPr>
-            <p:ph idx="101" type="title" hasCustomPrompt="1"/>
-          </p:nvPr>
-        </p:nvSpPr>
-        <p:spPr>
-          <a:xfrm>
-            <a:off x="548640" y="502920"/>
-            <a:ext cx="11094415" cy="822960"/>
-          </a:xfrm>
-          <a:prstGeom prst="rect">
-            <a:avLst/>
-          </a:prstGeom>
-          <a:noFill/>
-          <a:ln/>
-        </p:spPr>
-        <p:txBody>
-          <a:bodyPr wrap="square" lIns="0" tIns="0" rIns="0" bIns="0" rtlCol="0" anchor="t"/>
-          <a:lstStyle/>
-          <a:p>
-            <a:pPr algn="l" indent="0" marL="0">
-              <a:buNone/>
-            </a:pPr>
-            <a:r>
-              <a:rPr lang="en-US" sz="3600" b="1" dirty="0">
-                <a:solidFill>
-                  <a:schemeClr val="tx1"/>
-                </a:solidFill>
-              </a:rPr>
-              <a:t>What the business says</a:t>
-            </a:r>
-            <a:endParaRPr lang="en-US" sz="3600" dirty="0"/>
-          </a:p>
-        </p:txBody>
-      </p:sp>
-      <p:sp>
-        <p:nvSpPr>
-          <p:cNvPr id="4" name="quote-sub"/>
-          <p:cNvSpPr txBox="1"/>
-          <p:nvPr/>
-        </p:nvSpPr>
-        <p:spPr>
-          <a:xfrm>
-            <a:off x="548640" y="1115568"/>
-            <a:ext cx="11094415" cy="320040"/>
-          </a:xfrm>
-          <a:prstGeom prst="rect">
-            <a:avLst/>
-          </a:prstGeom>
-          <a:noFill/>
-          <a:ln/>
-        </p:spPr>
-        <p:txBody>
-          <a:bodyPr wrap="square" lIns="0" tIns="0" rIns="0" bIns="0" rtlCol="0" anchor="t"/>
-          <a:lstStyle/>
-          <a:p>
-            <a:pPr indent="0" marL="0">
-              <a:buNone/>
-            </a:pPr>
-            <a:r>
-              <a:rPr lang="en-US" sz="1400" dirty="0">
-                <a:solidFill>
-                  <a:schemeClr val="tx2"/>
-                </a:solidFill>
-              </a:rPr>
-              <a:t>Feedback from ERM business stakeholders, September 2026</a:t>
-            </a:r>
-            <a:endParaRPr lang="en-US" sz="1400" dirty="0"/>
-          </a:p>
-        </p:txBody>
-      </p:sp>
-      <p:sp>
-        <p:nvSpPr>
-          <p:cNvPr id="5" name="quote-0-card"/>
-          <p:cNvSpPr/>
-          <p:nvPr/>
-        </p:nvSpPr>
-        <p:spPr>
-          <a:xfrm>
-            <a:off x="548640" y="1645920"/>
-            <a:ext cx="3515258" cy="4480560"/>
-          </a:xfrm>
-          <a:prstGeom prst="roundRect">
-            <a:avLst>
-              <a:gd name="adj" fmla="val 3121"/>
-            </a:avLst>
-          </a:prstGeom>
-          <a:solidFill>
-            <a:schemeClr val="tx1"/>
-          </a:solidFill>
-          <a:ln/>
-        </p:spPr>
-      </p:sp>
-      <p:sp>
-        <p:nvSpPr>
-          <p:cNvPr id="6" name="quote-0-mark"/>
-          <p:cNvSpPr txBox="1"/>
-          <p:nvPr/>
-        </p:nvSpPr>
-        <p:spPr>
-          <a:xfrm>
-            <a:off x="822960" y="1783080"/>
-            <a:ext cx="914400" cy="731520"/>
-          </a:xfrm>
-          <a:prstGeom prst="rect">
-            <a:avLst/>
-          </a:prstGeom>
-          <a:noFill/>
-          <a:ln/>
-        </p:spPr>
-        <p:txBody>
-          <a:bodyPr wrap="square" lIns="0" tIns="0" rIns="0" bIns="0" rtlCol="0" anchor="t"/>
-          <a:lstStyle/>
-          <a:p>
-            <a:pPr indent="0" marL="0">
-              <a:buNone/>
-            </a:pPr>
-            <a:r>
-              <a:rPr lang="en-US" sz="6000" b="1" dirty="0">
-                <a:solidFill>
-                  <a:schemeClr val="accent5"/>
-                </a:solidFill>
-              </a:rPr>
-              <a:t>“</a:t>
-            </a:r>
-            <a:endParaRPr lang="en-US" sz="6000" dirty="0"/>
-          </a:p>
-        </p:txBody>
-      </p:sp>
-      <p:sp>
-        <p:nvSpPr>
-          <p:cNvPr id="7" name="quote-0-text"/>
-          <p:cNvSpPr txBox="1"/>
-          <p:nvPr/>
-        </p:nvSpPr>
-        <p:spPr>
-          <a:xfrm>
-            <a:off x="822960" y="2514600"/>
-            <a:ext cx="2966618" cy="2606040"/>
-          </a:xfrm>
-          <a:prstGeom prst="rect">
-            <a:avLst/>
-          </a:prstGeom>
-          <a:noFill/>
-          <a:ln/>
-        </p:spPr>
-        <p:txBody>
-          <a:bodyPr wrap="square" lIns="0" tIns="0" rIns="0" bIns="0" rtlCol="0" anchor="t"/>
-          <a:lstStyle/>
-          <a:p>
-            <a:pPr indent="0" marL="0">
-              <a:buNone/>
-            </a:pPr>
-            <a:r>
-              <a:rPr lang="en-US" sz="1800" i="1" dirty="0">
-                <a:solidFill>
-                  <a:schemeClr val="bg1"/>
-                </a:solidFill>
-              </a:rPr>
-              <a:t>Thanks to a mix of regular teamwork with the business and strong IT skills, they have turned an idea into a user-friendly industrial [solution]… User interface and performance have significantly improved.</a:t>
-            </a:r>
-            <a:endParaRPr lang="en-US" sz="1800" dirty="0"/>
-          </a:p>
-        </p:txBody>
-      </p:sp>
-      <p:sp>
-        <p:nvSpPr>
-          <p:cNvPr id="8" name="quote-0-who"/>
-          <p:cNvSpPr txBox="1"/>
-          <p:nvPr/>
-        </p:nvSpPr>
-        <p:spPr>
-          <a:xfrm>
-            <a:off x="822960" y="5166360"/>
-            <a:ext cx="2966618" cy="731520"/>
-          </a:xfrm>
-          <a:prstGeom prst="rect">
-            <a:avLst/>
-          </a:prstGeom>
-          <a:noFill/>
-          <a:ln/>
-        </p:spPr>
-        <p:txBody>
-          <a:bodyPr wrap="square" lIns="0" tIns="0" rIns="0" bIns="0" rtlCol="0" anchor="b"/>
-          <a:lstStyle/>
-          <a:p>
-            <a:pPr indent="0" marL="0">
-              <a:buNone/>
-            </a:pPr>
-            <a:r>
-              <a:rPr lang="en-US" sz="1400" b="1" dirty="0">
-                <a:solidFill>
-                  <a:schemeClr val="bg1"/>
-                </a:solidFill>
-              </a:rPr>
-              <a:t>ERM Centre of Competence</a:t>
-            </a:r>
-            <a:endParaRPr lang="en-US" sz="1400" dirty="0"/>
-          </a:p>
-          <a:p>
-            <a:pPr indent="0" marL="0">
-              <a:buNone/>
-            </a:pPr>
-            <a:r>
-              <a:rPr lang="en-US" sz="1200" dirty="0">
-                <a:solidFill>
-                  <a:schemeClr val="accent5"/>
-                </a:solidFill>
-              </a:rPr>
-              <a:t>[Name]</a:t>
-            </a:r>
-            <a:endParaRPr lang="en-US" sz="1400" dirty="0"/>
-          </a:p>
-        </p:txBody>
-      </p:sp>
-      <p:sp>
-        <p:nvSpPr>
-          <p:cNvPr id="9" name="quote-1-card"/>
-          <p:cNvSpPr/>
-          <p:nvPr/>
-        </p:nvSpPr>
-        <p:spPr>
-          <a:xfrm>
-            <a:off x="4338218" y="1645920"/>
-            <a:ext cx="3515258" cy="4480560"/>
-          </a:xfrm>
-          <a:prstGeom prst="roundRect">
-            <a:avLst>
-              <a:gd name="adj" fmla="val 3121"/>
-            </a:avLst>
-          </a:prstGeom>
-          <a:solidFill>
-            <a:schemeClr val="bg1"/>
-          </a:solidFill>
-          <a:ln/>
-        </p:spPr>
-      </p:sp>
-      <p:sp>
-        <p:nvSpPr>
-          <p:cNvPr id="10" name="quote-1-mark"/>
-          <p:cNvSpPr txBox="1"/>
-          <p:nvPr/>
-        </p:nvSpPr>
-        <p:spPr>
-          <a:xfrm>
-            <a:off x="4612538" y="1783080"/>
-            <a:ext cx="914400" cy="731520"/>
-          </a:xfrm>
-          <a:prstGeom prst="rect">
-            <a:avLst/>
-          </a:prstGeom>
-          <a:noFill/>
-          <a:ln/>
-        </p:spPr>
-        <p:txBody>
-          <a:bodyPr wrap="square" lIns="0" tIns="0" rIns="0" bIns="0" rtlCol="0" anchor="t"/>
-          <a:lstStyle/>
-          <a:p>
-            <a:pPr indent="0" marL="0">
-              <a:buNone/>
-            </a:pPr>
-            <a:r>
-              <a:rPr lang="en-US" sz="6000" b="1" dirty="0">
-                <a:solidFill>
-                  <a:schemeClr val="accent3"/>
-                </a:solidFill>
-              </a:rPr>
-              <a:t>“</a:t>
-            </a:r>
-            <a:endParaRPr lang="en-US" sz="6000" dirty="0"/>
-          </a:p>
-        </p:txBody>
-      </p:sp>
-      <p:sp>
-        <p:nvSpPr>
-          <p:cNvPr id="11" name="quote-1-text"/>
-          <p:cNvSpPr txBox="1"/>
-          <p:nvPr/>
-        </p:nvSpPr>
-        <p:spPr>
-          <a:xfrm>
-            <a:off x="4612538" y="2514600"/>
-            <a:ext cx="2966618" cy="2606040"/>
-          </a:xfrm>
-          <a:prstGeom prst="rect">
-            <a:avLst/>
-          </a:prstGeom>
-          <a:noFill/>
-          <a:ln/>
-        </p:spPr>
-        <p:txBody>
-          <a:bodyPr wrap="square" lIns="0" tIns="0" rIns="0" bIns="0" rtlCol="0" anchor="t"/>
-          <a:lstStyle/>
-          <a:p>
-            <a:pPr indent="0" marL="0">
-              <a:buNone/>
-            </a:pPr>
-            <a:r>
-              <a:rPr lang="en-US" sz="1800" i="1" dirty="0">
-                <a:solidFill>
-                  <a:schemeClr val="tx1"/>
-                </a:solidFill>
-              </a:rPr>
-              <a:t>The Skywise ERM dashboard application is a tremendous addition to our ERM toolset… More and more users regularly prepare and facilitate risks &amp; opportunities reviews with the application.</a:t>
-            </a:r>
-            <a:endParaRPr lang="en-US" sz="1800" dirty="0"/>
-          </a:p>
-        </p:txBody>
-      </p:sp>
-      <p:sp>
-        <p:nvSpPr>
-          <p:cNvPr id="12" name="quote-1-who"/>
-          <p:cNvSpPr txBox="1"/>
-          <p:nvPr/>
-        </p:nvSpPr>
-        <p:spPr>
-          <a:xfrm>
-            <a:off x="4612538" y="5166360"/>
-            <a:ext cx="2966618" cy="731520"/>
-          </a:xfrm>
-          <a:prstGeom prst="rect">
-            <a:avLst/>
-          </a:prstGeom>
-          <a:noFill/>
-          <a:ln/>
-        </p:spPr>
-        <p:txBody>
-          <a:bodyPr wrap="square" lIns="0" tIns="0" rIns="0" bIns="0" rtlCol="0" anchor="b"/>
-          <a:lstStyle/>
-          <a:p>
-            <a:pPr indent="0" marL="0">
-              <a:buNone/>
-            </a:pPr>
-            <a:r>
-              <a:rPr lang="en-US" sz="1400" b="1" dirty="0">
-                <a:solidFill>
-                  <a:schemeClr val="tx1"/>
-                </a:solidFill>
-              </a:rPr>
-              <a:t>ERM Stakeholder</a:t>
-            </a:r>
-            <a:endParaRPr lang="en-US" sz="1400" dirty="0"/>
-          </a:p>
-          <a:p>
-            <a:pPr indent="0" marL="0">
-              <a:buNone/>
-            </a:pPr>
-            <a:r>
-              <a:rPr lang="en-US" sz="1200" dirty="0">
-                <a:solidFill>
-                  <a:schemeClr val="tx2"/>
-                </a:solidFill>
-              </a:rPr>
-              <a:t>[Name]</a:t>
-            </a:r>
-            <a:endParaRPr lang="en-US" sz="1400" dirty="0"/>
-          </a:p>
-        </p:txBody>
-      </p:sp>
-      <p:sp>
-        <p:nvSpPr>
-          <p:cNvPr id="13" name="quote-2-card"/>
-          <p:cNvSpPr/>
-          <p:nvPr/>
-        </p:nvSpPr>
-        <p:spPr>
-          <a:xfrm>
-            <a:off x="8127797" y="1645920"/>
-            <a:ext cx="3515258" cy="4480560"/>
-          </a:xfrm>
-          <a:prstGeom prst="roundRect">
-            <a:avLst>
-              <a:gd name="adj" fmla="val 3121"/>
-            </a:avLst>
-          </a:prstGeom>
-          <a:solidFill>
-            <a:schemeClr val="bg1"/>
-          </a:solidFill>
-          <a:ln/>
-        </p:spPr>
-      </p:sp>
-      <p:sp>
-        <p:nvSpPr>
-          <p:cNvPr id="14" name="quote-2-mark"/>
-          <p:cNvSpPr txBox="1"/>
-          <p:nvPr/>
-        </p:nvSpPr>
-        <p:spPr>
-          <a:xfrm>
-            <a:off x="8402117" y="1783080"/>
-            <a:ext cx="914400" cy="731520"/>
-          </a:xfrm>
-          <a:prstGeom prst="rect">
-            <a:avLst/>
-          </a:prstGeom>
-          <a:noFill/>
-          <a:ln/>
-        </p:spPr>
-        <p:txBody>
-          <a:bodyPr wrap="square" lIns="0" tIns="0" rIns="0" bIns="0" rtlCol="0" anchor="t"/>
-          <a:lstStyle/>
-          <a:p>
-            <a:pPr indent="0" marL="0">
-              <a:buNone/>
-            </a:pPr>
-            <a:r>
-              <a:rPr lang="en-US" sz="6000" b="1" dirty="0">
-                <a:solidFill>
-                  <a:schemeClr val="accent3"/>
-                </a:solidFill>
-              </a:rPr>
-              <a:t>“</a:t>
-            </a:r>
-            <a:endParaRPr lang="en-US" sz="6000" dirty="0"/>
-          </a:p>
-        </p:txBody>
-      </p:sp>
-      <p:sp>
-        <p:nvSpPr>
-          <p:cNvPr id="15" name="quote-2-text"/>
-          <p:cNvSpPr txBox="1"/>
-          <p:nvPr/>
-        </p:nvSpPr>
-        <p:spPr>
-          <a:xfrm>
-            <a:off x="8402117" y="2514600"/>
-            <a:ext cx="2966618" cy="2606040"/>
-          </a:xfrm>
-          <a:prstGeom prst="rect">
-            <a:avLst/>
-          </a:prstGeom>
-          <a:noFill/>
-          <a:ln/>
-        </p:spPr>
-        <p:txBody>
-          <a:bodyPr wrap="square" lIns="0" tIns="0" rIns="0" bIns="0" rtlCol="0" anchor="t"/>
-          <a:lstStyle/>
-          <a:p>
-            <a:pPr indent="0" marL="0">
-              <a:buNone/>
-            </a:pPr>
-            <a:r>
-              <a:rPr lang="en-US" sz="1800" i="1" dirty="0">
-                <a:solidFill>
-                  <a:schemeClr val="tx1"/>
-                </a:solidFill>
-              </a:rPr>
-              <a:t>They built great new features that make navigation easier and give us a much clearer view of our R&amp;O data. Whenever bugs or issues came up, they fixed them quickly and efficiently.</a:t>
-            </a:r>
-            <a:endParaRPr lang="en-US" sz="1800" dirty="0"/>
-          </a:p>
-        </p:txBody>
-      </p:sp>
-      <p:sp>
-        <p:nvSpPr>
-          <p:cNvPr id="16" name="quote-2-who"/>
-          <p:cNvSpPr txBox="1"/>
-          <p:nvPr/>
-        </p:nvSpPr>
-        <p:spPr>
-          <a:xfrm>
-            <a:off x="8402117" y="5166360"/>
-            <a:ext cx="2966618" cy="731520"/>
-          </a:xfrm>
-          <a:prstGeom prst="rect">
-            <a:avLst/>
-          </a:prstGeom>
-          <a:noFill/>
-          <a:ln/>
-        </p:spPr>
-        <p:txBody>
-          <a:bodyPr wrap="square" lIns="0" tIns="0" rIns="0" bIns="0" rtlCol="0" anchor="b"/>
-          <a:lstStyle/>
-          <a:p>
-            <a:pPr indent="0" marL="0">
-              <a:buNone/>
-            </a:pPr>
-            <a:r>
-              <a:rPr lang="en-US" sz="1400" b="1" dirty="0">
-                <a:solidFill>
-                  <a:schemeClr val="tx1"/>
-                </a:solidFill>
-              </a:rPr>
-              <a:t>Risk and Opportunity Manager</a:t>
-            </a:r>
-            <a:endParaRPr lang="en-US" sz="1400" dirty="0"/>
-          </a:p>
-          <a:p>
-            <a:pPr indent="0" marL="0">
-              <a:buNone/>
-            </a:pPr>
-            <a:r>
-              <a:rPr lang="en-US" sz="1200" dirty="0">
-                <a:solidFill>
-                  <a:schemeClr val="tx2"/>
-                </a:solidFill>
-              </a:rPr>
-              <a:t>[Name]</a:t>
-            </a:r>
-            <a:endParaRPr lang="en-US" sz="1400" dirty="0"/>
-          </a:p>
-        </p:txBody>
-      </p:sp>
-    </p:spTree>
-  </p:cSld>
-  <p:clrMapOvr>
-    <a:masterClrMapping/>
-  </p:clrMapOvr>
-  <p:transition spd="med">
-    <p:fade/>
-  </p:transition>
-  <p:timing>
-    <p:tnLst>
-      <p:par>
-        <p:cTn id="1" dur="indefinite" restart="never" nodeType="tmRoot">
-          <p:childTnLst>
-            <p:seq concurrent="1" nextAc="seek">
-              <p:cTn id="2" dur="indefinite" nodeType="mainSeq">
-                <p:childTnLst>
-                  <p:par>
-                    <p:cTn id="46" fill="hold">
-                      <p:stCondLst>
-                        <p:cond delay="indefinite"/>
-                        <p:cond evt="onBegin" delay="0">
-                          <p:tn val="2"/>
-                        </p:cond>
-                      </p:stCondLst>
-                      <p:childTnLst>
-                        <p:par>
-                          <p:cTn id="6" fill="hold">
-                            <p:stCondLst>
-                              <p:cond delay="0"/>
-                            </p:stCondLst>
-                            <p:childTnLst>
-                              <p:par>
-                                <p:cTn id="3" presetID="10" presetClass="entr" presetSubtype="0" fill="hold" grpId="0" nodeType="afterEffect">
-                                  <p:stCondLst>
-                                    <p:cond delay="0"/>
-                                  </p:stCondLst>
-                                  <p:childTnLst>
-                                    <p:set>
-                                      <p:cBhvr>
-                                        <p:cTn id="4" dur="1" fill="hold">
-                                          <p:stCondLst>
-                                            <p:cond delay="0"/>
-                                          </p:stCondLst>
-                                        </p:cTn>
-                                        <p:tgtEl>
-                                          <p:spTgt spid="4"/>
-                                        </p:tgtEl>
-                                        <p:attrNameLst>
-                                          <p:attrName>style.visibility</p:attrName>
-                                        </p:attrNameLst>
-                                      </p:cBhvr>
-                                      <p:to>
-                                        <p:strVal val="visible"/>
-                                      </p:to>
-                                    </p:set>
-                                    <p:animEffect transition="in" filter="fade">
-                                      <p:cBhvr>
-                                        <p:cTn id="5" dur="450"/>
-                                        <p:tgtEl>
-                                          <p:spTgt spid="4"/>
-                                        </p:tgtEl>
-                                      </p:cBhvr>
-                                    </p:animEffect>
-                                  </p:childTnLst>
-                                </p:cTn>
-                              </p:par>
-                            </p:childTnLst>
-                          </p:cTn>
-                        </p:par>
-                        <p:par>
-                          <p:cTn id="19" fill="hold">
-                            <p:stCondLst>
-                              <p:cond delay="600"/>
-                            </p:stCondLst>
-                            <p:childTnLst>
-                              <p:par>
-                                <p:cTn id="7" presetID="10" presetClass="entr" presetSubtype="0" fill="hold" grpId="0" nodeType="afterEffect">
-                                  <p:stCondLst>
-                                    <p:cond delay="0"/>
-                                  </p:stCondLst>
-                                  <p:childTnLst>
-                                    <p:set>
-                                      <p:cBhvr>
-                                        <p:cTn id="8" dur="1" fill="hold">
-                                          <p:stCondLst>
-                                            <p:cond delay="0"/>
-                                          </p:stCondLst>
-                                        </p:cTn>
-                                        <p:tgtEl>
-                                          <p:spTgt spid="5"/>
-                                        </p:tgtEl>
-                                        <p:attrNameLst>
-                                          <p:attrName>style.visibility</p:attrName>
-                                        </p:attrNameLst>
-                                      </p:cBhvr>
-                                      <p:to>
-                                        <p:strVal val="visible"/>
-                                      </p:to>
-                                    </p:set>
-                                    <p:animEffect transition="in" filter="fade">
-                                      <p:cBhvr>
-                                        <p:cTn id="9" dur="450"/>
-                                        <p:tgtEl>
-                                          <p:spTgt spid="5"/>
-                                        </p:tgtEl>
-                                      </p:cBhvr>
-                                    </p:animEffect>
-                                  </p:childTnLst>
-                                </p:cTn>
-                              </p:par>
-                              <p:par>
-                                <p:cTn id="10" presetID="10" presetClass="entr" presetSubtype="0" fill="hold" grpId="0" nodeType="withEffect">
-                                  <p:stCondLst>
-                                    <p:cond delay="0"/>
-                                  </p:stCondLst>
-                                  <p:childTnLst>
-                                    <p:set>
-                                      <p:cBhvr>
-                                        <p:cTn id="11" dur="1" fill="hold">
-                                          <p:stCondLst>
-                                            <p:cond delay="0"/>
-                                          </p:stCondLst>
-                                        </p:cTn>
-                                        <p:tgtEl>
-                                          <p:spTgt spid="6"/>
-                                        </p:tgtEl>
-                                        <p:attrNameLst>
-                                          <p:attrName>style.visibility</p:attrName>
-                                        </p:attrNameLst>
-                                      </p:cBhvr>
-                                      <p:to>
-                                        <p:strVal val="visible"/>
-                                      </p:to>
-                                    </p:set>
-                                    <p:animEffect transition="in" filter="fade">
-                                      <p:cBhvr>
-                                        <p:cTn id="12" dur="450"/>
-                                        <p:tgtEl>
-                                          <p:spTgt spid="6"/>
-                                        </p:tgtEl>
-                                      </p:cBhvr>
-                                    </p:animEffect>
-                                  </p:childTnLst>
-                                </p:cTn>
-                              </p:par>
-                              <p:par>
-                                <p:cTn id="13" presetID="10" presetClass="entr" presetSubtype="0" fill="hold" grpId="0" nodeType="withEffect">
-                                  <p:stCondLst>
-                                    <p:cond delay="0"/>
-                                  </p:stCondLst>
-                                  <p:childTnLst>
-                                    <p:set>
-                                      <p:cBhvr>
-                                        <p:cTn id="14" dur="1" fill="hold">
-                                          <p:stCondLst>
-                                            <p:cond delay="0"/>
-                                          </p:stCondLst>
-                                        </p:cTn>
-                                        <p:tgtEl>
-                                          <p:spTgt spid="7"/>
-                                        </p:tgtEl>
-                                        <p:attrNameLst>
-                                          <p:attrName>style.visibility</p:attrName>
-                                        </p:attrNameLst>
-                                      </p:cBhvr>
-                                      <p:to>
-                                        <p:strVal val="visible"/>
-                                      </p:to>
-                                    </p:set>
-                                    <p:animEffect transition="in" filter="fade">
-                                      <p:cBhvr>
-                                        <p:cTn id="15" dur="450"/>
-                                        <p:tgtEl>
-                                          <p:spTgt spid="7"/>
-                                        </p:tgtEl>
-                                      </p:cBhvr>
-                                    </p:animEffect>
-                                  </p:childTnLst>
-                                </p:cTn>
-                              </p:par>
-                              <p:par>
-                                <p:cTn id="16" presetID="10" presetClass="entr" presetSubtype="0" fill="hold" grpId="0" nodeType="withEffect">
-                                  <p:stCondLst>
-                                    <p:cond delay="0"/>
-                                  </p:stCondLst>
-                                  <p:childTnLst>
-                                    <p:set>
-                                      <p:cBhvr>
-                                        <p:cTn id="17" dur="1" fill="hold">
-                                          <p:stCondLst>
-                                            <p:cond delay="0"/>
-                                          </p:stCondLst>
-                                        </p:cTn>
-                                        <p:tgtEl>
-                                          <p:spTgt spid="8"/>
-                                        </p:tgtEl>
-                                        <p:attrNameLst>
-                                          <p:attrName>style.visibility</p:attrName>
-                                        </p:attrNameLst>
-                                      </p:cBhvr>
-                                      <p:to>
-                                        <p:strVal val="visible"/>
-                                      </p:to>
-                                    </p:set>
-                                    <p:animEffect transition="in" filter="fade">
-                                      <p:cBhvr>
-                                        <p:cTn id="18" dur="450"/>
-                                        <p:tgtEl>
-                                          <p:spTgt spid="8"/>
-                                        </p:tgtEl>
-                                      </p:cBhvr>
-                                    </p:animEffect>
-                                  </p:childTnLst>
-                                </p:cTn>
-                              </p:par>
-                            </p:childTnLst>
-                          </p:cTn>
-                        </p:par>
-                        <p:par>
-                          <p:cTn id="32" fill="hold">
-                            <p:stCondLst>
-                              <p:cond delay="1200"/>
-                            </p:stCondLst>
-                            <p:childTnLst>
-                              <p:par>
-                                <p:cTn id="20" presetID="10" presetClass="entr" presetSubtype="0" fill="hold" grpId="0" nodeType="afterEffect">
-                                  <p:stCondLst>
-                                    <p:cond delay="0"/>
-                                  </p:stCondLst>
-                                  <p:childTnLst>
-                                    <p:set>
-                                      <p:cBhvr>
-                                        <p:cTn id="21" dur="1" fill="hold">
-                                          <p:stCondLst>
-                                            <p:cond delay="0"/>
-                                          </p:stCondLst>
-                                        </p:cTn>
-                                        <p:tgtEl>
-                                          <p:spTgt spid="9"/>
-                                        </p:tgtEl>
-                                        <p:attrNameLst>
-                                          <p:attrName>style.visibility</p:attrName>
-                                        </p:attrNameLst>
-                                      </p:cBhvr>
-                                      <p:to>
-                                        <p:strVal val="visible"/>
-                                      </p:to>
-                                    </p:set>
-                                    <p:animEffect transition="in" filter="fade">
-                                      <p:cBhvr>
-                                        <p:cTn id="22" dur="450"/>
-                                        <p:tgtEl>
-                                          <p:spTgt spid="9"/>
-                                        </p:tgtEl>
-                                      </p:cBhvr>
-                                    </p:animEffect>
-                                  </p:childTnLst>
-                                </p:cTn>
-                              </p:par>
-                              <p:par>
-                                <p:cTn id="23" presetID="10" presetClass="entr" presetSubtype="0" fill="hold" grpId="0" nodeType="withEffect">
-                                  <p:stCondLst>
-                                    <p:cond delay="0"/>
-                                  </p:stCondLst>
-                                  <p:childTnLst>
-                                    <p:set>
-                                      <p:cBhvr>
-                                        <p:cTn id="24" dur="1" fill="hold">
-                                          <p:stCondLst>
-                                            <p:cond delay="0"/>
-                                          </p:stCondLst>
-                                        </p:cTn>
-                                        <p:tgtEl>
-                                          <p:spTgt spid="10"/>
-                                        </p:tgtEl>
-                                        <p:attrNameLst>
-                                          <p:attrName>style.visibility</p:attrName>
-                                        </p:attrNameLst>
-                                      </p:cBhvr>
-                                      <p:to>
-                                        <p:strVal val="visible"/>
-                                      </p:to>
-                                    </p:set>
-                                    <p:animEffect transition="in" filter="fade">
-                                      <p:cBhvr>
-                                        <p:cTn id="25" dur="450"/>
-                                        <p:tgtEl>
-                                          <p:spTgt spid="10"/>
-                                        </p:tgtEl>
-                                      </p:cBhvr>
-                                    </p:animEffect>
-                                  </p:childTnLst>
-                                </p:cTn>
-                              </p:par>
-                              <p:par>
-                                <p:cTn id="26" presetID="10" presetClass="entr" presetSubtype="0" fill="hold" grpId="0" nodeType="withEffect">
-                                  <p:stCondLst>
-                                    <p:cond delay="0"/>
-                                  </p:stCondLst>
-                                  <p:childTnLst>
-                                    <p:set>
-                                      <p:cBhvr>
-                                        <p:cTn id="27" dur="1" fill="hold">
-                                          <p:stCondLst>
-                                            <p:cond delay="0"/>
-                                          </p:stCondLst>
-                                        </p:cTn>
-                                        <p:tgtEl>
-                                          <p:spTgt spid="11"/>
-                                        </p:tgtEl>
-                                        <p:attrNameLst>
-                                          <p:attrName>style.visibility</p:attrName>
-                                        </p:attrNameLst>
-                                      </p:cBhvr>
-                                      <p:to>
-                                        <p:strVal val="visible"/>
-                                      </p:to>
-                                    </p:set>
-                                    <p:animEffect transition="in" filter="fade">
-                                      <p:cBhvr>
-                                        <p:cTn id="28" dur="450"/>
-                                        <p:tgtEl>
-                                          <p:spTgt spid="11"/>
-                                        </p:tgtEl>
-                                      </p:cBhvr>
-                                    </p:animEffect>
-                                  </p:childTnLst>
-                                </p:cTn>
-                              </p:par>
-                              <p:par>
-                                <p:cTn id="29" presetID="10" presetClass="entr" presetSubtype="0" fill="hold" grpId="0" nodeType="withEffect">
-                                  <p:stCondLst>
-                                    <p:cond delay="0"/>
-                                  </p:stCondLst>
-                                  <p:childTnLst>
-                                    <p:set>
-                                      <p:cBhvr>
-                                        <p:cTn id="30" dur="1" fill="hold">
-                                          <p:stCondLst>
-                                            <p:cond delay="0"/>
-                                          </p:stCondLst>
-                                        </p:cTn>
-                                        <p:tgtEl>
-                                          <p:spTgt spid="12"/>
-                                        </p:tgtEl>
-                                        <p:attrNameLst>
-                                          <p:attrName>style.visibility</p:attrName>
-                                        </p:attrNameLst>
-                                      </p:cBhvr>
-                                      <p:to>
-                                        <p:strVal val="visible"/>
-                                      </p:to>
-                                    </p:set>
-                                    <p:animEffect transition="in" filter="fade">
-                                      <p:cBhvr>
-                                        <p:cTn id="31" dur="450"/>
-                                        <p:tgtEl>
-                                          <p:spTgt spid="12"/>
-                                        </p:tgtEl>
-                                      </p:cBhvr>
-                                    </p:animEffect>
-                                  </p:childTnLst>
-                                </p:cTn>
-                              </p:par>
-                            </p:childTnLst>
-                          </p:cTn>
-                        </p:par>
-                        <p:par>
-                          <p:cTn id="45" fill="hold">
-                            <p:stCondLst>
-                              <p:cond delay="1800"/>
-                            </p:stCondLst>
-                            <p:childTnLst>
-                              <p:par>
-                                <p:cTn id="33" presetID="10" presetClass="entr" presetSubtype="0" fill="hold" grpId="0" nodeType="afterEffect">
-                                  <p:stCondLst>
-                                    <p:cond delay="0"/>
-                                  </p:stCondLst>
-                                  <p:childTnLst>
-                                    <p:set>
-                                      <p:cBhvr>
-                                        <p:cTn id="34" dur="1" fill="hold">
-                                          <p:stCondLst>
-                                            <p:cond delay="0"/>
-                                          </p:stCondLst>
-                                        </p:cTn>
-                                        <p:tgtEl>
-                                          <p:spTgt spid="13"/>
-                                        </p:tgtEl>
-                                        <p:attrNameLst>
-                                          <p:attrName>style.visibility</p:attrName>
-                                        </p:attrNameLst>
-                                      </p:cBhvr>
-                                      <p:to>
-                                        <p:strVal val="visible"/>
-                                      </p:to>
-                                    </p:set>
-                                    <p:animEffect transition="in" filter="fade">
-                                      <p:cBhvr>
-                                        <p:cTn id="35" dur="450"/>
-                                        <p:tgtEl>
-                                          <p:spTgt spid="13"/>
-                                        </p:tgtEl>
-                                      </p:cBhvr>
-                                    </p:animEffect>
-                                  </p:childTnLst>
-                                </p:cTn>
-                              </p:par>
-                              <p:par>
-                                <p:cTn id="36" presetID="10" presetClass="entr" presetSubtype="0" fill="hold" grpId="0" nodeType="withEffect">
-                                  <p:stCondLst>
-                                    <p:cond delay="0"/>
-                                  </p:stCondLst>
-                                  <p:childTnLst>
-                                    <p:set>
-                                      <p:cBhvr>
-                                        <p:cTn id="37" dur="1" fill="hold">
-                                          <p:stCondLst>
-                                            <p:cond delay="0"/>
-                                          </p:stCondLst>
-                                        </p:cTn>
-                                        <p:tgtEl>
-                                          <p:spTgt spid="14"/>
-                                        </p:tgtEl>
-                                        <p:attrNameLst>
-                                          <p:attrName>style.visibility</p:attrName>
-                                        </p:attrNameLst>
-                                      </p:cBhvr>
-                                      <p:to>
-                                        <p:strVal val="visible"/>
-                                      </p:to>
-                                    </p:set>
-                                    <p:animEffect transition="in" filter="fade">
-                                      <p:cBhvr>
-                                        <p:cTn id="38" dur="450"/>
-                                        <p:tgtEl>
-                                          <p:spTgt spid="14"/>
-                                        </p:tgtEl>
-                                      </p:cBhvr>
-                                    </p:animEffect>
-                                  </p:childTnLst>
-                                </p:cTn>
-                              </p:par>
-                              <p:par>
-                                <p:cTn id="39" presetID="10" presetClass="entr" presetSubtype="0" fill="hold" grpId="0" nodeType="withEffect">
-                                  <p:stCondLst>
-                                    <p:cond delay="0"/>
-                                  </p:stCondLst>
-                                  <p:childTnLst>
-                                    <p:set>
-                                      <p:cBhvr>
-                                        <p:cTn id="40" dur="1" fill="hold">
-                                          <p:stCondLst>
-                                            <p:cond delay="0"/>
-                                          </p:stCondLst>
-                                        </p:cTn>
-                                        <p:tgtEl>
-                                          <p:spTgt spid="15"/>
-                                        </p:tgtEl>
-                                        <p:attrNameLst>
-                                          <p:attrName>style.visibility</p:attrName>
-                                        </p:attrNameLst>
-                                      </p:cBhvr>
-                                      <p:to>
-                                        <p:strVal val="visible"/>
-                                      </p:to>
-                                    </p:set>
-                                    <p:animEffect transition="in" filter="fade">
-                                      <p:cBhvr>
-                                        <p:cTn id="41" dur="450"/>
-                                        <p:tgtEl>
-                                          <p:spTgt spid="15"/>
-                                        </p:tgtEl>
-                                      </p:cBhvr>
-                                    </p:animEffect>
-                                  </p:childTnLst>
-                                </p:cTn>
-                              </p:par>
-                              <p:par>
-                                <p:cTn id="42" presetID="10" presetClass="entr" presetSubtype="0" fill="hold" grpId="0" nodeType="withEffect">
-                                  <p:stCondLst>
-                                    <p:cond delay="0"/>
-                                  </p:stCondLst>
-                                  <p:childTnLst>
-                                    <p:set>
-                                      <p:cBhvr>
-                                        <p:cTn id="43" dur="1" fill="hold">
-                                          <p:stCondLst>
-                                            <p:cond delay="0"/>
-                                          </p:stCondLst>
-                                        </p:cTn>
-                                        <p:tgtEl>
-                                          <p:spTgt spid="16"/>
-                                        </p:tgtEl>
-                                        <p:attrNameLst>
-                                          <p:attrName>style.visibility</p:attrName>
-                                        </p:attrNameLst>
-                                      </p:cBhvr>
-                                      <p:to>
-                                        <p:strVal val="visible"/>
-                                      </p:to>
-                                    </p:set>
-                                    <p:animEffect transition="in" filter="fade">
-                                      <p:cBhvr>
-                                        <p:cTn id="44" dur="450"/>
-                                        <p:tgtEl>
-                                          <p:spTgt spid="16"/>
-                                        </p:tgtEl>
-                                      </p:cBhvr>
-                                    </p:animEffect>
-                                  </p:childTnLst>
-                                </p:cTn>
-                              </p:par>
-                            </p:childTnLst>
-                          </p:cTn>
-                        </p:par>
-                      </p:childTnLst>
-                    </p:cTn>
-                  </p:par>
-                </p:childTnLst>
-              </p:cTn>
-              <p:prevCondLst>
-                <p:cond evt="onPrev" delay="0">
-                  <p:tgtEl>
-                    <p:sldTgt/>
-                  </p:tgtEl>
-                </p:cond>
-              </p:prevCondLst>
-              <p:nextCondLst>
-                <p:cond evt="onNext" delay="0">
-                  <p:tgtEl>
-                    <p:sldTgt/>
-                  </p:tgtEl>
-                </p:cond>
-              </p:nextCondLst>
-            </p:seq>
-          </p:childTnLst>
-        </p:cTn>
-      </p:par>
-    </p:tnLst>
-    <p:bldLst>
-      <p:bldP spid="4" grpId="0" animBg="1"/>
-      <p:bldP spid="5" grpId="0" animBg="1"/>
-      <p:bldP spid="6" grpId="0" animBg="1"/>
-      <p:bldP spid="7" grpId="0" animBg="1"/>
-      <p:bldP spid="8" grpId="0" animBg="1"/>
-      <p:bldP spid="9" grpId="0" animBg="1"/>
-      <p:bldP spid="10" grpId="0" animBg="1"/>
-      <p:bldP spid="11" grpId="0" animBg="1"/>
-      <p:bldP spid="12" grpId="0" animBg="1"/>
-      <p:bldP spid="13" grpId="0" animBg="1"/>
-      <p:bldP spid="14" grpId="0" animBg="1"/>
-      <p:bldP spid="15" grpId="0" animBg="1"/>
-      <p:bldP spid="16" grpId="0" animBg="1"/>
-    </p:bldLst>
-  </p:timing>
-</p:sld>
-</file>
-
-<file path=ppt/slides/slide11.xml><?xml version="1.0" encoding="utf-8"?>
-<p:sld xmlns:a="http://schemas.openxmlformats.org/drawingml/2006/main" xmlns:r="http://schemas.openxmlformats.org/officeDocument/2006/relationships" xmlns:p="http://schemas.openxmlformats.org/presentationml/2006/main">
-  <p:cSld name="Slide 11">
-    <p:spTree>
-      <p:nvGrpSpPr>
-        <p:cNvPr id="1" name=""/>
-        <p:cNvGrpSpPr/>
-        <p:nvPr/>
-      </p:nvGrpSpPr>
-      <p:grpSpPr>
-        <a:xfrm>
-          <a:off x="0" y="0"/>
-          <a:ext cx="0" cy="0"/>
-          <a:chOff x="0" y="0"/>
-          <a:chExt cx="0" cy="0"/>
-        </a:xfrm>
-      </p:grpSpPr>
-      <p:sp>
-        <p:nvSpPr>
-          <p:cNvPr id="2" name="criterion"/>
-          <p:cNvSpPr txBox="1"/>
-          <p:nvPr/>
-        </p:nvSpPr>
-        <p:spPr>
-          <a:xfrm>
-            <a:off x="548640" y="201168"/>
-            <a:ext cx="5486400" cy="256032"/>
-          </a:xfrm>
-          <a:prstGeom prst="rect">
-            <a:avLst/>
-          </a:prstGeom>
-          <a:noFill/>
-          <a:ln/>
-        </p:spPr>
-        <p:txBody>
-          <a:bodyPr wrap="square" lIns="0" tIns="0" rIns="0" bIns="0" rtlCol="0" anchor="t"/>
-          <a:lstStyle/>
-          <a:p>
-            <a:pPr indent="0" marL="0">
-              <a:buNone/>
-            </a:pPr>
-            <a:r>
-              <a:rPr lang="en-US" sz="1100" b="1" spc="200" kern="0" dirty="0">
-                <a:solidFill>
-                  <a:schemeClr val="accent3"/>
-                </a:solidFill>
-              </a:rPr>
               <a:t>STRATEGIC FIT</a:t>
             </a:r>
             <a:endParaRPr lang="en-US" sz="1100" dirty="0"/>
@@ -6410,9 +5203,9 @@
 </p:sld>
 </file>
 
-<file path=ppt/slides/slide12.xml><?xml version="1.0" encoding="utf-8"?>
+<file path=ppt/slides/slide11.xml><?xml version="1.0" encoding="utf-8"?>
 <p:sld xmlns:a="http://schemas.openxmlformats.org/drawingml/2006/main" xmlns:r="http://schemas.openxmlformats.org/officeDocument/2006/relationships" xmlns:p="http://schemas.openxmlformats.org/presentationml/2006/main">
-  <p:cSld name="Slide 12">
+  <p:cSld name="Slide 11">
     <p:spTree>
       <p:nvGrpSpPr>
         <p:cNvPr id="1" name=""/>
@@ -8164,7 +6957,7 @@
         <p:spPr>
           <a:xfrm>
             <a:off x="685800" y="1463040"/>
-            <a:ext cx="3383280" cy="685800"/>
+            <a:ext cx="3429000" cy="960120"/>
           </a:xfrm>
           <a:prstGeom prst="rect">
             <a:avLst/>
@@ -8924,7 +7717,7 @@
       </p:sp>
       <p:sp>
         <p:nvSpPr>
-          <p:cNvPr id="29" name="!!erm"/>
+          <p:cNvPr id="29" name="erm-cell"/>
           <p:cNvSpPr/>
           <p:nvPr/>
         </p:nvSpPr>
@@ -8951,7 +7744,7 @@
       </p:sp>
       <p:sp>
         <p:nvSpPr>
-          <p:cNvPr id="30" name="!!ermtext"/>
+          <p:cNvPr id="30" name="erm-cell-text"/>
           <p:cNvSpPr txBox="1"/>
           <p:nvPr/>
         </p:nvSpPr>
@@ -9057,7 +7850,7 @@
         <p:spPr>
           <a:xfrm>
             <a:off x="5349240" y="2788920"/>
-            <a:ext cx="1554480" cy="1143000"/>
+            <a:ext cx="1463040" cy="1143000"/>
           </a:xfrm>
           <a:prstGeom prst="roundRect">
             <a:avLst>
@@ -9079,7 +7872,7 @@
         <p:spPr>
           <a:xfrm>
             <a:off x="5394960" y="2788920"/>
-            <a:ext cx="1463040" cy="1143000"/>
+            <a:ext cx="1371600" cy="1143000"/>
           </a:xfrm>
           <a:prstGeom prst="rect">
             <a:avLst/>
@@ -9133,9 +7926,55 @@
           </a:ln>
         </p:spPr>
       </p:sp>
+      <p:sp>
+        <p:nvSpPr>
+          <p:cNvPr id="36" name="hub-link"/>
+          <p:cNvSpPr/>
+          <p:nvPr/>
+        </p:nvSpPr>
+        <p:spPr>
+          <a:xfrm>
+            <a:off x="6812280" y="3360420"/>
+            <a:ext cx="137160" cy="0"/>
+          </a:xfrm>
+          <a:prstGeom prst="line">
+            <a:avLst/>
+          </a:prstGeom>
+          <a:noFill/>
+          <a:ln w="19050">
+            <a:solidFill>
+              <a:schemeClr val="accent2"/>
+            </a:solidFill>
+            <a:prstDash val="sysDot"/>
+          </a:ln>
+        </p:spPr>
+      </p:sp>
+      <p:sp>
+        <p:nvSpPr>
+          <p:cNvPr id="37" name="spine"/>
+          <p:cNvSpPr/>
+          <p:nvPr/>
+        </p:nvSpPr>
+        <p:spPr>
+          <a:xfrm>
+            <a:off x="6949440" y="1737360"/>
+            <a:ext cx="0" cy="3063240"/>
+          </a:xfrm>
+          <a:prstGeom prst="line">
+            <a:avLst/>
+          </a:prstGeom>
+          <a:noFill/>
+          <a:ln w="19050">
+            <a:solidFill>
+              <a:schemeClr val="accent2"/>
+            </a:solidFill>
+            <a:prstDash val="sysDot"/>
+          </a:ln>
+        </p:spPr>
+      </p:sp>
       <p:pic>
         <p:nvPicPr>
-          <p:cNvPr id="36" name="sec-0-icon" descr="/tmp/claude-0/-home-user-archify/c55ec104-845e-5eb5-96c0-f59db47d1002/scratchpad/pptx3/icons/flask.png">    </p:cNvPr>
+          <p:cNvPr id="38" name="sec-0-icon" descr="/tmp/claude-0/-home-user-archify/c55ec104-845e-5eb5-96c0-f59db47d1002/scratchpad/pptx3/icons/flask.png">    </p:cNvPr>
           <p:cNvPicPr>
             <a:picLocks noChangeAspect="1"/>
           </p:cNvPicPr>
@@ -9159,14 +7998,14 @@
       </p:pic>
       <p:sp>
         <p:nvSpPr>
-          <p:cNvPr id="37" name="sec-0-head"/>
+          <p:cNvPr id="39" name="sec-0-head"/>
           <p:cNvSpPr txBox="1"/>
           <p:nvPr/>
         </p:nvSpPr>
         <p:spPr>
           <a:xfrm>
             <a:off x="8001000" y="1371600"/>
-            <a:ext cx="3703320" cy="685800"/>
+            <a:ext cx="3703320" cy="777240"/>
           </a:xfrm>
           <a:prstGeom prst="rect">
             <a:avLst/>
@@ -9209,14 +8048,14 @@
       </p:sp>
       <p:sp>
         <p:nvSpPr>
-          <p:cNvPr id="38" name="sec-0-link"/>
+          <p:cNvPr id="40" name="sec-0-link"/>
           <p:cNvSpPr/>
           <p:nvPr/>
         </p:nvSpPr>
         <p:spPr>
-          <a:xfrm flipV="1">
-            <a:off x="6903720" y="3355848"/>
-            <a:ext cx="320040" cy="-1618488"/>
+          <a:xfrm>
+            <a:off x="6949440" y="1737360"/>
+            <a:ext cx="274320" cy="0"/>
           </a:xfrm>
           <a:prstGeom prst="line">
             <a:avLst/>
@@ -9232,18 +8071,18 @@
       </p:sp>
       <p:sp>
         <p:nvSpPr>
-          <p:cNvPr id="39" name="sec-0-0-0"/>
+          <p:cNvPr id="41" name="sec-0-0-0"/>
           <p:cNvSpPr/>
           <p:nvPr/>
         </p:nvSpPr>
         <p:spPr>
           <a:xfrm>
-            <a:off x="8001000" y="2075688"/>
-            <a:ext cx="1188720" cy="402336"/>
+            <a:off x="8001000" y="2148840"/>
+            <a:ext cx="1197864" cy="420624"/>
           </a:xfrm>
           <a:prstGeom prst="roundRect">
             <a:avLst>
-              <a:gd name="adj" fmla="val 13636"/>
+              <a:gd name="adj" fmla="val 13043"/>
             </a:avLst>
           </a:prstGeom>
           <a:solidFill>
@@ -9259,14 +8098,14 @@
       </p:sp>
       <p:sp>
         <p:nvSpPr>
-          <p:cNvPr id="40" name="sec-0-0-0-text"/>
+          <p:cNvPr id="42" name="sec-0-0-0-text"/>
           <p:cNvSpPr txBox="1"/>
           <p:nvPr/>
         </p:nvSpPr>
         <p:spPr>
           <a:xfrm>
-            <a:off x="8001000" y="2075688"/>
-            <a:ext cx="1188720" cy="402336"/>
+            <a:off x="8001000" y="2148840"/>
+            <a:ext cx="1197864" cy="420624"/>
           </a:xfrm>
           <a:prstGeom prst="rect">
             <a:avLst/>
@@ -9295,18 +8134,18 @@
       </p:sp>
       <p:sp>
         <p:nvSpPr>
-          <p:cNvPr id="41" name="sec-0-0-1"/>
+          <p:cNvPr id="43" name="sec-0-0-1"/>
           <p:cNvSpPr/>
           <p:nvPr/>
         </p:nvSpPr>
         <p:spPr>
           <a:xfrm>
-            <a:off x="9244584" y="2075688"/>
-            <a:ext cx="1188720" cy="402336"/>
+            <a:off x="9253728" y="2148840"/>
+            <a:ext cx="1197864" cy="420624"/>
           </a:xfrm>
           <a:prstGeom prst="roundRect">
             <a:avLst>
-              <a:gd name="adj" fmla="val 13636"/>
+              <a:gd name="adj" fmla="val 13043"/>
             </a:avLst>
           </a:prstGeom>
           <a:solidFill>
@@ -9322,14 +8161,14 @@
       </p:sp>
       <p:sp>
         <p:nvSpPr>
-          <p:cNvPr id="42" name="sec-0-0-1-text"/>
+          <p:cNvPr id="44" name="sec-0-0-1-text"/>
           <p:cNvSpPr txBox="1"/>
           <p:nvPr/>
         </p:nvSpPr>
         <p:spPr>
           <a:xfrm>
-            <a:off x="9244584" y="2075688"/>
-            <a:ext cx="1188720" cy="402336"/>
+            <a:off x="9253728" y="2148840"/>
+            <a:ext cx="1197864" cy="420624"/>
           </a:xfrm>
           <a:prstGeom prst="rect">
             <a:avLst/>
@@ -9358,18 +8197,18 @@
       </p:sp>
       <p:sp>
         <p:nvSpPr>
-          <p:cNvPr id="43" name="sec-0-0-2"/>
+          <p:cNvPr id="45" name="sec-0-0-2"/>
           <p:cNvSpPr/>
           <p:nvPr/>
         </p:nvSpPr>
         <p:spPr>
           <a:xfrm>
-            <a:off x="10488168" y="2075688"/>
-            <a:ext cx="1188720" cy="402336"/>
+            <a:off x="10506456" y="2148840"/>
+            <a:ext cx="1197864" cy="420624"/>
           </a:xfrm>
           <a:prstGeom prst="roundRect">
             <a:avLst>
-              <a:gd name="adj" fmla="val 13636"/>
+              <a:gd name="adj" fmla="val 13043"/>
             </a:avLst>
           </a:prstGeom>
           <a:solidFill>
@@ -9385,14 +8224,14 @@
       </p:sp>
       <p:sp>
         <p:nvSpPr>
-          <p:cNvPr id="44" name="sec-0-0-2-text"/>
+          <p:cNvPr id="46" name="sec-0-0-2-text"/>
           <p:cNvSpPr txBox="1"/>
           <p:nvPr/>
         </p:nvSpPr>
         <p:spPr>
           <a:xfrm>
-            <a:off x="10488168" y="2075688"/>
-            <a:ext cx="1188720" cy="402336"/>
+            <a:off x="10506456" y="2148840"/>
+            <a:ext cx="1197864" cy="420624"/>
           </a:xfrm>
           <a:prstGeom prst="rect">
             <a:avLst/>
@@ -9421,18 +8260,18 @@
       </p:sp>
       <p:sp>
         <p:nvSpPr>
-          <p:cNvPr id="45" name="sec-0-1-0"/>
+          <p:cNvPr id="47" name="sec-0-1-0"/>
           <p:cNvSpPr/>
           <p:nvPr/>
         </p:nvSpPr>
         <p:spPr>
           <a:xfrm>
-            <a:off x="8001000" y="2523744"/>
-            <a:ext cx="1188720" cy="402336"/>
+            <a:off x="8001000" y="2624328"/>
+            <a:ext cx="1824228" cy="420624"/>
           </a:xfrm>
           <a:prstGeom prst="roundRect">
             <a:avLst>
-              <a:gd name="adj" fmla="val 13636"/>
+              <a:gd name="adj" fmla="val 13043"/>
             </a:avLst>
           </a:prstGeom>
           <a:solidFill>
@@ -9448,14 +8287,14 @@
       </p:sp>
       <p:sp>
         <p:nvSpPr>
-          <p:cNvPr id="46" name="sec-0-1-0-text"/>
+          <p:cNvPr id="48" name="sec-0-1-0-text"/>
           <p:cNvSpPr txBox="1"/>
           <p:nvPr/>
         </p:nvSpPr>
         <p:spPr>
           <a:xfrm>
-            <a:off x="8001000" y="2523744"/>
-            <a:ext cx="1188720" cy="402336"/>
+            <a:off x="8001000" y="2624328"/>
+            <a:ext cx="1824228" cy="420624"/>
           </a:xfrm>
           <a:prstGeom prst="rect">
             <a:avLst/>
@@ -9484,18 +8323,18 @@
       </p:sp>
       <p:sp>
         <p:nvSpPr>
-          <p:cNvPr id="47" name="sec-0-1-1"/>
+          <p:cNvPr id="49" name="sec-0-1-1"/>
           <p:cNvSpPr/>
           <p:nvPr/>
         </p:nvSpPr>
         <p:spPr>
           <a:xfrm>
-            <a:off x="9244584" y="2523744"/>
-            <a:ext cx="1188720" cy="402336"/>
+            <a:off x="9880092" y="2624328"/>
+            <a:ext cx="1824228" cy="420624"/>
           </a:xfrm>
           <a:prstGeom prst="roundRect">
             <a:avLst>
-              <a:gd name="adj" fmla="val 13636"/>
+              <a:gd name="adj" fmla="val 13043"/>
             </a:avLst>
           </a:prstGeom>
           <a:solidFill>
@@ -9511,14 +8350,14 @@
       </p:sp>
       <p:sp>
         <p:nvSpPr>
-          <p:cNvPr id="48" name="sec-0-1-1-text"/>
+          <p:cNvPr id="50" name="sec-0-1-1-text"/>
           <p:cNvSpPr txBox="1"/>
           <p:nvPr/>
         </p:nvSpPr>
         <p:spPr>
           <a:xfrm>
-            <a:off x="9244584" y="2523744"/>
-            <a:ext cx="1188720" cy="402336"/>
+            <a:off x="9880092" y="2624328"/>
+            <a:ext cx="1824228" cy="420624"/>
           </a:xfrm>
           <a:prstGeom prst="rect">
             <a:avLst/>
@@ -9547,7 +8386,7 @@
       </p:sp>
       <p:pic>
         <p:nvPicPr>
-          <p:cNvPr id="49" name="sec-1-icon" descr="/tmp/claude-0/-home-user-archify/c55ec104-845e-5eb5-96c0-f59db47d1002/scratchpad/pptx3/icons/leaf.png">    </p:cNvPr>
+          <p:cNvPr id="51" name="sec-1-icon" descr="/tmp/claude-0/-home-user-archify/c55ec104-845e-5eb5-96c0-f59db47d1002/scratchpad/pptx3/icons/leaf.png">    </p:cNvPr>
           <p:cNvPicPr>
             <a:picLocks noChangeAspect="1"/>
           </p:cNvPicPr>
@@ -9561,7 +8400,7 @@
         </p:blipFill>
         <p:spPr>
           <a:xfrm>
-            <a:off x="7223760" y="3108960"/>
+            <a:off x="7223760" y="3200400"/>
             <a:ext cx="640080" cy="640080"/>
           </a:xfrm>
           <a:prstGeom prst="rect">
@@ -9571,14 +8410,14 @@
       </p:pic>
       <p:sp>
         <p:nvSpPr>
-          <p:cNvPr id="50" name="sec-1-head"/>
+          <p:cNvPr id="52" name="sec-1-head"/>
           <p:cNvSpPr txBox="1"/>
           <p:nvPr/>
         </p:nvSpPr>
         <p:spPr>
           <a:xfrm>
-            <a:off x="8001000" y="3063240"/>
-            <a:ext cx="3703320" cy="685800"/>
+            <a:off x="8001000" y="3154680"/>
+            <a:ext cx="3703320" cy="777240"/>
           </a:xfrm>
           <a:prstGeom prst="rect">
             <a:avLst/>
@@ -9621,14 +8460,14 @@
       </p:sp>
       <p:sp>
         <p:nvSpPr>
-          <p:cNvPr id="51" name="sec-1-link"/>
+          <p:cNvPr id="53" name="sec-1-link"/>
           <p:cNvSpPr/>
           <p:nvPr/>
         </p:nvSpPr>
         <p:spPr>
           <a:xfrm>
-            <a:off x="6903720" y="3355848"/>
-            <a:ext cx="320040" cy="73152"/>
+            <a:off x="6949440" y="3520440"/>
+            <a:ext cx="274320" cy="0"/>
           </a:xfrm>
           <a:prstGeom prst="line">
             <a:avLst/>
@@ -9644,18 +8483,18 @@
       </p:sp>
       <p:sp>
         <p:nvSpPr>
-          <p:cNvPr id="52" name="sec-1-0-0"/>
+          <p:cNvPr id="54" name="sec-1-0-0"/>
           <p:cNvSpPr/>
           <p:nvPr/>
         </p:nvSpPr>
         <p:spPr>
           <a:xfrm>
-            <a:off x="8001000" y="3767328"/>
-            <a:ext cx="1188720" cy="402336"/>
+            <a:off x="8001000" y="3931920"/>
+            <a:ext cx="1197864" cy="420624"/>
           </a:xfrm>
           <a:prstGeom prst="roundRect">
             <a:avLst>
-              <a:gd name="adj" fmla="val 13636"/>
+              <a:gd name="adj" fmla="val 13043"/>
             </a:avLst>
           </a:prstGeom>
           <a:solidFill>
@@ -9671,14 +8510,14 @@
       </p:sp>
       <p:sp>
         <p:nvSpPr>
-          <p:cNvPr id="53" name="sec-1-0-0-text"/>
+          <p:cNvPr id="55" name="sec-1-0-0-text"/>
           <p:cNvSpPr txBox="1"/>
           <p:nvPr/>
         </p:nvSpPr>
         <p:spPr>
           <a:xfrm>
-            <a:off x="8001000" y="3767328"/>
-            <a:ext cx="1188720" cy="402336"/>
+            <a:off x="8001000" y="3931920"/>
+            <a:ext cx="1197864" cy="420624"/>
           </a:xfrm>
           <a:prstGeom prst="rect">
             <a:avLst/>
@@ -9707,18 +8546,18 @@
       </p:sp>
       <p:sp>
         <p:nvSpPr>
-          <p:cNvPr id="54" name="sec-1-0-1"/>
+          <p:cNvPr id="56" name="sec-1-0-1"/>
           <p:cNvSpPr/>
           <p:nvPr/>
         </p:nvSpPr>
         <p:spPr>
           <a:xfrm>
-            <a:off x="9244584" y="3767328"/>
-            <a:ext cx="1188720" cy="402336"/>
+            <a:off x="9253728" y="3931920"/>
+            <a:ext cx="1197864" cy="420624"/>
           </a:xfrm>
           <a:prstGeom prst="roundRect">
             <a:avLst>
-              <a:gd name="adj" fmla="val 13636"/>
+              <a:gd name="adj" fmla="val 13043"/>
             </a:avLst>
           </a:prstGeom>
           <a:solidFill>
@@ -9734,14 +8573,14 @@
       </p:sp>
       <p:sp>
         <p:nvSpPr>
-          <p:cNvPr id="55" name="sec-1-0-1-text"/>
+          <p:cNvPr id="57" name="sec-1-0-1-text"/>
           <p:cNvSpPr txBox="1"/>
           <p:nvPr/>
         </p:nvSpPr>
         <p:spPr>
           <a:xfrm>
-            <a:off x="9244584" y="3767328"/>
-            <a:ext cx="1188720" cy="402336"/>
+            <a:off x="9253728" y="3931920"/>
+            <a:ext cx="1197864" cy="420624"/>
           </a:xfrm>
           <a:prstGeom prst="rect">
             <a:avLst/>
@@ -9770,18 +8609,18 @@
       </p:sp>
       <p:sp>
         <p:nvSpPr>
-          <p:cNvPr id="56" name="sec-1-0-2"/>
+          <p:cNvPr id="58" name="sec-1-0-2"/>
           <p:cNvSpPr/>
           <p:nvPr/>
         </p:nvSpPr>
         <p:spPr>
           <a:xfrm>
-            <a:off x="10488168" y="3767328"/>
-            <a:ext cx="1188720" cy="402336"/>
+            <a:off x="10506456" y="3931920"/>
+            <a:ext cx="1197864" cy="420624"/>
           </a:xfrm>
           <a:prstGeom prst="roundRect">
             <a:avLst>
-              <a:gd name="adj" fmla="val 13636"/>
+              <a:gd name="adj" fmla="val 13043"/>
             </a:avLst>
           </a:prstGeom>
           <a:solidFill>
@@ -9797,14 +8636,14 @@
       </p:sp>
       <p:sp>
         <p:nvSpPr>
-          <p:cNvPr id="57" name="sec-1-0-2-text"/>
+          <p:cNvPr id="59" name="sec-1-0-2-text"/>
           <p:cNvSpPr txBox="1"/>
           <p:nvPr/>
         </p:nvSpPr>
         <p:spPr>
           <a:xfrm>
-            <a:off x="10488168" y="3767328"/>
-            <a:ext cx="1188720" cy="402336"/>
+            <a:off x="10506456" y="3931920"/>
+            <a:ext cx="1197864" cy="420624"/>
           </a:xfrm>
           <a:prstGeom prst="rect">
             <a:avLst/>
@@ -9833,7 +8672,7 @@
       </p:sp>
       <p:pic>
         <p:nvPicPr>
-          <p:cNvPr id="58" name="sec-2-icon" descr="/tmp/claude-0/-home-user-archify/c55ec104-845e-5eb5-96c0-f59db47d1002/scratchpad/pptx3/icons/energy.png">    </p:cNvPr>
+          <p:cNvPr id="60" name="sec-2-icon" descr="/tmp/claude-0/-home-user-archify/c55ec104-845e-5eb5-96c0-f59db47d1002/scratchpad/pptx3/icons/energy.png">    </p:cNvPr>
           <p:cNvPicPr>
             <a:picLocks noChangeAspect="1"/>
           </p:cNvPicPr>
@@ -9847,7 +8686,7 @@
         </p:blipFill>
         <p:spPr>
           <a:xfrm>
-            <a:off x="7223760" y="4434840"/>
+            <a:off x="7223760" y="4480560"/>
             <a:ext cx="640080" cy="640080"/>
           </a:xfrm>
           <a:prstGeom prst="rect">
@@ -9857,14 +8696,14 @@
       </p:pic>
       <p:sp>
         <p:nvSpPr>
-          <p:cNvPr id="59" name="sec-2-head"/>
+          <p:cNvPr id="61" name="sec-2-head"/>
           <p:cNvSpPr txBox="1"/>
           <p:nvPr/>
         </p:nvSpPr>
         <p:spPr>
           <a:xfrm>
-            <a:off x="8001000" y="4389120"/>
-            <a:ext cx="3703320" cy="685800"/>
+            <a:off x="8001000" y="4434840"/>
+            <a:ext cx="3703320" cy="777240"/>
           </a:xfrm>
           <a:prstGeom prst="rect">
             <a:avLst/>
@@ -9907,14 +8746,14 @@
       </p:sp>
       <p:sp>
         <p:nvSpPr>
-          <p:cNvPr id="60" name="sec-2-link"/>
+          <p:cNvPr id="62" name="sec-2-link"/>
           <p:cNvSpPr/>
           <p:nvPr/>
         </p:nvSpPr>
         <p:spPr>
           <a:xfrm>
-            <a:off x="6903720" y="3355848"/>
-            <a:ext cx="320040" cy="1399032"/>
+            <a:off x="6949440" y="4800600"/>
+            <a:ext cx="274320" cy="0"/>
           </a:xfrm>
           <a:prstGeom prst="line">
             <a:avLst/>
@@ -9930,18 +8769,18 @@
       </p:sp>
       <p:sp>
         <p:nvSpPr>
-          <p:cNvPr id="61" name="sec-2-0-0"/>
+          <p:cNvPr id="63" name="sec-2-0-0"/>
           <p:cNvSpPr/>
           <p:nvPr/>
         </p:nvSpPr>
         <p:spPr>
           <a:xfrm>
-            <a:off x="8001000" y="5093208"/>
-            <a:ext cx="1188720" cy="402336"/>
+            <a:off x="8001000" y="5212080"/>
+            <a:ext cx="1824228" cy="420624"/>
           </a:xfrm>
           <a:prstGeom prst="roundRect">
             <a:avLst>
-              <a:gd name="adj" fmla="val 13636"/>
+              <a:gd name="adj" fmla="val 13043"/>
             </a:avLst>
           </a:prstGeom>
           <a:solidFill>
@@ -9957,14 +8796,14 @@
       </p:sp>
       <p:sp>
         <p:nvSpPr>
-          <p:cNvPr id="62" name="sec-2-0-0-text"/>
+          <p:cNvPr id="64" name="sec-2-0-0-text"/>
           <p:cNvSpPr txBox="1"/>
           <p:nvPr/>
         </p:nvSpPr>
         <p:spPr>
           <a:xfrm>
-            <a:off x="8001000" y="5093208"/>
-            <a:ext cx="1188720" cy="402336"/>
+            <a:off x="8001000" y="5212080"/>
+            <a:ext cx="1824228" cy="420624"/>
           </a:xfrm>
           <a:prstGeom prst="rect">
             <a:avLst/>
@@ -9993,18 +8832,18 @@
       </p:sp>
       <p:sp>
         <p:nvSpPr>
-          <p:cNvPr id="63" name="sec-2-0-1"/>
+          <p:cNvPr id="65" name="sec-2-0-1"/>
           <p:cNvSpPr/>
           <p:nvPr/>
         </p:nvSpPr>
         <p:spPr>
           <a:xfrm>
-            <a:off x="9244584" y="5093208"/>
-            <a:ext cx="1188720" cy="402336"/>
+            <a:off x="9880092" y="5212080"/>
+            <a:ext cx="1824228" cy="420624"/>
           </a:xfrm>
           <a:prstGeom prst="roundRect">
             <a:avLst>
-              <a:gd name="adj" fmla="val 13636"/>
+              <a:gd name="adj" fmla="val 13043"/>
             </a:avLst>
           </a:prstGeom>
           <a:solidFill>
@@ -10020,14 +8859,14 @@
       </p:sp>
       <p:sp>
         <p:nvSpPr>
-          <p:cNvPr id="64" name="sec-2-0-1-text"/>
+          <p:cNvPr id="66" name="sec-2-0-1-text"/>
           <p:cNvSpPr txBox="1"/>
           <p:nvPr/>
         </p:nvSpPr>
         <p:spPr>
           <a:xfrm>
-            <a:off x="9244584" y="5093208"/>
-            <a:ext cx="1188720" cy="402336"/>
+            <a:off x="9880092" y="5212080"/>
+            <a:ext cx="1824228" cy="420624"/>
           </a:xfrm>
           <a:prstGeom prst="rect">
             <a:avLst/>
@@ -10056,7 +8895,7 @@
       </p:sp>
       <p:pic>
         <p:nvPicPr>
-          <p:cNvPr id="65" name="run-icon" descr="/tmp/claude-0/-home-user-archify/c55ec104-845e-5eb5-96c0-f59db47d1002/scratchpad/pptx3/icons/cycle.png">    </p:cNvPr>
+          <p:cNvPr id="67" name="run-icon" descr="/tmp/claude-0/-home-user-archify/c55ec104-845e-5eb5-96c0-f59db47d1002/scratchpad/pptx3/icons/cycle.png">    </p:cNvPr>
           <p:cNvPicPr>
             <a:picLocks noChangeAspect="1"/>
           </p:cNvPicPr>
@@ -10080,7 +8919,7 @@
       </p:pic>
       <p:sp>
         <p:nvSpPr>
-          <p:cNvPr id="66" name="run-head"/>
+          <p:cNvPr id="68" name="run-head"/>
           <p:cNvSpPr txBox="1"/>
           <p:nvPr/>
         </p:nvSpPr>
@@ -10116,7 +8955,7 @@
       </p:sp>
       <p:sp>
         <p:nvSpPr>
-          <p:cNvPr id="67" name="run-0"/>
+          <p:cNvPr id="69" name="run-0"/>
           <p:cNvSpPr/>
           <p:nvPr/>
         </p:nvSpPr>
@@ -10143,7 +8982,7 @@
       </p:sp>
       <p:sp>
         <p:nvSpPr>
-          <p:cNvPr id="68" name="run-0-text"/>
+          <p:cNvPr id="70" name="run-0-text"/>
           <p:cNvSpPr txBox="1"/>
           <p:nvPr/>
         </p:nvSpPr>
@@ -10179,7 +9018,7 @@
       </p:sp>
       <p:sp>
         <p:nvSpPr>
-          <p:cNvPr id="69" name="run-1"/>
+          <p:cNvPr id="71" name="run-1"/>
           <p:cNvSpPr/>
           <p:nvPr/>
         </p:nvSpPr>
@@ -10206,7 +9045,7 @@
       </p:sp>
       <p:sp>
         <p:nvSpPr>
-          <p:cNvPr id="70" name="run-1-text"/>
+          <p:cNvPr id="72" name="run-1-text"/>
           <p:cNvSpPr txBox="1"/>
           <p:nvPr/>
         </p:nvSpPr>
@@ -10242,7 +9081,7 @@
       </p:sp>
       <p:sp>
         <p:nvSpPr>
-          <p:cNvPr id="71" name="run-2"/>
+          <p:cNvPr id="73" name="run-2"/>
           <p:cNvSpPr/>
           <p:nvPr/>
         </p:nvSpPr>
@@ -10269,7 +9108,7 @@
       </p:sp>
       <p:sp>
         <p:nvSpPr>
-          <p:cNvPr id="72" name="run-2-text"/>
+          <p:cNvPr id="74" name="run-2-text"/>
           <p:cNvSpPr txBox="1"/>
           <p:nvPr/>
         </p:nvSpPr>
@@ -10441,7 +9280,7 @@
         <p:spPr>
           <a:xfrm>
             <a:off x="685800" y="1463040"/>
-            <a:ext cx="3383280" cy="685800"/>
+            <a:ext cx="3429000" cy="960120"/>
           </a:xfrm>
           <a:prstGeom prst="rect">
             <a:avLst/>
@@ -11271,7 +10110,7 @@
         <p:spPr>
           <a:xfrm>
             <a:off x="5349240" y="2788920"/>
-            <a:ext cx="1554480" cy="1143000"/>
+            <a:ext cx="1463040" cy="1143000"/>
           </a:xfrm>
           <a:prstGeom prst="roundRect">
             <a:avLst>
@@ -11293,7 +10132,7 @@
         <p:spPr>
           <a:xfrm>
             <a:off x="5394960" y="2788920"/>
-            <a:ext cx="1463040" cy="1143000"/>
+            <a:ext cx="1371600" cy="1143000"/>
           </a:xfrm>
           <a:prstGeom prst="rect">
             <a:avLst/>
@@ -11347,9 +10186,55 @@
           </a:ln>
         </p:spPr>
       </p:sp>
+      <p:sp>
+        <p:nvSpPr>
+          <p:cNvPr id="36" name="hub-link"/>
+          <p:cNvSpPr/>
+          <p:nvPr/>
+        </p:nvSpPr>
+        <p:spPr>
+          <a:xfrm>
+            <a:off x="6812280" y="3360420"/>
+            <a:ext cx="137160" cy="0"/>
+          </a:xfrm>
+          <a:prstGeom prst="line">
+            <a:avLst/>
+          </a:prstGeom>
+          <a:noFill/>
+          <a:ln w="19050">
+            <a:solidFill>
+              <a:schemeClr val="accent2"/>
+            </a:solidFill>
+            <a:prstDash val="sysDot"/>
+          </a:ln>
+        </p:spPr>
+      </p:sp>
+      <p:sp>
+        <p:nvSpPr>
+          <p:cNvPr id="37" name="spine"/>
+          <p:cNvSpPr/>
+          <p:nvPr/>
+        </p:nvSpPr>
+        <p:spPr>
+          <a:xfrm>
+            <a:off x="6949440" y="1737360"/>
+            <a:ext cx="0" cy="3063240"/>
+          </a:xfrm>
+          <a:prstGeom prst="line">
+            <a:avLst/>
+          </a:prstGeom>
+          <a:noFill/>
+          <a:ln w="19050">
+            <a:solidFill>
+              <a:schemeClr val="accent2"/>
+            </a:solidFill>
+            <a:prstDash val="sysDot"/>
+          </a:ln>
+        </p:spPr>
+      </p:sp>
       <p:pic>
         <p:nvPicPr>
-          <p:cNvPr id="36" name="sec-0-icon" descr="/tmp/claude-0/-home-user-archify/c55ec104-845e-5eb5-96c0-f59db47d1002/scratchpad/pptx3/icons/flask.png">    </p:cNvPr>
+          <p:cNvPr id="38" name="sec-0-icon" descr="/tmp/claude-0/-home-user-archify/c55ec104-845e-5eb5-96c0-f59db47d1002/scratchpad/pptx3/icons/flask.png">    </p:cNvPr>
           <p:cNvPicPr>
             <a:picLocks noChangeAspect="1"/>
           </p:cNvPicPr>
@@ -11373,14 +10258,14 @@
       </p:pic>
       <p:sp>
         <p:nvSpPr>
-          <p:cNvPr id="37" name="sec-0-head"/>
+          <p:cNvPr id="39" name="sec-0-head"/>
           <p:cNvSpPr txBox="1"/>
           <p:nvPr/>
         </p:nvSpPr>
         <p:spPr>
           <a:xfrm>
             <a:off x="8001000" y="1371600"/>
-            <a:ext cx="3703320" cy="685800"/>
+            <a:ext cx="3703320" cy="777240"/>
           </a:xfrm>
           <a:prstGeom prst="rect">
             <a:avLst/>
@@ -11423,14 +10308,14 @@
       </p:sp>
       <p:sp>
         <p:nvSpPr>
-          <p:cNvPr id="38" name="sec-0-link"/>
+          <p:cNvPr id="40" name="sec-0-link"/>
           <p:cNvSpPr/>
           <p:nvPr/>
         </p:nvSpPr>
         <p:spPr>
-          <a:xfrm flipV="1">
-            <a:off x="6903720" y="3355848"/>
-            <a:ext cx="320040" cy="-1618488"/>
+          <a:xfrm>
+            <a:off x="6949440" y="1737360"/>
+            <a:ext cx="274320" cy="0"/>
           </a:xfrm>
           <a:prstGeom prst="line">
             <a:avLst/>
@@ -11446,18 +10331,18 @@
       </p:sp>
       <p:sp>
         <p:nvSpPr>
-          <p:cNvPr id="39" name="sec-0-0-0"/>
+          <p:cNvPr id="41" name="sec-0-0-0"/>
           <p:cNvSpPr/>
           <p:nvPr/>
         </p:nvSpPr>
         <p:spPr>
           <a:xfrm>
-            <a:off x="8001000" y="2075688"/>
-            <a:ext cx="1188720" cy="402336"/>
+            <a:off x="8001000" y="2148840"/>
+            <a:ext cx="1197864" cy="420624"/>
           </a:xfrm>
           <a:prstGeom prst="roundRect">
             <a:avLst>
-              <a:gd name="adj" fmla="val 13636"/>
+              <a:gd name="adj" fmla="val 13043"/>
             </a:avLst>
           </a:prstGeom>
           <a:solidFill>
@@ -11473,14 +10358,14 @@
       </p:sp>
       <p:sp>
         <p:nvSpPr>
-          <p:cNvPr id="40" name="sec-0-0-0-text"/>
+          <p:cNvPr id="42" name="sec-0-0-0-text"/>
           <p:cNvSpPr txBox="1"/>
           <p:nvPr/>
         </p:nvSpPr>
         <p:spPr>
           <a:xfrm>
-            <a:off x="8001000" y="2075688"/>
-            <a:ext cx="1188720" cy="402336"/>
+            <a:off x="8001000" y="2148840"/>
+            <a:ext cx="1197864" cy="420624"/>
           </a:xfrm>
           <a:prstGeom prst="rect">
             <a:avLst/>
@@ -11509,18 +10394,18 @@
       </p:sp>
       <p:sp>
         <p:nvSpPr>
-          <p:cNvPr id="41" name="sec-0-0-1"/>
+          <p:cNvPr id="43" name="sec-0-0-1"/>
           <p:cNvSpPr/>
           <p:nvPr/>
         </p:nvSpPr>
         <p:spPr>
           <a:xfrm>
-            <a:off x="9244584" y="2075688"/>
-            <a:ext cx="1188720" cy="402336"/>
+            <a:off x="9253728" y="2148840"/>
+            <a:ext cx="1197864" cy="420624"/>
           </a:xfrm>
           <a:prstGeom prst="roundRect">
             <a:avLst>
-              <a:gd name="adj" fmla="val 13636"/>
+              <a:gd name="adj" fmla="val 13043"/>
             </a:avLst>
           </a:prstGeom>
           <a:solidFill>
@@ -11536,14 +10421,14 @@
       </p:sp>
       <p:sp>
         <p:nvSpPr>
-          <p:cNvPr id="42" name="sec-0-0-1-text"/>
+          <p:cNvPr id="44" name="sec-0-0-1-text"/>
           <p:cNvSpPr txBox="1"/>
           <p:nvPr/>
         </p:nvSpPr>
         <p:spPr>
           <a:xfrm>
-            <a:off x="9244584" y="2075688"/>
-            <a:ext cx="1188720" cy="402336"/>
+            <a:off x="9253728" y="2148840"/>
+            <a:ext cx="1197864" cy="420624"/>
           </a:xfrm>
           <a:prstGeom prst="rect">
             <a:avLst/>
@@ -11572,18 +10457,18 @@
       </p:sp>
       <p:sp>
         <p:nvSpPr>
-          <p:cNvPr id="43" name="sec-0-0-2"/>
+          <p:cNvPr id="45" name="sec-0-0-2"/>
           <p:cNvSpPr/>
           <p:nvPr/>
         </p:nvSpPr>
         <p:spPr>
           <a:xfrm>
-            <a:off x="10488168" y="2075688"/>
-            <a:ext cx="1188720" cy="402336"/>
+            <a:off x="10506456" y="2148840"/>
+            <a:ext cx="1197864" cy="420624"/>
           </a:xfrm>
           <a:prstGeom prst="roundRect">
             <a:avLst>
-              <a:gd name="adj" fmla="val 13636"/>
+              <a:gd name="adj" fmla="val 13043"/>
             </a:avLst>
           </a:prstGeom>
           <a:solidFill>
@@ -11599,14 +10484,14 @@
       </p:sp>
       <p:sp>
         <p:nvSpPr>
-          <p:cNvPr id="44" name="sec-0-0-2-text"/>
+          <p:cNvPr id="46" name="sec-0-0-2-text"/>
           <p:cNvSpPr txBox="1"/>
           <p:nvPr/>
         </p:nvSpPr>
         <p:spPr>
           <a:xfrm>
-            <a:off x="10488168" y="2075688"/>
-            <a:ext cx="1188720" cy="402336"/>
+            <a:off x="10506456" y="2148840"/>
+            <a:ext cx="1197864" cy="420624"/>
           </a:xfrm>
           <a:prstGeom prst="rect">
             <a:avLst/>
@@ -11635,18 +10520,18 @@
       </p:sp>
       <p:sp>
         <p:nvSpPr>
-          <p:cNvPr id="45" name="sec-0-1-0"/>
+          <p:cNvPr id="47" name="sec-0-1-0"/>
           <p:cNvSpPr/>
           <p:nvPr/>
         </p:nvSpPr>
         <p:spPr>
           <a:xfrm>
-            <a:off x="8001000" y="2523744"/>
-            <a:ext cx="1188720" cy="402336"/>
+            <a:off x="8001000" y="2624328"/>
+            <a:ext cx="1824228" cy="420624"/>
           </a:xfrm>
           <a:prstGeom prst="roundRect">
             <a:avLst>
-              <a:gd name="adj" fmla="val 13636"/>
+              <a:gd name="adj" fmla="val 13043"/>
             </a:avLst>
           </a:prstGeom>
           <a:solidFill>
@@ -11662,14 +10547,14 @@
       </p:sp>
       <p:sp>
         <p:nvSpPr>
-          <p:cNvPr id="46" name="sec-0-1-0-text"/>
+          <p:cNvPr id="48" name="sec-0-1-0-text"/>
           <p:cNvSpPr txBox="1"/>
           <p:nvPr/>
         </p:nvSpPr>
         <p:spPr>
           <a:xfrm>
-            <a:off x="8001000" y="2523744"/>
-            <a:ext cx="1188720" cy="402336"/>
+            <a:off x="8001000" y="2624328"/>
+            <a:ext cx="1824228" cy="420624"/>
           </a:xfrm>
           <a:prstGeom prst="rect">
             <a:avLst/>
@@ -11698,18 +10583,18 @@
       </p:sp>
       <p:sp>
         <p:nvSpPr>
-          <p:cNvPr id="47" name="sec-0-1-1"/>
+          <p:cNvPr id="49" name="sec-0-1-1"/>
           <p:cNvSpPr/>
           <p:nvPr/>
         </p:nvSpPr>
         <p:spPr>
           <a:xfrm>
-            <a:off x="9244584" y="2523744"/>
-            <a:ext cx="1188720" cy="402336"/>
+            <a:off x="9880092" y="2624328"/>
+            <a:ext cx="1824228" cy="420624"/>
           </a:xfrm>
           <a:prstGeom prst="roundRect">
             <a:avLst>
-              <a:gd name="adj" fmla="val 13636"/>
+              <a:gd name="adj" fmla="val 13043"/>
             </a:avLst>
           </a:prstGeom>
           <a:solidFill>
@@ -11725,14 +10610,14 @@
       </p:sp>
       <p:sp>
         <p:nvSpPr>
-          <p:cNvPr id="48" name="sec-0-1-1-text"/>
+          <p:cNvPr id="50" name="sec-0-1-1-text"/>
           <p:cNvSpPr txBox="1"/>
           <p:nvPr/>
         </p:nvSpPr>
         <p:spPr>
           <a:xfrm>
-            <a:off x="9244584" y="2523744"/>
-            <a:ext cx="1188720" cy="402336"/>
+            <a:off x="9880092" y="2624328"/>
+            <a:ext cx="1824228" cy="420624"/>
           </a:xfrm>
           <a:prstGeom prst="rect">
             <a:avLst/>
@@ -11761,7 +10646,7 @@
       </p:sp>
       <p:pic>
         <p:nvPicPr>
-          <p:cNvPr id="49" name="sec-1-icon" descr="/tmp/claude-0/-home-user-archify/c55ec104-845e-5eb5-96c0-f59db47d1002/scratchpad/pptx3/icons/leaf.png">    </p:cNvPr>
+          <p:cNvPr id="51" name="sec-1-icon" descr="/tmp/claude-0/-home-user-archify/c55ec104-845e-5eb5-96c0-f59db47d1002/scratchpad/pptx3/icons/leaf.png">    </p:cNvPr>
           <p:cNvPicPr>
             <a:picLocks noChangeAspect="1"/>
           </p:cNvPicPr>
@@ -11775,7 +10660,7 @@
         </p:blipFill>
         <p:spPr>
           <a:xfrm>
-            <a:off x="7223760" y="3108960"/>
+            <a:off x="7223760" y="3200400"/>
             <a:ext cx="640080" cy="640080"/>
           </a:xfrm>
           <a:prstGeom prst="rect">
@@ -11785,14 +10670,14 @@
       </p:pic>
       <p:sp>
         <p:nvSpPr>
-          <p:cNvPr id="50" name="sec-1-head"/>
+          <p:cNvPr id="52" name="sec-1-head"/>
           <p:cNvSpPr txBox="1"/>
           <p:nvPr/>
         </p:nvSpPr>
         <p:spPr>
           <a:xfrm>
-            <a:off x="8001000" y="3063240"/>
-            <a:ext cx="3703320" cy="685800"/>
+            <a:off x="8001000" y="3154680"/>
+            <a:ext cx="3703320" cy="777240"/>
           </a:xfrm>
           <a:prstGeom prst="rect">
             <a:avLst/>
@@ -11835,14 +10720,14 @@
       </p:sp>
       <p:sp>
         <p:nvSpPr>
-          <p:cNvPr id="51" name="sec-1-link"/>
+          <p:cNvPr id="53" name="sec-1-link"/>
           <p:cNvSpPr/>
           <p:nvPr/>
         </p:nvSpPr>
         <p:spPr>
           <a:xfrm>
-            <a:off x="6903720" y="3355848"/>
-            <a:ext cx="320040" cy="73152"/>
+            <a:off x="6949440" y="3520440"/>
+            <a:ext cx="274320" cy="0"/>
           </a:xfrm>
           <a:prstGeom prst="line">
             <a:avLst/>
@@ -11858,18 +10743,18 @@
       </p:sp>
       <p:sp>
         <p:nvSpPr>
-          <p:cNvPr id="52" name="sec-1-0-0"/>
+          <p:cNvPr id="54" name="sec-1-0-0"/>
           <p:cNvSpPr/>
           <p:nvPr/>
         </p:nvSpPr>
         <p:spPr>
           <a:xfrm>
-            <a:off x="8001000" y="3767328"/>
-            <a:ext cx="1188720" cy="402336"/>
+            <a:off x="8001000" y="3931920"/>
+            <a:ext cx="1197864" cy="420624"/>
           </a:xfrm>
           <a:prstGeom prst="roundRect">
             <a:avLst>
-              <a:gd name="adj" fmla="val 13636"/>
+              <a:gd name="adj" fmla="val 13043"/>
             </a:avLst>
           </a:prstGeom>
           <a:solidFill>
@@ -11885,14 +10770,14 @@
       </p:sp>
       <p:sp>
         <p:nvSpPr>
-          <p:cNvPr id="53" name="sec-1-0-0-text"/>
+          <p:cNvPr id="55" name="sec-1-0-0-text"/>
           <p:cNvSpPr txBox="1"/>
           <p:nvPr/>
         </p:nvSpPr>
         <p:spPr>
           <a:xfrm>
-            <a:off x="8001000" y="3767328"/>
-            <a:ext cx="1188720" cy="402336"/>
+            <a:off x="8001000" y="3931920"/>
+            <a:ext cx="1197864" cy="420624"/>
           </a:xfrm>
           <a:prstGeom prst="rect">
             <a:avLst/>
@@ -11921,18 +10806,18 @@
       </p:sp>
       <p:sp>
         <p:nvSpPr>
-          <p:cNvPr id="54" name="sec-1-0-1"/>
+          <p:cNvPr id="56" name="sec-1-0-1"/>
           <p:cNvSpPr/>
           <p:nvPr/>
         </p:nvSpPr>
         <p:spPr>
           <a:xfrm>
-            <a:off x="9244584" y="3767328"/>
-            <a:ext cx="1188720" cy="402336"/>
+            <a:off x="9253728" y="3931920"/>
+            <a:ext cx="1197864" cy="420624"/>
           </a:xfrm>
           <a:prstGeom prst="roundRect">
             <a:avLst>
-              <a:gd name="adj" fmla="val 13636"/>
+              <a:gd name="adj" fmla="val 13043"/>
             </a:avLst>
           </a:prstGeom>
           <a:solidFill>
@@ -11948,14 +10833,14 @@
       </p:sp>
       <p:sp>
         <p:nvSpPr>
-          <p:cNvPr id="55" name="sec-1-0-1-text"/>
+          <p:cNvPr id="57" name="sec-1-0-1-text"/>
           <p:cNvSpPr txBox="1"/>
           <p:nvPr/>
         </p:nvSpPr>
         <p:spPr>
           <a:xfrm>
-            <a:off x="9244584" y="3767328"/>
-            <a:ext cx="1188720" cy="402336"/>
+            <a:off x="9253728" y="3931920"/>
+            <a:ext cx="1197864" cy="420624"/>
           </a:xfrm>
           <a:prstGeom prst="rect">
             <a:avLst/>
@@ -11984,18 +10869,18 @@
       </p:sp>
       <p:sp>
         <p:nvSpPr>
-          <p:cNvPr id="56" name="sec-1-0-2"/>
+          <p:cNvPr id="58" name="sec-1-0-2"/>
           <p:cNvSpPr/>
           <p:nvPr/>
         </p:nvSpPr>
         <p:spPr>
           <a:xfrm>
-            <a:off x="10488168" y="3767328"/>
-            <a:ext cx="1188720" cy="402336"/>
+            <a:off x="10506456" y="3931920"/>
+            <a:ext cx="1197864" cy="420624"/>
           </a:xfrm>
           <a:prstGeom prst="roundRect">
             <a:avLst>
-              <a:gd name="adj" fmla="val 13636"/>
+              <a:gd name="adj" fmla="val 13043"/>
             </a:avLst>
           </a:prstGeom>
           <a:solidFill>
@@ -12011,14 +10896,14 @@
       </p:sp>
       <p:sp>
         <p:nvSpPr>
-          <p:cNvPr id="57" name="sec-1-0-2-text"/>
+          <p:cNvPr id="59" name="sec-1-0-2-text"/>
           <p:cNvSpPr txBox="1"/>
           <p:nvPr/>
         </p:nvSpPr>
         <p:spPr>
           <a:xfrm>
-            <a:off x="10488168" y="3767328"/>
-            <a:ext cx="1188720" cy="402336"/>
+            <a:off x="10506456" y="3931920"/>
+            <a:ext cx="1197864" cy="420624"/>
           </a:xfrm>
           <a:prstGeom prst="rect">
             <a:avLst/>
@@ -12047,7 +10932,7 @@
       </p:sp>
       <p:pic>
         <p:nvPicPr>
-          <p:cNvPr id="58" name="sec-2-icon" descr="/tmp/claude-0/-home-user-archify/c55ec104-845e-5eb5-96c0-f59db47d1002/scratchpad/pptx3/icons/energy.png">    </p:cNvPr>
+          <p:cNvPr id="60" name="sec-2-icon" descr="/tmp/claude-0/-home-user-archify/c55ec104-845e-5eb5-96c0-f59db47d1002/scratchpad/pptx3/icons/energy.png">    </p:cNvPr>
           <p:cNvPicPr>
             <a:picLocks noChangeAspect="1"/>
           </p:cNvPicPr>
@@ -12061,7 +10946,7 @@
         </p:blipFill>
         <p:spPr>
           <a:xfrm>
-            <a:off x="7223760" y="4434840"/>
+            <a:off x="7223760" y="4480560"/>
             <a:ext cx="640080" cy="640080"/>
           </a:xfrm>
           <a:prstGeom prst="rect">
@@ -12071,14 +10956,14 @@
       </p:pic>
       <p:sp>
         <p:nvSpPr>
-          <p:cNvPr id="59" name="sec-2-head"/>
+          <p:cNvPr id="61" name="sec-2-head"/>
           <p:cNvSpPr txBox="1"/>
           <p:nvPr/>
         </p:nvSpPr>
         <p:spPr>
           <a:xfrm>
-            <a:off x="8001000" y="4389120"/>
-            <a:ext cx="3703320" cy="685800"/>
+            <a:off x="8001000" y="4434840"/>
+            <a:ext cx="3703320" cy="777240"/>
           </a:xfrm>
           <a:prstGeom prst="rect">
             <a:avLst/>
@@ -12121,14 +11006,14 @@
       </p:sp>
       <p:sp>
         <p:nvSpPr>
-          <p:cNvPr id="60" name="sec-2-link"/>
+          <p:cNvPr id="62" name="sec-2-link"/>
           <p:cNvSpPr/>
           <p:nvPr/>
         </p:nvSpPr>
         <p:spPr>
           <a:xfrm>
-            <a:off x="6903720" y="3355848"/>
-            <a:ext cx="320040" cy="1399032"/>
+            <a:off x="6949440" y="4800600"/>
+            <a:ext cx="274320" cy="0"/>
           </a:xfrm>
           <a:prstGeom prst="line">
             <a:avLst/>
@@ -12144,18 +11029,18 @@
       </p:sp>
       <p:sp>
         <p:nvSpPr>
-          <p:cNvPr id="61" name="sec-2-0-0"/>
+          <p:cNvPr id="63" name="sec-2-0-0"/>
           <p:cNvSpPr/>
           <p:nvPr/>
         </p:nvSpPr>
         <p:spPr>
           <a:xfrm>
-            <a:off x="8001000" y="5093208"/>
-            <a:ext cx="1188720" cy="402336"/>
+            <a:off x="8001000" y="5212080"/>
+            <a:ext cx="1824228" cy="420624"/>
           </a:xfrm>
           <a:prstGeom prst="roundRect">
             <a:avLst>
-              <a:gd name="adj" fmla="val 13636"/>
+              <a:gd name="adj" fmla="val 13043"/>
             </a:avLst>
           </a:prstGeom>
           <a:solidFill>
@@ -12171,14 +11056,14 @@
       </p:sp>
       <p:sp>
         <p:nvSpPr>
-          <p:cNvPr id="62" name="sec-2-0-0-text"/>
+          <p:cNvPr id="64" name="sec-2-0-0-text"/>
           <p:cNvSpPr txBox="1"/>
           <p:nvPr/>
         </p:nvSpPr>
         <p:spPr>
           <a:xfrm>
-            <a:off x="8001000" y="5093208"/>
-            <a:ext cx="1188720" cy="402336"/>
+            <a:off x="8001000" y="5212080"/>
+            <a:ext cx="1824228" cy="420624"/>
           </a:xfrm>
           <a:prstGeom prst="rect">
             <a:avLst/>
@@ -12207,18 +11092,18 @@
       </p:sp>
       <p:sp>
         <p:nvSpPr>
-          <p:cNvPr id="63" name="sec-2-0-1"/>
+          <p:cNvPr id="65" name="sec-2-0-1"/>
           <p:cNvSpPr/>
           <p:nvPr/>
         </p:nvSpPr>
         <p:spPr>
           <a:xfrm>
-            <a:off x="9244584" y="5093208"/>
-            <a:ext cx="1188720" cy="402336"/>
+            <a:off x="9880092" y="5212080"/>
+            <a:ext cx="1824228" cy="420624"/>
           </a:xfrm>
           <a:prstGeom prst="roundRect">
             <a:avLst>
-              <a:gd name="adj" fmla="val 13636"/>
+              <a:gd name="adj" fmla="val 13043"/>
             </a:avLst>
           </a:prstGeom>
           <a:solidFill>
@@ -12234,14 +11119,14 @@
       </p:sp>
       <p:sp>
         <p:nvSpPr>
-          <p:cNvPr id="64" name="sec-2-0-1-text"/>
+          <p:cNvPr id="66" name="sec-2-0-1-text"/>
           <p:cNvSpPr txBox="1"/>
           <p:nvPr/>
         </p:nvSpPr>
         <p:spPr>
           <a:xfrm>
-            <a:off x="9244584" y="5093208"/>
-            <a:ext cx="1188720" cy="402336"/>
+            <a:off x="9880092" y="5212080"/>
+            <a:ext cx="1824228" cy="420624"/>
           </a:xfrm>
           <a:prstGeom prst="rect">
             <a:avLst/>
@@ -12270,7 +11155,7 @@
       </p:sp>
       <p:pic>
         <p:nvPicPr>
-          <p:cNvPr id="65" name="run-icon" descr="/tmp/claude-0/-home-user-archify/c55ec104-845e-5eb5-96c0-f59db47d1002/scratchpad/pptx3/icons/cycle.png">    </p:cNvPr>
+          <p:cNvPr id="67" name="run-icon" descr="/tmp/claude-0/-home-user-archify/c55ec104-845e-5eb5-96c0-f59db47d1002/scratchpad/pptx3/icons/cycle.png">    </p:cNvPr>
           <p:cNvPicPr>
             <a:picLocks noChangeAspect="1"/>
           </p:cNvPicPr>
@@ -12294,7 +11179,7 @@
       </p:pic>
       <p:sp>
         <p:nvSpPr>
-          <p:cNvPr id="66" name="run-head"/>
+          <p:cNvPr id="68" name="run-head"/>
           <p:cNvSpPr txBox="1"/>
           <p:nvPr/>
         </p:nvSpPr>
@@ -12330,7 +11215,7 @@
       </p:sp>
       <p:sp>
         <p:nvSpPr>
-          <p:cNvPr id="67" name="run-0"/>
+          <p:cNvPr id="69" name="run-0"/>
           <p:cNvSpPr/>
           <p:nvPr/>
         </p:nvSpPr>
@@ -12357,7 +11242,7 @@
       </p:sp>
       <p:sp>
         <p:nvSpPr>
-          <p:cNvPr id="68" name="run-0-text"/>
+          <p:cNvPr id="70" name="run-0-text"/>
           <p:cNvSpPr txBox="1"/>
           <p:nvPr/>
         </p:nvSpPr>
@@ -12393,7 +11278,7 @@
       </p:sp>
       <p:sp>
         <p:nvSpPr>
-          <p:cNvPr id="69" name="run-1"/>
+          <p:cNvPr id="71" name="run-1"/>
           <p:cNvSpPr/>
           <p:nvPr/>
         </p:nvSpPr>
@@ -12420,7 +11305,7 @@
       </p:sp>
       <p:sp>
         <p:nvSpPr>
-          <p:cNvPr id="70" name="run-1-text"/>
+          <p:cNvPr id="72" name="run-1-text"/>
           <p:cNvSpPr txBox="1"/>
           <p:nvPr/>
         </p:nvSpPr>
@@ -12456,7 +11341,7 @@
       </p:sp>
       <p:sp>
         <p:nvSpPr>
-          <p:cNvPr id="71" name="run-2"/>
+          <p:cNvPr id="73" name="run-2"/>
           <p:cNvSpPr/>
           <p:nvPr/>
         </p:nvSpPr>
@@ -12483,7 +11368,7 @@
       </p:sp>
       <p:sp>
         <p:nvSpPr>
-          <p:cNvPr id="72" name="run-2-text"/>
+          <p:cNvPr id="74" name="run-2-text"/>
           <p:cNvSpPr txBox="1"/>
           <p:nvPr/>
         </p:nvSpPr>
@@ -12519,7 +11404,7 @@
       </p:sp>
       <p:sp>
         <p:nvSpPr>
-          <p:cNvPr id="73" name="veil"/>
+          <p:cNvPr id="75" name="veil"/>
           <p:cNvSpPr/>
           <p:nvPr/>
         </p:nvSpPr>
@@ -12541,7 +11426,7 @@
       </p:sp>
       <p:sp>
         <p:nvSpPr>
-          <p:cNvPr id="29" name="!!erm"/>
+          <p:cNvPr id="29" name="erm-cell"/>
           <p:cNvSpPr/>
           <p:nvPr/>
         </p:nvSpPr>
@@ -12575,7 +11460,7 @@
       </p:sp>
       <p:sp>
         <p:nvSpPr>
-          <p:cNvPr id="30" name="!!ermtext"/>
+          <p:cNvPr id="30" name="erm-cell-text"/>
           <p:cNvSpPr txBox="1"/>
           <p:nvPr/>
         </p:nvSpPr>
@@ -12611,7 +11496,7 @@
       </p:sp>
       <p:sp>
         <p:nvSpPr>
-          <p:cNvPr id="74" name="erm-callout"/>
+          <p:cNvPr id="76" name="erm-callout"/>
           <p:cNvSpPr txBox="1"/>
           <p:nvPr/>
         </p:nvSpPr>
@@ -12656,6 +11541,76 @@
               <a:t>Where every risk review starts</a:t>
             </a:r>
             <a:endParaRPr lang="en-US" sz="1600" dirty="0"/>
+          </a:p>
+        </p:txBody>
+      </p:sp>
+      <p:sp>
+        <p:nvSpPr>
+          <p:cNvPr id="77" name="erm-burst"/>
+          <p:cNvSpPr/>
+          <p:nvPr/>
+        </p:nvSpPr>
+        <p:spPr>
+          <a:xfrm>
+            <a:off x="-9532620" y="-36576"/>
+            <a:ext cx="21762720" cy="10515600"/>
+          </a:xfrm>
+          <a:prstGeom prst="rect">
+            <a:avLst/>
+          </a:prstGeom>
+          <a:solidFill>
+            <a:schemeClr val="accent1"/>
+          </a:solidFill>
+          <a:ln/>
+        </p:spPr>
+      </p:sp>
+      <p:sp>
+        <p:nvSpPr>
+          <p:cNvPr id="78" name="erm-burst-text"/>
+          <p:cNvSpPr txBox="1"/>
+          <p:nvPr/>
+        </p:nvSpPr>
+        <p:spPr>
+          <a:xfrm>
+            <a:off x="548640" y="2194560"/>
+            <a:ext cx="11094415" cy="2468880"/>
+          </a:xfrm>
+          <a:prstGeom prst="rect">
+            <a:avLst/>
+          </a:prstGeom>
+          <a:noFill/>
+          <a:ln/>
+        </p:spPr>
+        <p:txBody>
+          <a:bodyPr wrap="square" lIns="0" tIns="0" rIns="0" bIns="0" rtlCol="0" anchor="ctr"/>
+          <a:lstStyle/>
+          <a:p>
+            <a:pPr algn="ctr" indent="0" marL="0">
+              <a:buNone/>
+            </a:pPr>
+            <a:r>
+              <a:rPr lang="en-US" sz="9600" b="1" dirty="0">
+                <a:solidFill>
+                  <a:schemeClr val="bg1"/>
+                </a:solidFill>
+              </a:rPr>
+              <a:t>ERM</a:t>
+            </a:r>
+            <a:endParaRPr lang="en-US" sz="9600" dirty="0"/>
+          </a:p>
+          <a:p>
+            <a:pPr algn="ctr" indent="0" marL="0">
+              <a:buNone/>
+            </a:pPr>
+            <a:r>
+              <a:rPr lang="en-US" sz="2800" dirty="0">
+                <a:solidFill>
+                  <a:schemeClr val="bg1"/>
+                </a:solidFill>
+              </a:rPr>
+              <a:t>Enterprise Risk Management</a:t>
+            </a:r>
+            <a:endParaRPr lang="en-US" sz="9600" dirty="0"/>
           </a:p>
         </p:txBody>
       </p:sp>
@@ -12664,31 +11619,192 @@
   <p:clrMapOvr>
     <a:masterClrMapping/>
   </p:clrMapOvr>
-  <mc:AlternateContent xmlns:mc="http://schemas.openxmlformats.org/markup-compatibility/2006">
-    <mc:Choice xmlns:p159="http://schemas.microsoft.com/office/powerpoint/2015/09/main" xmlns:p14="http://schemas.microsoft.com/office/powerpoint/2010/main" Requires="p159">
-      <p:transition spd="slow" p14:dur="1000">
-        <p159:morph option="byObject"/>
-      </p:transition>
-    </mc:Choice>
-    <mc:Fallback>
-      <p:transition spd="slow">
-        <p:fade/>
-      </p:transition>
-    </mc:Fallback>
-  </mc:AlternateContent>
+  <p:transition spd="med">
+    <p:fade/>
+  </p:transition>
+  <p:timing>
+    <p:tnLst>
+      <p:par>
+        <p:cTn id="1" dur="indefinite" restart="never" nodeType="tmRoot">
+          <p:childTnLst>
+            <p:seq concurrent="1" nextAc="seek">
+              <p:cTn id="2" dur="indefinite" nodeType="mainSeq">
+                <p:childTnLst>
+                  <p:par>
+                    <p:cTn id="3" fill="hold">
+                      <p:stCondLst>
+                        <p:cond delay="indefinite"/>
+                      </p:stCondLst>
+                      <p:childTnLst>
+                        <p:par>
+                          <p:cTn id="4" fill="hold">
+                            <p:stCondLst>
+                              <p:cond delay="0"/>
+                            </p:stCondLst>
+                            <p:childTnLst>
+                              <p:par>
+                                <p:cTn id="5" presetID="53" presetClass="entr" presetSubtype="16" fill="hold" grpId="0" nodeType="clickEffect">
+                                  <p:stCondLst>
+                                    <p:cond delay="0"/>
+                                  </p:stCondLst>
+                                  <p:childTnLst>
+                                    <p:set>
+                                      <p:cBhvr>
+                                        <p:cTn id="6" dur="1" fill="hold">
+                                          <p:stCondLst>
+                                            <p:cond delay="0"/>
+                                          </p:stCondLst>
+                                        </p:cTn>
+                                        <p:tgtEl>
+                                          <p:spTgt spid="77"/>
+                                        </p:tgtEl>
+                                        <p:attrNameLst>
+                                          <p:attrName>style.visibility</p:attrName>
+                                        </p:attrNameLst>
+                                      </p:cBhvr>
+                                      <p:to>
+                                        <p:strVal val="visible"/>
+                                      </p:to>
+                                    </p:set>
+                                    <p:anim calcmode="lin" valueType="num">
+                                      <p:cBhvr>
+                                        <p:cTn id="7" dur="800" fill="hold"/>
+                                        <p:tgtEl>
+                                          <p:spTgt spid="77"/>
+                                        </p:tgtEl>
+                                        <p:attrNameLst>
+                                          <p:attrName>ppt_w</p:attrName>
+                                        </p:attrNameLst>
+                                      </p:cBhvr>
+                                      <p:tavLst>
+                                        <p:tav tm="0">
+                                          <p:val>
+                                            <p:fltVal val="0"/>
+                                          </p:val>
+                                        </p:tav>
+                                        <p:tav tm="100000">
+                                          <p:val>
+                                            <p:strVal val="#ppt_w"/>
+                                          </p:val>
+                                        </p:tav>
+                                      </p:tavLst>
+                                    </p:anim>
+                                    <p:anim calcmode="lin" valueType="num">
+                                      <p:cBhvr>
+                                        <p:cTn id="8" dur="800" fill="hold"/>
+                                        <p:tgtEl>
+                                          <p:spTgt spid="77"/>
+                                        </p:tgtEl>
+                                        <p:attrNameLst>
+                                          <p:attrName>ppt_h</p:attrName>
+                                        </p:attrNameLst>
+                                      </p:cBhvr>
+                                      <p:tavLst>
+                                        <p:tav tm="0">
+                                          <p:val>
+                                            <p:fltVal val="0"/>
+                                          </p:val>
+                                        </p:tav>
+                                        <p:tav tm="100000">
+                                          <p:val>
+                                            <p:strVal val="#ppt_h"/>
+                                          </p:val>
+                                        </p:tav>
+                                      </p:tavLst>
+                                    </p:anim>
+                                    <p:animEffect transition="in" filter="fade">
+                                      <p:cBhvr>
+                                        <p:cTn id="9" dur="800"/>
+                                        <p:tgtEl>
+                                          <p:spTgt spid="77"/>
+                                        </p:tgtEl>
+                                      </p:cBhvr>
+                                    </p:animEffect>
+                                  </p:childTnLst>
+                                </p:cTn>
+                              </p:par>
+                            </p:childTnLst>
+                          </p:cTn>
+                        </p:par>
+                        <p:par>
+                          <p:cTn id="10" fill="hold">
+                            <p:stCondLst>
+                              <p:cond delay="800"/>
+                            </p:stCondLst>
+                            <p:childTnLst>
+                              <p:par>
+                                <p:cTn id="11" presetID="10" presetClass="entr" presetSubtype="0" fill="hold" grpId="0" nodeType="afterEffect">
+                                  <p:stCondLst>
+                                    <p:cond delay="0"/>
+                                  </p:stCondLst>
+                                  <p:childTnLst>
+                                    <p:set>
+                                      <p:cBhvr>
+                                        <p:cTn id="12" dur="1" fill="hold">
+                                          <p:stCondLst>
+                                            <p:cond delay="0"/>
+                                          </p:stCondLst>
+                                        </p:cTn>
+                                        <p:tgtEl>
+                                          <p:spTgt spid="78"/>
+                                        </p:tgtEl>
+                                        <p:attrNameLst>
+                                          <p:attrName>style.visibility</p:attrName>
+                                        </p:attrNameLst>
+                                      </p:cBhvr>
+                                      <p:to>
+                                        <p:strVal val="visible"/>
+                                      </p:to>
+                                    </p:set>
+                                    <p:animEffect transition="in" filter="fade">
+                                      <p:cBhvr>
+                                        <p:cTn id="13" dur="500"/>
+                                        <p:tgtEl>
+                                          <p:spTgt spid="78"/>
+                                        </p:tgtEl>
+                                      </p:cBhvr>
+                                    </p:animEffect>
+                                  </p:childTnLst>
+                                </p:cTn>
+                              </p:par>
+                            </p:childTnLst>
+                          </p:cTn>
+                        </p:par>
+                      </p:childTnLst>
+                    </p:cTn>
+                  </p:par>
+                </p:childTnLst>
+              </p:cTn>
+              <p:prevCondLst>
+                <p:cond evt="onPrev" delay="0">
+                  <p:tgtEl>
+                    <p:sldTgt/>
+                  </p:tgtEl>
+                </p:cond>
+              </p:prevCondLst>
+              <p:nextCondLst>
+                <p:cond evt="onNext" delay="0">
+                  <p:tgtEl>
+                    <p:sldTgt/>
+                  </p:tgtEl>
+                </p:cond>
+              </p:nextCondLst>
+            </p:seq>
+          </p:childTnLst>
+        </p:cTn>
+      </p:par>
+    </p:tnLst>
+    <p:bldLst>
+      <p:bldP spid="77" grpId="0" animBg="1"/>
+      <p:bldP spid="78" grpId="0"/>
+    </p:bldLst>
+  </p:timing>
 </p:sld>
 </file>
 
 <file path=ppt/slides/slide4.xml><?xml version="1.0" encoding="utf-8"?>
 <p:sld xmlns:a="http://schemas.openxmlformats.org/drawingml/2006/main" xmlns:r="http://schemas.openxmlformats.org/officeDocument/2006/relationships" xmlns:p="http://schemas.openxmlformats.org/presentationml/2006/main">
   <p:cSld name="Slide 4">
-    <p:bg>
-      <p:bgPr>
-        <a:solidFill>
-          <a:schemeClr val="accent1"/>
-        </a:solidFill>
-      </p:bgPr>
-    </p:bg>
     <p:spTree>
       <p:nvGrpSpPr>
         <p:cNvPr id="1" name=""/>
@@ -12705,41 +11821,14 @@
       </p:grpSpPr>
       <p:sp>
         <p:nvSpPr>
-          <p:cNvPr id="2" name="!!erm"/>
-          <p:cNvSpPr/>
-          <p:nvPr/>
-        </p:nvSpPr>
-        <p:spPr>
-          <a:xfrm>
-            <a:off x="-182880" y="-182880"/>
-            <a:ext cx="12557455" cy="7223760"/>
-          </a:xfrm>
-          <a:prstGeom prst="roundRect">
-            <a:avLst>
-              <a:gd name="adj" fmla="val 759"/>
-            </a:avLst>
-          </a:prstGeom>
-          <a:solidFill>
-            <a:schemeClr val="accent1"/>
-          </a:solidFill>
-          <a:ln w="12700">
-            <a:solidFill>
-              <a:schemeClr val="accent1"/>
-            </a:solidFill>
-            <a:prstDash val="solid"/>
-          </a:ln>
-        </p:spPr>
-      </p:sp>
-      <p:sp>
-        <p:nvSpPr>
-          <p:cNvPr id="3" name="!!ermtext"/>
+          <p:cNvPr id="2" name="criterion"/>
           <p:cNvSpPr txBox="1"/>
           <p:nvPr/>
         </p:nvSpPr>
         <p:spPr>
           <a:xfrm>
-            <a:off x="548640" y="2194560"/>
-            <a:ext cx="11094415" cy="2468880"/>
+            <a:off x="548640" y="201168"/>
+            <a:ext cx="5486400" cy="256032"/>
           </a:xfrm>
           <a:prstGeom prst="rect">
             <a:avLst/>
@@ -12748,41 +11837,27 @@
           <a:ln/>
         </p:spPr>
         <p:txBody>
-          <a:bodyPr wrap="square" lIns="0" tIns="0" rIns="0" bIns="0" rtlCol="0" anchor="ctr"/>
+          <a:bodyPr wrap="square" lIns="0" tIns="0" rIns="0" bIns="0" rtlCol="0" anchor="t"/>
           <a:lstStyle/>
           <a:p>
-            <a:pPr algn="ctr" indent="0" marL="0">
-              <a:buNone/>
-            </a:pPr>
-            <a:r>
-              <a:rPr lang="en-US" sz="9600" b="1" dirty="0">
-                <a:solidFill>
-                  <a:schemeClr val="bg1"/>
-                </a:solidFill>
-              </a:rPr>
-              <a:t>ERM</a:t>
-            </a:r>
-            <a:endParaRPr lang="en-US" sz="9600" dirty="0"/>
-          </a:p>
-          <a:p>
-            <a:pPr algn="ctr" indent="0" marL="0">
-              <a:buNone/>
-            </a:pPr>
-            <a:r>
-              <a:rPr lang="en-US" sz="2800" dirty="0">
-                <a:solidFill>
-                  <a:schemeClr val="bg1"/>
-                </a:solidFill>
-              </a:rPr>
-              <a:t>Enterprise Risk Management</a:t>
-            </a:r>
-            <a:endParaRPr lang="en-US" sz="9600" dirty="0"/>
-          </a:p>
-        </p:txBody>
-      </p:sp>
-      <p:sp>
-        <p:nvSpPr>
-          <p:cNvPr id="5" name="Text 1"/>
+            <a:pPr indent="0" marL="0">
+              <a:buNone/>
+            </a:pPr>
+            <a:r>
+              <a:rPr lang="en-US" sz="1100" b="1" spc="200" kern="0" dirty="0">
+                <a:solidFill>
+                  <a:schemeClr val="accent3"/>
+                </a:solidFill>
+              </a:rPr>
+              <a:t>CONTEXT</a:t>
+            </a:r>
+            <a:endParaRPr lang="en-US" sz="1100" dirty="0"/>
+          </a:p>
+        </p:txBody>
+      </p:sp>
+      <p:sp>
+        <p:nvSpPr>
+          <p:cNvPr id="3" name="Text 1"/>
           <p:cNvSpPr/>
           <p:nvPr>
             <p:ph idx="101" type="title" hasCustomPrompt="1"/>
@@ -12806,7 +11881,1298 @@
             <a:pPr algn="l" indent="0" marL="0">
               <a:buNone/>
             </a:pPr>
+            <a:r>
+              <a:rPr lang="en-US" sz="3600" b="1" dirty="0">
+                <a:solidFill>
+                  <a:schemeClr val="tx1"/>
+                </a:solidFill>
+              </a:rPr>
+              <a:t>Enterprise Risk Management (ERM)</a:t>
+            </a:r>
             <a:endParaRPr lang="en-US" sz="3600" dirty="0"/>
+          </a:p>
+        </p:txBody>
+      </p:sp>
+      <p:sp>
+        <p:nvSpPr>
+          <p:cNvPr id="4" name="def-card"/>
+          <p:cNvSpPr/>
+          <p:nvPr/>
+        </p:nvSpPr>
+        <p:spPr>
+          <a:xfrm>
+            <a:off x="548640" y="1280160"/>
+            <a:ext cx="11094415" cy="1005840"/>
+          </a:xfrm>
+          <a:prstGeom prst="roundRect">
+            <a:avLst>
+              <a:gd name="adj" fmla="val 7273"/>
+            </a:avLst>
+          </a:prstGeom>
+          <a:solidFill>
+            <a:schemeClr val="bg2"/>
+          </a:solidFill>
+          <a:ln/>
+        </p:spPr>
+      </p:sp>
+      <p:sp>
+        <p:nvSpPr>
+          <p:cNvPr id="5" name="def-bar"/>
+          <p:cNvSpPr/>
+          <p:nvPr/>
+        </p:nvSpPr>
+        <p:spPr>
+          <a:xfrm>
+            <a:off x="548640" y="1280160"/>
+            <a:ext cx="73152" cy="1005840"/>
+          </a:xfrm>
+          <a:prstGeom prst="rect">
+            <a:avLst/>
+          </a:prstGeom>
+          <a:solidFill>
+            <a:schemeClr val="tx1"/>
+          </a:solidFill>
+          <a:ln/>
+        </p:spPr>
+      </p:sp>
+      <p:sp>
+        <p:nvSpPr>
+          <p:cNvPr id="6" name="def-text"/>
+          <p:cNvSpPr txBox="1"/>
+          <p:nvPr/>
+        </p:nvSpPr>
+        <p:spPr>
+          <a:xfrm>
+            <a:off x="822960" y="1280160"/>
+            <a:ext cx="10637215" cy="1005840"/>
+          </a:xfrm>
+          <a:prstGeom prst="rect">
+            <a:avLst/>
+          </a:prstGeom>
+          <a:noFill/>
+          <a:ln/>
+        </p:spPr>
+        <p:txBody>
+          <a:bodyPr wrap="square" lIns="0" tIns="0" rIns="0" bIns="0" rtlCol="0" anchor="ctr"/>
+          <a:lstStyle/>
+          <a:p>
+            <a:pPr indent="0" marL="0">
+              <a:spcAft>
+                <a:spcPts val="400"/>
+              </a:spcAft>
+              <a:buNone/>
+            </a:pPr>
+            <a:r>
+              <a:rPr lang="en-US" sz="1300" b="1" dirty="0">
+                <a:solidFill>
+                  <a:schemeClr val="tx1"/>
+                </a:solidFill>
+              </a:rPr>
+              <a:t>ERM definition: </a:t>
+            </a:r>
+            <a:pPr indent="0" marL="0">
+              <a:spcAft>
+                <a:spcPts val="400"/>
+              </a:spcAft>
+              <a:buNone/>
+            </a:pPr>
+            <a:r>
+              <a:rPr lang="en-US" sz="1300" dirty="0">
+                <a:solidFill>
+                  <a:schemeClr val="tx2"/>
+                </a:solidFill>
+              </a:rPr>
+              <a:t>the risk management process is an integral part of management and decision-making, helping stakeholders understand risks and the actions required.</a:t>
+            </a:r>
+            <a:endParaRPr lang="en-US" sz="1300" dirty="0"/>
+          </a:p>
+          <a:p>
+            <a:pPr indent="0" marL="0">
+              <a:spcAft>
+                <a:spcPts val="400"/>
+              </a:spcAft>
+              <a:buNone/>
+            </a:pPr>
+            <a:r>
+              <a:rPr lang="en-US" sz="1300" b="1" dirty="0">
+                <a:solidFill>
+                  <a:schemeClr val="tx1"/>
+                </a:solidFill>
+              </a:rPr>
+              <a:t>Application context: </a:t>
+            </a:r>
+            <a:pPr indent="0" marL="0">
+              <a:spcAft>
+                <a:spcPts val="400"/>
+              </a:spcAft>
+              <a:buNone/>
+            </a:pPr>
+            <a:r>
+              <a:rPr lang="en-US" sz="1300" dirty="0">
+                <a:solidFill>
+                  <a:schemeClr val="tx2"/>
+                </a:solidFill>
+              </a:rPr>
+              <a:t>streamlines ERM reporting using Active Risk Manager (ARM) data ingested into Palantir Skywise.</a:t>
+            </a:r>
+            <a:endParaRPr lang="en-US" sz="1300" dirty="0"/>
+          </a:p>
+        </p:txBody>
+      </p:sp>
+      <p:sp>
+        <p:nvSpPr>
+          <p:cNvPr id="7" name="feat-0-card"/>
+          <p:cNvSpPr/>
+          <p:nvPr/>
+        </p:nvSpPr>
+        <p:spPr>
+          <a:xfrm>
+            <a:off x="548640" y="2487168"/>
+            <a:ext cx="5257800" cy="676656"/>
+          </a:xfrm>
+          <a:prstGeom prst="roundRect">
+            <a:avLst>
+              <a:gd name="adj" fmla="val 8108"/>
+            </a:avLst>
+          </a:prstGeom>
+          <a:solidFill>
+            <a:schemeClr val="bg1"/>
+          </a:solidFill>
+          <a:ln w="12700">
+            <a:solidFill>
+              <a:schemeClr val="accent6"/>
+            </a:solidFill>
+            <a:prstDash val="solid"/>
+          </a:ln>
+        </p:spPr>
+      </p:sp>
+      <p:sp>
+        <p:nvSpPr>
+          <p:cNvPr id="8" name="feat-0-bar"/>
+          <p:cNvSpPr/>
+          <p:nvPr/>
+        </p:nvSpPr>
+        <p:spPr>
+          <a:xfrm>
+            <a:off x="548640" y="2487168"/>
+            <a:ext cx="64008" cy="676656"/>
+          </a:xfrm>
+          <a:prstGeom prst="rect">
+            <a:avLst/>
+          </a:prstGeom>
+          <a:solidFill>
+            <a:schemeClr val="accent1"/>
+          </a:solidFill>
+          <a:ln/>
+        </p:spPr>
+      </p:sp>
+      <p:sp>
+        <p:nvSpPr>
+          <p:cNvPr id="9" name="feat-0-text"/>
+          <p:cNvSpPr txBox="1"/>
+          <p:nvPr/>
+        </p:nvSpPr>
+        <p:spPr>
+          <a:xfrm>
+            <a:off x="822960" y="2487168"/>
+            <a:ext cx="4846320" cy="676656"/>
+          </a:xfrm>
+          <a:prstGeom prst="rect">
+            <a:avLst/>
+          </a:prstGeom>
+          <a:noFill/>
+          <a:ln/>
+        </p:spPr>
+        <p:txBody>
+          <a:bodyPr wrap="square" lIns="0" tIns="0" rIns="0" bIns="0" rtlCol="0" anchor="ctr"/>
+          <a:lstStyle/>
+          <a:p>
+            <a:pPr indent="0" marL="0">
+              <a:buNone/>
+            </a:pPr>
+            <a:r>
+              <a:rPr lang="en-US" sz="1400" b="1" dirty="0">
+                <a:solidFill>
+                  <a:schemeClr val="tx1"/>
+                </a:solidFill>
+              </a:rPr>
+              <a:t>Single place for ARM data</a:t>
+            </a:r>
+            <a:endParaRPr lang="en-US" sz="1400" dirty="0"/>
+          </a:p>
+          <a:p>
+            <a:pPr indent="0" marL="0">
+              <a:buNone/>
+            </a:pPr>
+            <a:r>
+              <a:rPr lang="en-US" sz="1200" dirty="0">
+                <a:solidFill>
+                  <a:schemeClr val="tx2"/>
+                </a:solidFill>
+              </a:rPr>
+              <a:t>Centralised management and live view of ARM risks</a:t>
+            </a:r>
+            <a:endParaRPr lang="en-US" sz="1400" dirty="0"/>
+          </a:p>
+        </p:txBody>
+      </p:sp>
+      <p:sp>
+        <p:nvSpPr>
+          <p:cNvPr id="10" name="feat-1-card"/>
+          <p:cNvSpPr/>
+          <p:nvPr/>
+        </p:nvSpPr>
+        <p:spPr>
+          <a:xfrm>
+            <a:off x="548640" y="3255264"/>
+            <a:ext cx="5257800" cy="676656"/>
+          </a:xfrm>
+          <a:prstGeom prst="roundRect">
+            <a:avLst>
+              <a:gd name="adj" fmla="val 8108"/>
+            </a:avLst>
+          </a:prstGeom>
+          <a:solidFill>
+            <a:schemeClr val="bg1"/>
+          </a:solidFill>
+          <a:ln w="12700">
+            <a:solidFill>
+              <a:schemeClr val="accent6"/>
+            </a:solidFill>
+            <a:prstDash val="solid"/>
+          </a:ln>
+        </p:spPr>
+      </p:sp>
+      <p:sp>
+        <p:nvSpPr>
+          <p:cNvPr id="11" name="feat-1-bar"/>
+          <p:cNvSpPr/>
+          <p:nvPr/>
+        </p:nvSpPr>
+        <p:spPr>
+          <a:xfrm>
+            <a:off x="548640" y="3255264"/>
+            <a:ext cx="64008" cy="676656"/>
+          </a:xfrm>
+          <a:prstGeom prst="rect">
+            <a:avLst/>
+          </a:prstGeom>
+          <a:solidFill>
+            <a:schemeClr val="accent1"/>
+          </a:solidFill>
+          <a:ln/>
+        </p:spPr>
+      </p:sp>
+      <p:sp>
+        <p:nvSpPr>
+          <p:cNvPr id="12" name="feat-1-text"/>
+          <p:cNvSpPr txBox="1"/>
+          <p:nvPr/>
+        </p:nvSpPr>
+        <p:spPr>
+          <a:xfrm>
+            <a:off x="822960" y="3255264"/>
+            <a:ext cx="4846320" cy="676656"/>
+          </a:xfrm>
+          <a:prstGeom prst="rect">
+            <a:avLst/>
+          </a:prstGeom>
+          <a:noFill/>
+          <a:ln/>
+        </p:spPr>
+        <p:txBody>
+          <a:bodyPr wrap="square" lIns="0" tIns="0" rIns="0" bIns="0" rtlCol="0" anchor="ctr"/>
+          <a:lstStyle/>
+          <a:p>
+            <a:pPr indent="0" marL="0">
+              <a:buNone/>
+            </a:pPr>
+            <a:r>
+              <a:rPr lang="en-US" sz="1400" b="1" dirty="0">
+                <a:solidFill>
+                  <a:schemeClr val="tx1"/>
+                </a:solidFill>
+              </a:rPr>
+              <a:t>Custom dashboards</a:t>
+            </a:r>
+            <a:endParaRPr lang="en-US" sz="1400" dirty="0"/>
+          </a:p>
+          <a:p>
+            <a:pPr indent="0" marL="0">
+              <a:buNone/>
+            </a:pPr>
+            <a:r>
+              <a:rPr lang="en-US" sz="1200" dirty="0">
+                <a:solidFill>
+                  <a:schemeClr val="tx2"/>
+                </a:solidFill>
+              </a:rPr>
+              <a:t>Group risks and opportunities into dedicated dashboards</a:t>
+            </a:r>
+            <a:endParaRPr lang="en-US" sz="1400" dirty="0"/>
+          </a:p>
+        </p:txBody>
+      </p:sp>
+      <p:sp>
+        <p:nvSpPr>
+          <p:cNvPr id="13" name="feat-2-card"/>
+          <p:cNvSpPr/>
+          <p:nvPr/>
+        </p:nvSpPr>
+        <p:spPr>
+          <a:xfrm>
+            <a:off x="548640" y="4023360"/>
+            <a:ext cx="5257800" cy="676656"/>
+          </a:xfrm>
+          <a:prstGeom prst="roundRect">
+            <a:avLst>
+              <a:gd name="adj" fmla="val 8108"/>
+            </a:avLst>
+          </a:prstGeom>
+          <a:solidFill>
+            <a:schemeClr val="bg1"/>
+          </a:solidFill>
+          <a:ln w="12700">
+            <a:solidFill>
+              <a:schemeClr val="accent6"/>
+            </a:solidFill>
+            <a:prstDash val="solid"/>
+          </a:ln>
+        </p:spPr>
+      </p:sp>
+      <p:sp>
+        <p:nvSpPr>
+          <p:cNvPr id="14" name="feat-2-bar"/>
+          <p:cNvSpPr/>
+          <p:nvPr/>
+        </p:nvSpPr>
+        <p:spPr>
+          <a:xfrm>
+            <a:off x="548640" y="4023360"/>
+            <a:ext cx="64008" cy="676656"/>
+          </a:xfrm>
+          <a:prstGeom prst="rect">
+            <a:avLst/>
+          </a:prstGeom>
+          <a:solidFill>
+            <a:schemeClr val="accent1"/>
+          </a:solidFill>
+          <a:ln/>
+        </p:spPr>
+      </p:sp>
+      <p:sp>
+        <p:nvSpPr>
+          <p:cNvPr id="15" name="feat-2-text"/>
+          <p:cNvSpPr txBox="1"/>
+          <p:nvPr/>
+        </p:nvSpPr>
+        <p:spPr>
+          <a:xfrm>
+            <a:off x="822960" y="4023360"/>
+            <a:ext cx="4846320" cy="676656"/>
+          </a:xfrm>
+          <a:prstGeom prst="rect">
+            <a:avLst/>
+          </a:prstGeom>
+          <a:noFill/>
+          <a:ln/>
+        </p:spPr>
+        <p:txBody>
+          <a:bodyPr wrap="square" lIns="0" tIns="0" rIns="0" bIns="0" rtlCol="0" anchor="ctr"/>
+          <a:lstStyle/>
+          <a:p>
+            <a:pPr indent="0" marL="0">
+              <a:buNone/>
+            </a:pPr>
+            <a:r>
+              <a:rPr lang="en-US" sz="1400" b="1" dirty="0">
+                <a:solidFill>
+                  <a:schemeClr val="tx1"/>
+                </a:solidFill>
+              </a:rPr>
+              <a:t>Live editing and trend following</a:t>
+            </a:r>
+            <a:endParaRPr lang="en-US" sz="1400" dirty="0"/>
+          </a:p>
+          <a:p>
+            <a:pPr indent="0" marL="0">
+              <a:buNone/>
+            </a:pPr>
+            <a:r>
+              <a:rPr lang="en-US" sz="1200" dirty="0">
+                <a:solidFill>
+                  <a:schemeClr val="tx2"/>
+                </a:solidFill>
+              </a:rPr>
+              <a:t>Edit parameters live and track trends</a:t>
+            </a:r>
+            <a:endParaRPr lang="en-US" sz="1400" dirty="0"/>
+          </a:p>
+        </p:txBody>
+      </p:sp>
+      <p:sp>
+        <p:nvSpPr>
+          <p:cNvPr id="16" name="feat-3-card"/>
+          <p:cNvSpPr/>
+          <p:nvPr/>
+        </p:nvSpPr>
+        <p:spPr>
+          <a:xfrm>
+            <a:off x="548640" y="4791456"/>
+            <a:ext cx="5257800" cy="676656"/>
+          </a:xfrm>
+          <a:prstGeom prst="roundRect">
+            <a:avLst>
+              <a:gd name="adj" fmla="val 8108"/>
+            </a:avLst>
+          </a:prstGeom>
+          <a:solidFill>
+            <a:schemeClr val="bg1"/>
+          </a:solidFill>
+          <a:ln w="12700">
+            <a:solidFill>
+              <a:schemeClr val="accent6"/>
+            </a:solidFill>
+            <a:prstDash val="solid"/>
+          </a:ln>
+        </p:spPr>
+      </p:sp>
+      <p:sp>
+        <p:nvSpPr>
+          <p:cNvPr id="17" name="feat-3-bar"/>
+          <p:cNvSpPr/>
+          <p:nvPr/>
+        </p:nvSpPr>
+        <p:spPr>
+          <a:xfrm>
+            <a:off x="548640" y="4791456"/>
+            <a:ext cx="64008" cy="676656"/>
+          </a:xfrm>
+          <a:prstGeom prst="rect">
+            <a:avLst/>
+          </a:prstGeom>
+          <a:solidFill>
+            <a:schemeClr val="accent1"/>
+          </a:solidFill>
+          <a:ln/>
+        </p:spPr>
+      </p:sp>
+      <p:sp>
+        <p:nvSpPr>
+          <p:cNvPr id="18" name="feat-3-text"/>
+          <p:cNvSpPr txBox="1"/>
+          <p:nvPr/>
+        </p:nvSpPr>
+        <p:spPr>
+          <a:xfrm>
+            <a:off x="822960" y="4791456"/>
+            <a:ext cx="4846320" cy="676656"/>
+          </a:xfrm>
+          <a:prstGeom prst="rect">
+            <a:avLst/>
+          </a:prstGeom>
+          <a:noFill/>
+          <a:ln/>
+        </p:spPr>
+        <p:txBody>
+          <a:bodyPr wrap="square" lIns="0" tIns="0" rIns="0" bIns="0" rtlCol="0" anchor="ctr"/>
+          <a:lstStyle/>
+          <a:p>
+            <a:pPr indent="0" marL="0">
+              <a:buNone/>
+            </a:pPr>
+            <a:r>
+              <a:rPr lang="en-US" sz="1400" b="1" dirty="0">
+                <a:solidFill>
+                  <a:schemeClr val="tx1"/>
+                </a:solidFill>
+              </a:rPr>
+              <a:t>Structured release workflow</a:t>
+            </a:r>
+            <a:endParaRPr lang="en-US" sz="1400" dirty="0"/>
+          </a:p>
+          <a:p>
+            <a:pPr indent="0" marL="0">
+              <a:buNone/>
+            </a:pPr>
+            <a:r>
+              <a:rPr lang="en-US" sz="1200" dirty="0">
+                <a:solidFill>
+                  <a:schemeClr val="tx2"/>
+                </a:solidFill>
+              </a:rPr>
+              <a:t>Formal, governed quarterly review and release</a:t>
+            </a:r>
+            <a:endParaRPr lang="en-US" sz="1400" dirty="0"/>
+          </a:p>
+        </p:txBody>
+      </p:sp>
+      <p:sp>
+        <p:nvSpPr>
+          <p:cNvPr id="19" name="feat-4-card"/>
+          <p:cNvSpPr/>
+          <p:nvPr/>
+        </p:nvSpPr>
+        <p:spPr>
+          <a:xfrm>
+            <a:off x="548640" y="5559552"/>
+            <a:ext cx="5257800" cy="676656"/>
+          </a:xfrm>
+          <a:prstGeom prst="roundRect">
+            <a:avLst>
+              <a:gd name="adj" fmla="val 8108"/>
+            </a:avLst>
+          </a:prstGeom>
+          <a:solidFill>
+            <a:schemeClr val="bg1"/>
+          </a:solidFill>
+          <a:ln w="12700">
+            <a:solidFill>
+              <a:schemeClr val="accent6"/>
+            </a:solidFill>
+            <a:prstDash val="solid"/>
+          </a:ln>
+        </p:spPr>
+      </p:sp>
+      <p:sp>
+        <p:nvSpPr>
+          <p:cNvPr id="20" name="feat-4-bar"/>
+          <p:cNvSpPr/>
+          <p:nvPr/>
+        </p:nvSpPr>
+        <p:spPr>
+          <a:xfrm>
+            <a:off x="548640" y="5559552"/>
+            <a:ext cx="64008" cy="676656"/>
+          </a:xfrm>
+          <a:prstGeom prst="rect">
+            <a:avLst/>
+          </a:prstGeom>
+          <a:solidFill>
+            <a:schemeClr val="accent1"/>
+          </a:solidFill>
+          <a:ln/>
+        </p:spPr>
+      </p:sp>
+      <p:sp>
+        <p:nvSpPr>
+          <p:cNvPr id="21" name="feat-4-text"/>
+          <p:cNvSpPr txBox="1"/>
+          <p:nvPr/>
+        </p:nvSpPr>
+        <p:spPr>
+          <a:xfrm>
+            <a:off x="822960" y="5559552"/>
+            <a:ext cx="4846320" cy="676656"/>
+          </a:xfrm>
+          <a:prstGeom prst="rect">
+            <a:avLst/>
+          </a:prstGeom>
+          <a:noFill/>
+          <a:ln/>
+        </p:spPr>
+        <p:txBody>
+          <a:bodyPr wrap="square" lIns="0" tIns="0" rIns="0" bIns="0" rtlCol="0" anchor="ctr"/>
+          <a:lstStyle/>
+          <a:p>
+            <a:pPr indent="0" marL="0">
+              <a:buNone/>
+            </a:pPr>
+            <a:r>
+              <a:rPr lang="en-US" sz="1400" b="1" dirty="0">
+                <a:solidFill>
+                  <a:schemeClr val="tx1"/>
+                </a:solidFill>
+              </a:rPr>
+              <a:t>Cross-team collaboration</a:t>
+            </a:r>
+            <a:endParaRPr lang="en-US" sz="1400" dirty="0"/>
+          </a:p>
+          <a:p>
+            <a:pPr indent="0" marL="0">
+              <a:buNone/>
+            </a:pPr>
+            <a:r>
+              <a:rPr lang="en-US" sz="1200" dirty="0">
+                <a:solidFill>
+                  <a:schemeClr val="tx2"/>
+                </a:solidFill>
+              </a:rPr>
+              <a:t>Share and co-manage dashboards across divisions</a:t>
+            </a:r>
+            <a:endParaRPr lang="en-US" sz="1400" dirty="0"/>
+          </a:p>
+        </p:txBody>
+      </p:sp>
+      <p:sp>
+        <p:nvSpPr>
+          <p:cNvPr id="22" name="flow-card"/>
+          <p:cNvSpPr/>
+          <p:nvPr/>
+        </p:nvSpPr>
+        <p:spPr>
+          <a:xfrm>
+            <a:off x="6080760" y="2487168"/>
+            <a:ext cx="5562295" cy="3749040"/>
+          </a:xfrm>
+          <a:prstGeom prst="roundRect">
+            <a:avLst>
+              <a:gd name="adj" fmla="val 1951"/>
+            </a:avLst>
+          </a:prstGeom>
+          <a:solidFill>
+            <a:schemeClr val="bg2"/>
+          </a:solidFill>
+          <a:ln/>
+        </p:spPr>
+      </p:sp>
+      <p:sp>
+        <p:nvSpPr>
+          <p:cNvPr id="23" name="flow-title"/>
+          <p:cNvSpPr txBox="1"/>
+          <p:nvPr/>
+        </p:nvSpPr>
+        <p:spPr>
+          <a:xfrm>
+            <a:off x="6355080" y="2670048"/>
+            <a:ext cx="5013655" cy="274320"/>
+          </a:xfrm>
+          <a:prstGeom prst="rect">
+            <a:avLst/>
+          </a:prstGeom>
+          <a:noFill/>
+          <a:ln/>
+        </p:spPr>
+        <p:txBody>
+          <a:bodyPr wrap="square" lIns="0" tIns="0" rIns="0" bIns="0" rtlCol="0" anchor="t"/>
+          <a:lstStyle/>
+          <a:p>
+            <a:pPr algn="ctr" indent="0" marL="0">
+              <a:buNone/>
+            </a:pPr>
+            <a:r>
+              <a:rPr lang="en-US" sz="1100" b="1" spc="100" kern="0" dirty="0">
+                <a:solidFill>
+                  <a:schemeClr val="tx1"/>
+                </a:solidFill>
+              </a:rPr>
+              <a:t>ARM DATA INTEGRATION &amp; REPORTING FLOW</a:t>
+            </a:r>
+            <a:endParaRPr lang="en-US" sz="1100" dirty="0"/>
+          </a:p>
+        </p:txBody>
+      </p:sp>
+      <p:sp>
+        <p:nvSpPr>
+          <p:cNvPr id="24" name="in-0"/>
+          <p:cNvSpPr/>
+          <p:nvPr/>
+        </p:nvSpPr>
+        <p:spPr>
+          <a:xfrm>
+            <a:off x="6400800" y="3218688"/>
+            <a:ext cx="960120" cy="457200"/>
+          </a:xfrm>
+          <a:prstGeom prst="roundRect">
+            <a:avLst>
+              <a:gd name="adj" fmla="val 12000"/>
+            </a:avLst>
+          </a:prstGeom>
+          <a:solidFill>
+            <a:schemeClr val="accent1"/>
+          </a:solidFill>
+          <a:ln/>
+        </p:spPr>
+      </p:sp>
+      <p:sp>
+        <p:nvSpPr>
+          <p:cNvPr id="25" name="in-0-text"/>
+          <p:cNvSpPr txBox="1"/>
+          <p:nvPr/>
+        </p:nvSpPr>
+        <p:spPr>
+          <a:xfrm>
+            <a:off x="6400800" y="3218688"/>
+            <a:ext cx="960120" cy="457200"/>
+          </a:xfrm>
+          <a:prstGeom prst="rect">
+            <a:avLst/>
+          </a:prstGeom>
+          <a:noFill/>
+          <a:ln/>
+        </p:spPr>
+        <p:txBody>
+          <a:bodyPr wrap="square" lIns="0" tIns="0" rIns="0" bIns="0" rtlCol="0" anchor="ctr"/>
+          <a:lstStyle/>
+          <a:p>
+            <a:pPr algn="ctr" indent="0" marL="0">
+              <a:buNone/>
+            </a:pPr>
+            <a:r>
+              <a:rPr lang="en-US" sz="1300" b="1" dirty="0">
+                <a:solidFill>
+                  <a:schemeClr val="bg1"/>
+                </a:solidFill>
+              </a:rPr>
+              <a:t>Risk</a:t>
+            </a:r>
+            <a:endParaRPr lang="en-US" sz="1300" dirty="0"/>
+          </a:p>
+        </p:txBody>
+      </p:sp>
+      <p:sp>
+        <p:nvSpPr>
+          <p:cNvPr id="26" name="in-0-arrow"/>
+          <p:cNvSpPr/>
+          <p:nvPr/>
+        </p:nvSpPr>
+        <p:spPr>
+          <a:xfrm>
+            <a:off x="7406640" y="3447288"/>
+            <a:ext cx="365760" cy="0"/>
+          </a:xfrm>
+          <a:prstGeom prst="line">
+            <a:avLst/>
+          </a:prstGeom>
+          <a:noFill/>
+          <a:ln w="19050">
+            <a:solidFill>
+              <a:schemeClr val="tx2"/>
+            </a:solidFill>
+            <a:prstDash val="solid"/>
+            <a:tailEnd type="triangle"/>
+          </a:ln>
+        </p:spPr>
+      </p:sp>
+      <p:sp>
+        <p:nvSpPr>
+          <p:cNvPr id="27" name="in-1"/>
+          <p:cNvSpPr/>
+          <p:nvPr/>
+        </p:nvSpPr>
+        <p:spPr>
+          <a:xfrm>
+            <a:off x="6400800" y="3822192"/>
+            <a:ext cx="960120" cy="457200"/>
+          </a:xfrm>
+          <a:prstGeom prst="roundRect">
+            <a:avLst>
+              <a:gd name="adj" fmla="val 12000"/>
+            </a:avLst>
+          </a:prstGeom>
+          <a:solidFill>
+            <a:schemeClr val="accent2"/>
+          </a:solidFill>
+          <a:ln/>
+        </p:spPr>
+      </p:sp>
+      <p:sp>
+        <p:nvSpPr>
+          <p:cNvPr id="28" name="in-1-text"/>
+          <p:cNvSpPr txBox="1"/>
+          <p:nvPr/>
+        </p:nvSpPr>
+        <p:spPr>
+          <a:xfrm>
+            <a:off x="6400800" y="3822192"/>
+            <a:ext cx="960120" cy="457200"/>
+          </a:xfrm>
+          <a:prstGeom prst="rect">
+            <a:avLst/>
+          </a:prstGeom>
+          <a:noFill/>
+          <a:ln/>
+        </p:spPr>
+        <p:txBody>
+          <a:bodyPr wrap="square" lIns="0" tIns="0" rIns="0" bIns="0" rtlCol="0" anchor="ctr"/>
+          <a:lstStyle/>
+          <a:p>
+            <a:pPr algn="ctr" indent="0" marL="0">
+              <a:buNone/>
+            </a:pPr>
+            <a:r>
+              <a:rPr lang="en-US" sz="1300" b="1" dirty="0">
+                <a:solidFill>
+                  <a:schemeClr val="bg1"/>
+                </a:solidFill>
+              </a:rPr>
+              <a:t>Opp.</a:t>
+            </a:r>
+            <a:endParaRPr lang="en-US" sz="1300" dirty="0"/>
+          </a:p>
+        </p:txBody>
+      </p:sp>
+      <p:sp>
+        <p:nvSpPr>
+          <p:cNvPr id="29" name="in-1-arrow"/>
+          <p:cNvSpPr/>
+          <p:nvPr/>
+        </p:nvSpPr>
+        <p:spPr>
+          <a:xfrm>
+            <a:off x="7406640" y="4050792"/>
+            <a:ext cx="365760" cy="0"/>
+          </a:xfrm>
+          <a:prstGeom prst="line">
+            <a:avLst/>
+          </a:prstGeom>
+          <a:noFill/>
+          <a:ln w="19050">
+            <a:solidFill>
+              <a:schemeClr val="tx2"/>
+            </a:solidFill>
+            <a:prstDash val="solid"/>
+            <a:tailEnd type="triangle"/>
+          </a:ln>
+        </p:spPr>
+      </p:sp>
+      <p:sp>
+        <p:nvSpPr>
+          <p:cNvPr id="30" name="in-2"/>
+          <p:cNvSpPr/>
+          <p:nvPr/>
+        </p:nvSpPr>
+        <p:spPr>
+          <a:xfrm>
+            <a:off x="6400800" y="4425696"/>
+            <a:ext cx="960120" cy="457200"/>
+          </a:xfrm>
+          <a:prstGeom prst="roundRect">
+            <a:avLst>
+              <a:gd name="adj" fmla="val 12000"/>
+            </a:avLst>
+          </a:prstGeom>
+          <a:solidFill>
+            <a:schemeClr val="accent1"/>
+          </a:solidFill>
+          <a:ln/>
+        </p:spPr>
+      </p:sp>
+      <p:sp>
+        <p:nvSpPr>
+          <p:cNvPr id="31" name="in-2-text"/>
+          <p:cNvSpPr txBox="1"/>
+          <p:nvPr/>
+        </p:nvSpPr>
+        <p:spPr>
+          <a:xfrm>
+            <a:off x="6400800" y="4425696"/>
+            <a:ext cx="960120" cy="457200"/>
+          </a:xfrm>
+          <a:prstGeom prst="rect">
+            <a:avLst/>
+          </a:prstGeom>
+          <a:noFill/>
+          <a:ln/>
+        </p:spPr>
+        <p:txBody>
+          <a:bodyPr wrap="square" lIns="0" tIns="0" rIns="0" bIns="0" rtlCol="0" anchor="ctr"/>
+          <a:lstStyle/>
+          <a:p>
+            <a:pPr algn="ctr" indent="0" marL="0">
+              <a:buNone/>
+            </a:pPr>
+            <a:r>
+              <a:rPr lang="en-US" sz="1300" b="1" dirty="0">
+                <a:solidFill>
+                  <a:schemeClr val="bg1"/>
+                </a:solidFill>
+              </a:rPr>
+              <a:t>Risk</a:t>
+            </a:r>
+            <a:endParaRPr lang="en-US" sz="1300" dirty="0"/>
+          </a:p>
+        </p:txBody>
+      </p:sp>
+      <p:sp>
+        <p:nvSpPr>
+          <p:cNvPr id="32" name="in-2-arrow"/>
+          <p:cNvSpPr/>
+          <p:nvPr/>
+        </p:nvSpPr>
+        <p:spPr>
+          <a:xfrm>
+            <a:off x="7406640" y="4654296"/>
+            <a:ext cx="365760" cy="0"/>
+          </a:xfrm>
+          <a:prstGeom prst="line">
+            <a:avLst/>
+          </a:prstGeom>
+          <a:noFill/>
+          <a:ln w="19050">
+            <a:solidFill>
+              <a:schemeClr val="tx2"/>
+            </a:solidFill>
+            <a:prstDash val="solid"/>
+            <a:tailEnd type="triangle"/>
+          </a:ln>
+        </p:spPr>
+      </p:sp>
+      <p:sp>
+        <p:nvSpPr>
+          <p:cNvPr id="33" name="in-3"/>
+          <p:cNvSpPr/>
+          <p:nvPr/>
+        </p:nvSpPr>
+        <p:spPr>
+          <a:xfrm>
+            <a:off x="6400800" y="5029200"/>
+            <a:ext cx="960120" cy="457200"/>
+          </a:xfrm>
+          <a:prstGeom prst="roundRect">
+            <a:avLst>
+              <a:gd name="adj" fmla="val 12000"/>
+            </a:avLst>
+          </a:prstGeom>
+          <a:solidFill>
+            <a:schemeClr val="accent2"/>
+          </a:solidFill>
+          <a:ln/>
+        </p:spPr>
+      </p:sp>
+      <p:sp>
+        <p:nvSpPr>
+          <p:cNvPr id="34" name="in-3-text"/>
+          <p:cNvSpPr txBox="1"/>
+          <p:nvPr/>
+        </p:nvSpPr>
+        <p:spPr>
+          <a:xfrm>
+            <a:off x="6400800" y="5029200"/>
+            <a:ext cx="960120" cy="457200"/>
+          </a:xfrm>
+          <a:prstGeom prst="rect">
+            <a:avLst/>
+          </a:prstGeom>
+          <a:noFill/>
+          <a:ln/>
+        </p:spPr>
+        <p:txBody>
+          <a:bodyPr wrap="square" lIns="0" tIns="0" rIns="0" bIns="0" rtlCol="0" anchor="ctr"/>
+          <a:lstStyle/>
+          <a:p>
+            <a:pPr algn="ctr" indent="0" marL="0">
+              <a:buNone/>
+            </a:pPr>
+            <a:r>
+              <a:rPr lang="en-US" sz="1300" b="1" dirty="0">
+                <a:solidFill>
+                  <a:schemeClr val="bg1"/>
+                </a:solidFill>
+              </a:rPr>
+              <a:t>Opp.</a:t>
+            </a:r>
+            <a:endParaRPr lang="en-US" sz="1300" dirty="0"/>
+          </a:p>
+        </p:txBody>
+      </p:sp>
+      <p:sp>
+        <p:nvSpPr>
+          <p:cNvPr id="35" name="in-3-arrow"/>
+          <p:cNvSpPr/>
+          <p:nvPr/>
+        </p:nvSpPr>
+        <p:spPr>
+          <a:xfrm>
+            <a:off x="7406640" y="5257800"/>
+            <a:ext cx="365760" cy="0"/>
+          </a:xfrm>
+          <a:prstGeom prst="line">
+            <a:avLst/>
+          </a:prstGeom>
+          <a:noFill/>
+          <a:ln w="19050">
+            <a:solidFill>
+              <a:schemeClr val="tx2"/>
+            </a:solidFill>
+            <a:prstDash val="solid"/>
+            <a:tailEnd type="triangle"/>
+          </a:ln>
+        </p:spPr>
+      </p:sp>
+      <p:sp>
+        <p:nvSpPr>
+          <p:cNvPr id="36" name="in-caption"/>
+          <p:cNvSpPr txBox="1"/>
+          <p:nvPr/>
+        </p:nvSpPr>
+        <p:spPr>
+          <a:xfrm>
+            <a:off x="6263640" y="5596128"/>
+            <a:ext cx="1234440" cy="457200"/>
+          </a:xfrm>
+          <a:prstGeom prst="rect">
+            <a:avLst/>
+          </a:prstGeom>
+          <a:noFill/>
+          <a:ln/>
+        </p:spPr>
+        <p:txBody>
+          <a:bodyPr wrap="square" lIns="0" tIns="0" rIns="0" bIns="0" rtlCol="0" anchor="t"/>
+          <a:lstStyle/>
+          <a:p>
+            <a:pPr algn="ctr" indent="0" marL="0">
+              <a:buNone/>
+            </a:pPr>
+            <a:r>
+              <a:rPr lang="en-US" sz="1000" i="1" dirty="0">
+                <a:solidFill>
+                  <a:schemeClr val="tx2"/>
+                </a:solidFill>
+              </a:rPr>
+              <a:t>Risks and opportunities from ARM</a:t>
+            </a:r>
+            <a:endParaRPr lang="en-US" sz="1000" dirty="0"/>
+          </a:p>
+        </p:txBody>
+      </p:sp>
+      <p:sp>
+        <p:nvSpPr>
+          <p:cNvPr id="37" name="dash"/>
+          <p:cNvSpPr/>
+          <p:nvPr/>
+        </p:nvSpPr>
+        <p:spPr>
+          <a:xfrm>
+            <a:off x="7818120" y="3218688"/>
+            <a:ext cx="1463040" cy="2267712"/>
+          </a:xfrm>
+          <a:prstGeom prst="roundRect">
+            <a:avLst>
+              <a:gd name="adj" fmla="val 5000"/>
+            </a:avLst>
+          </a:prstGeom>
+          <a:solidFill>
+            <a:schemeClr val="tx1"/>
+          </a:solidFill>
+          <a:ln/>
+        </p:spPr>
+      </p:sp>
+      <p:sp>
+        <p:nvSpPr>
+          <p:cNvPr id="38" name="dash-text"/>
+          <p:cNvSpPr txBox="1"/>
+          <p:nvPr/>
+        </p:nvSpPr>
+        <p:spPr>
+          <a:xfrm>
+            <a:off x="7818120" y="3218688"/>
+            <a:ext cx="1463040" cy="2267712"/>
+          </a:xfrm>
+          <a:prstGeom prst="rect">
+            <a:avLst/>
+          </a:prstGeom>
+          <a:noFill/>
+          <a:ln/>
+        </p:spPr>
+        <p:txBody>
+          <a:bodyPr wrap="square" lIns="0" tIns="0" rIns="0" bIns="0" rtlCol="0" anchor="ctr"/>
+          <a:lstStyle/>
+          <a:p>
+            <a:pPr algn="ctr" indent="0" marL="0">
+              <a:buNone/>
+            </a:pPr>
+            <a:r>
+              <a:rPr lang="en-US" sz="1700" b="1" dirty="0">
+                <a:solidFill>
+                  <a:schemeClr val="bg1"/>
+                </a:solidFill>
+              </a:rPr>
+              <a:t>Dashboard</a:t>
+            </a:r>
+            <a:endParaRPr lang="en-US" sz="1700" dirty="0"/>
+          </a:p>
+        </p:txBody>
+      </p:sp>
+      <p:sp>
+        <p:nvSpPr>
+          <p:cNvPr id="39" name="out-0-arrow"/>
+          <p:cNvSpPr/>
+          <p:nvPr/>
+        </p:nvSpPr>
+        <p:spPr>
+          <a:xfrm>
+            <a:off x="9326880" y="3717036"/>
+            <a:ext cx="365760" cy="0"/>
+          </a:xfrm>
+          <a:prstGeom prst="line">
+            <a:avLst/>
+          </a:prstGeom>
+          <a:noFill/>
+          <a:ln w="19050">
+            <a:solidFill>
+              <a:schemeClr val="tx2"/>
+            </a:solidFill>
+            <a:prstDash val="solid"/>
+            <a:tailEnd type="triangle"/>
+          </a:ln>
+        </p:spPr>
+      </p:sp>
+      <p:sp>
+        <p:nvSpPr>
+          <p:cNvPr id="40" name="out-0"/>
+          <p:cNvSpPr/>
+          <p:nvPr/>
+        </p:nvSpPr>
+        <p:spPr>
+          <a:xfrm>
+            <a:off x="9738360" y="3218688"/>
+            <a:ext cx="1584655" cy="996696"/>
+          </a:xfrm>
+          <a:prstGeom prst="roundRect">
+            <a:avLst>
+              <a:gd name="adj" fmla="val 7339"/>
+            </a:avLst>
+          </a:prstGeom>
+          <a:solidFill>
+            <a:schemeClr val="accent4"/>
+          </a:solidFill>
+          <a:ln/>
+        </p:spPr>
+      </p:sp>
+      <p:sp>
+        <p:nvSpPr>
+          <p:cNvPr id="41" name="out-0-text"/>
+          <p:cNvSpPr txBox="1"/>
+          <p:nvPr/>
+        </p:nvSpPr>
+        <p:spPr>
+          <a:xfrm>
+            <a:off x="9848088" y="3218688"/>
+            <a:ext cx="1365199" cy="996696"/>
+          </a:xfrm>
+          <a:prstGeom prst="rect">
+            <a:avLst/>
+          </a:prstGeom>
+          <a:noFill/>
+          <a:ln/>
+        </p:spPr>
+        <p:txBody>
+          <a:bodyPr wrap="square" lIns="0" tIns="0" rIns="0" bIns="0" rtlCol="0" anchor="ctr"/>
+          <a:lstStyle/>
+          <a:p>
+            <a:pPr algn="ctr" indent="0" marL="0">
+              <a:buNone/>
+            </a:pPr>
+            <a:r>
+              <a:rPr lang="en-US" sz="1600" b="1" dirty="0">
+                <a:solidFill>
+                  <a:schemeClr val="bg1"/>
+                </a:solidFill>
+              </a:rPr>
+              <a:t>Reports</a:t>
+            </a:r>
+            <a:endParaRPr lang="en-US" sz="1600" dirty="0"/>
+          </a:p>
+          <a:p>
+            <a:pPr algn="ctr" indent="0" marL="0">
+              <a:buNone/>
+            </a:pPr>
+            <a:r>
+              <a:rPr lang="en-US" sz="1100" dirty="0">
+                <a:solidFill>
+                  <a:schemeClr val="bg1"/>
+                </a:solidFill>
+              </a:rPr>
+              <a:t>One-pagers, report tables and print</a:t>
+            </a:r>
+            <a:endParaRPr lang="en-US" sz="1600" dirty="0"/>
+          </a:p>
+        </p:txBody>
+      </p:sp>
+      <p:sp>
+        <p:nvSpPr>
+          <p:cNvPr id="42" name="out-1-arrow"/>
+          <p:cNvSpPr/>
+          <p:nvPr/>
+        </p:nvSpPr>
+        <p:spPr>
+          <a:xfrm>
+            <a:off x="9326880" y="4988052"/>
+            <a:ext cx="365760" cy="0"/>
+          </a:xfrm>
+          <a:prstGeom prst="line">
+            <a:avLst/>
+          </a:prstGeom>
+          <a:noFill/>
+          <a:ln w="19050">
+            <a:solidFill>
+              <a:schemeClr val="tx2"/>
+            </a:solidFill>
+            <a:prstDash val="solid"/>
+            <a:tailEnd type="triangle"/>
+          </a:ln>
+        </p:spPr>
+      </p:sp>
+      <p:sp>
+        <p:nvSpPr>
+          <p:cNvPr id="43" name="out-1"/>
+          <p:cNvSpPr/>
+          <p:nvPr/>
+        </p:nvSpPr>
+        <p:spPr>
+          <a:xfrm>
+            <a:off x="9738360" y="4489704"/>
+            <a:ext cx="1584655" cy="996696"/>
+          </a:xfrm>
+          <a:prstGeom prst="roundRect">
+            <a:avLst>
+              <a:gd name="adj" fmla="val 7339"/>
+            </a:avLst>
+          </a:prstGeom>
+          <a:solidFill>
+            <a:schemeClr val="accent3"/>
+          </a:solidFill>
+          <a:ln/>
+        </p:spPr>
+      </p:sp>
+      <p:sp>
+        <p:nvSpPr>
+          <p:cNvPr id="44" name="out-1-text"/>
+          <p:cNvSpPr txBox="1"/>
+          <p:nvPr/>
+        </p:nvSpPr>
+        <p:spPr>
+          <a:xfrm>
+            <a:off x="9848088" y="4489704"/>
+            <a:ext cx="1365199" cy="996696"/>
+          </a:xfrm>
+          <a:prstGeom prst="rect">
+            <a:avLst/>
+          </a:prstGeom>
+          <a:noFill/>
+          <a:ln/>
+        </p:spPr>
+        <p:txBody>
+          <a:bodyPr wrap="square" lIns="0" tIns="0" rIns="0" bIns="0" rtlCol="0" anchor="ctr"/>
+          <a:lstStyle/>
+          <a:p>
+            <a:pPr algn="ctr" indent="0" marL="0">
+              <a:buNone/>
+            </a:pPr>
+            <a:r>
+              <a:rPr lang="en-US" sz="1600" b="1" dirty="0">
+                <a:solidFill>
+                  <a:schemeClr val="bg1"/>
+                </a:solidFill>
+              </a:rPr>
+              <a:t>Insights</a:t>
+            </a:r>
+            <a:endParaRPr lang="en-US" sz="1600" dirty="0"/>
+          </a:p>
+          <a:p>
+            <a:pPr algn="ctr" indent="0" marL="0">
+              <a:buNone/>
+            </a:pPr>
+            <a:r>
+              <a:rPr lang="en-US" sz="1100" dirty="0">
+                <a:solidFill>
+                  <a:schemeClr val="bg1"/>
+                </a:solidFill>
+              </a:rPr>
+              <a:t>Criticality · Key messages · Trend · Status</a:t>
+            </a:r>
+            <a:endParaRPr lang="en-US" sz="1600" dirty="0"/>
           </a:p>
         </p:txBody>
       </p:sp>
@@ -12815,1051 +13181,12 @@
   <p:clrMapOvr>
     <a:masterClrMapping/>
   </p:clrMapOvr>
-  <mc:AlternateContent xmlns:mc="http://schemas.openxmlformats.org/markup-compatibility/2006">
-    <mc:Choice xmlns:p159="http://schemas.microsoft.com/office/powerpoint/2015/09/main" xmlns:p14="http://schemas.microsoft.com/office/powerpoint/2010/main" Requires="p159">
-      <p:transition spd="slow" p14:dur="1100" advTm="600">
-        <p159:morph option="byObject"/>
-      </p:transition>
-    </mc:Choice>
-    <mc:Fallback>
-      <p:transition spd="slow" advTm="600">
-        <p:fade/>
-      </p:transition>
-    </mc:Fallback>
-  </mc:AlternateContent>
 </p:sld>
 </file>
 
 <file path=ppt/slides/slide5.xml><?xml version="1.0" encoding="utf-8"?>
 <p:sld xmlns:a="http://schemas.openxmlformats.org/drawingml/2006/main" xmlns:r="http://schemas.openxmlformats.org/officeDocument/2006/relationships" xmlns:p="http://schemas.openxmlformats.org/presentationml/2006/main">
   <p:cSld name="Slide 5">
-    <p:spTree>
-      <p:nvGrpSpPr>
-        <p:cNvPr id="1" name=""/>
-        <p:cNvGrpSpPr/>
-        <p:nvPr/>
-      </p:nvGrpSpPr>
-      <p:grpSpPr>
-        <a:xfrm>
-          <a:off x="0" y="0"/>
-          <a:ext cx="0" cy="0"/>
-          <a:chOff x="0" y="0"/>
-          <a:chExt cx="0" cy="0"/>
-        </a:xfrm>
-      </p:grpSpPr>
-      <p:sp>
-        <p:nvSpPr>
-          <p:cNvPr id="2" name="criterion"/>
-          <p:cNvSpPr txBox="1"/>
-          <p:nvPr/>
-        </p:nvSpPr>
-        <p:spPr>
-          <a:xfrm>
-            <a:off x="548640" y="201168"/>
-            <a:ext cx="5486400" cy="256032"/>
-          </a:xfrm>
-          <a:prstGeom prst="rect">
-            <a:avLst/>
-          </a:prstGeom>
-          <a:noFill/>
-          <a:ln/>
-        </p:spPr>
-        <p:txBody>
-          <a:bodyPr wrap="square" lIns="0" tIns="0" rIns="0" bIns="0" rtlCol="0" anchor="t"/>
-          <a:lstStyle/>
-          <a:p>
-            <a:pPr indent="0" marL="0">
-              <a:buNone/>
-            </a:pPr>
-            <a:r>
-              <a:rPr lang="en-US" sz="1100" b="1" spc="200" kern="0" dirty="0">
-                <a:solidFill>
-                  <a:schemeClr val="accent3"/>
-                </a:solidFill>
-              </a:rPr>
-              <a:t>CONTEXT</a:t>
-            </a:r>
-            <a:endParaRPr lang="en-US" sz="1100" dirty="0"/>
-          </a:p>
-        </p:txBody>
-      </p:sp>
-      <p:sp>
-        <p:nvSpPr>
-          <p:cNvPr id="3" name="Text 1"/>
-          <p:cNvSpPr/>
-          <p:nvPr>
-            <p:ph idx="101" type="title" hasCustomPrompt="1"/>
-          </p:nvPr>
-        </p:nvSpPr>
-        <p:spPr>
-          <a:xfrm>
-            <a:off x="548640" y="502920"/>
-            <a:ext cx="11094415" cy="822960"/>
-          </a:xfrm>
-          <a:prstGeom prst="rect">
-            <a:avLst/>
-          </a:prstGeom>
-          <a:noFill/>
-          <a:ln/>
-        </p:spPr>
-        <p:txBody>
-          <a:bodyPr wrap="square" lIns="0" tIns="0" rIns="0" bIns="0" rtlCol="0" anchor="t"/>
-          <a:lstStyle/>
-          <a:p>
-            <a:pPr algn="l" indent="0" marL="0">
-              <a:buNone/>
-            </a:pPr>
-            <a:r>
-              <a:rPr lang="en-US" sz="3600" b="1" dirty="0">
-                <a:solidFill>
-                  <a:schemeClr val="tx1"/>
-                </a:solidFill>
-              </a:rPr>
-              <a:t>ERM is part of DMS Performance Management</a:t>
-            </a:r>
-            <a:endParaRPr lang="en-US" sz="3600" dirty="0"/>
-          </a:p>
-        </p:txBody>
-      </p:sp>
-      <p:sp>
-        <p:nvSpPr>
-          <p:cNvPr id="4" name="tree-dms"/>
-          <p:cNvSpPr/>
-          <p:nvPr/>
-        </p:nvSpPr>
-        <p:spPr>
-          <a:xfrm>
-            <a:off x="3108960" y="1508760"/>
-            <a:ext cx="1645920" cy="502920"/>
-          </a:xfrm>
-          <a:prstGeom prst="roundRect">
-            <a:avLst>
-              <a:gd name="adj" fmla="val 21818"/>
-            </a:avLst>
-          </a:prstGeom>
-          <a:solidFill>
-            <a:schemeClr val="tx1"/>
-          </a:solidFill>
-          <a:ln/>
-        </p:spPr>
-      </p:sp>
-      <p:sp>
-        <p:nvSpPr>
-          <p:cNvPr id="5" name="tree-dms-text"/>
-          <p:cNvSpPr txBox="1"/>
-          <p:nvPr/>
-        </p:nvSpPr>
-        <p:spPr>
-          <a:xfrm>
-            <a:off x="3108960" y="1508760"/>
-            <a:ext cx="1645920" cy="502920"/>
-          </a:xfrm>
-          <a:prstGeom prst="rect">
-            <a:avLst/>
-          </a:prstGeom>
-          <a:noFill/>
-          <a:ln/>
-        </p:spPr>
-        <p:txBody>
-          <a:bodyPr wrap="square" lIns="0" tIns="0" rIns="0" bIns="0" rtlCol="0" anchor="ctr"/>
-          <a:lstStyle/>
-          <a:p>
-            <a:pPr algn="ctr" indent="0" marL="0">
-              <a:buNone/>
-            </a:pPr>
-            <a:r>
-              <a:rPr lang="en-US" sz="1600" b="1" dirty="0">
-                <a:solidFill>
-                  <a:schemeClr val="bg1"/>
-                </a:solidFill>
-              </a:rPr>
-              <a:t>DMS</a:t>
-            </a:r>
-            <a:endParaRPr lang="en-US" sz="1600" dirty="0"/>
-          </a:p>
-        </p:txBody>
-      </p:sp>
-      <p:sp>
-        <p:nvSpPr>
-          <p:cNvPr id="6" name="tree-l0"/>
-          <p:cNvSpPr/>
-          <p:nvPr/>
-        </p:nvSpPr>
-        <p:spPr>
-          <a:xfrm>
-            <a:off x="3931920" y="2011680"/>
-            <a:ext cx="0" cy="320040"/>
-          </a:xfrm>
-          <a:prstGeom prst="line">
-            <a:avLst/>
-          </a:prstGeom>
-          <a:noFill/>
-          <a:ln w="22225">
-            <a:solidFill>
-              <a:schemeClr val="accent2"/>
-            </a:solidFill>
-            <a:prstDash val="solid"/>
-          </a:ln>
-        </p:spPr>
-      </p:sp>
-      <p:sp>
-        <p:nvSpPr>
-          <p:cNvPr id="7" name="tree-pm"/>
-          <p:cNvSpPr/>
-          <p:nvPr/>
-        </p:nvSpPr>
-        <p:spPr>
-          <a:xfrm>
-            <a:off x="2103120" y="2331720"/>
-            <a:ext cx="3657600" cy="640080"/>
-          </a:xfrm>
-          <a:prstGeom prst="roundRect">
-            <a:avLst>
-              <a:gd name="adj" fmla="val 17143"/>
-            </a:avLst>
-          </a:prstGeom>
-          <a:solidFill>
-            <a:schemeClr val="accent2"/>
-          </a:solidFill>
-          <a:ln/>
-        </p:spPr>
-      </p:sp>
-      <p:sp>
-        <p:nvSpPr>
-          <p:cNvPr id="8" name="tree-pm-text"/>
-          <p:cNvSpPr txBox="1"/>
-          <p:nvPr/>
-        </p:nvSpPr>
-        <p:spPr>
-          <a:xfrm>
-            <a:off x="2103120" y="2331720"/>
-            <a:ext cx="3657600" cy="640080"/>
-          </a:xfrm>
-          <a:prstGeom prst="rect">
-            <a:avLst/>
-          </a:prstGeom>
-          <a:noFill/>
-          <a:ln/>
-        </p:spPr>
-        <p:txBody>
-          <a:bodyPr wrap="square" lIns="0" tIns="0" rIns="0" bIns="0" rtlCol="0" anchor="ctr"/>
-          <a:lstStyle/>
-          <a:p>
-            <a:pPr algn="ctr" indent="0" marL="0">
-              <a:buNone/>
-            </a:pPr>
-            <a:r>
-              <a:rPr lang="en-US" sz="1700" b="1" dirty="0">
-                <a:solidFill>
-                  <a:schemeClr val="bg1"/>
-                </a:solidFill>
-              </a:rPr>
-              <a:t>Performance Management suite</a:t>
-            </a:r>
-            <a:endParaRPr lang="en-US" sz="1700" dirty="0"/>
-          </a:p>
-        </p:txBody>
-      </p:sp>
-      <p:sp>
-        <p:nvSpPr>
-          <p:cNvPr id="9" name="tree-l1"/>
-          <p:cNvSpPr/>
-          <p:nvPr/>
-        </p:nvSpPr>
-        <p:spPr>
-          <a:xfrm>
-            <a:off x="3931920" y="2971800"/>
-            <a:ext cx="0" cy="228600"/>
-          </a:xfrm>
-          <a:prstGeom prst="line">
-            <a:avLst/>
-          </a:prstGeom>
-          <a:noFill/>
-          <a:ln w="22225">
-            <a:solidFill>
-              <a:schemeClr val="accent2"/>
-            </a:solidFill>
-            <a:prstDash val="solid"/>
-          </a:ln>
-        </p:spPr>
-      </p:sp>
-      <p:sp>
-        <p:nvSpPr>
-          <p:cNvPr id="10" name="tree-bar"/>
-          <p:cNvSpPr/>
-          <p:nvPr/>
-        </p:nvSpPr>
-        <p:spPr>
-          <a:xfrm>
-            <a:off x="1577340" y="3200400"/>
-            <a:ext cx="4709160" cy="0"/>
-          </a:xfrm>
-          <a:prstGeom prst="line">
-            <a:avLst/>
-          </a:prstGeom>
-          <a:noFill/>
-          <a:ln w="22225">
-            <a:solidFill>
-              <a:schemeClr val="accent2"/>
-            </a:solidFill>
-            <a:prstDash val="solid"/>
-          </a:ln>
-        </p:spPr>
-      </p:sp>
-      <p:sp>
-        <p:nvSpPr>
-          <p:cNvPr id="11" name="tree-k0-l"/>
-          <p:cNvSpPr/>
-          <p:nvPr/>
-        </p:nvSpPr>
-        <p:spPr>
-          <a:xfrm>
-            <a:off x="1577340" y="3200400"/>
-            <a:ext cx="0" cy="228600"/>
-          </a:xfrm>
-          <a:prstGeom prst="line">
-            <a:avLst/>
-          </a:prstGeom>
-          <a:noFill/>
-          <a:ln w="22225">
-            <a:solidFill>
-              <a:schemeClr val="accent2"/>
-            </a:solidFill>
-            <a:prstDash val="solid"/>
-          </a:ln>
-        </p:spPr>
-      </p:sp>
-      <p:sp>
-        <p:nvSpPr>
-          <p:cNvPr id="12" name="tree-k0"/>
-          <p:cNvSpPr/>
-          <p:nvPr/>
-        </p:nvSpPr>
-        <p:spPr>
-          <a:xfrm>
-            <a:off x="548640" y="3429000"/>
-            <a:ext cx="2057400" cy="640080"/>
-          </a:xfrm>
-          <a:prstGeom prst="roundRect">
-            <a:avLst>
-              <a:gd name="adj" fmla="val 8571"/>
-            </a:avLst>
-          </a:prstGeom>
-          <a:solidFill>
-            <a:schemeClr val="bg2"/>
-          </a:solidFill>
-          <a:ln w="12700">
-            <a:solidFill>
-              <a:schemeClr val="accent5"/>
-            </a:solidFill>
-            <a:prstDash val="solid"/>
-          </a:ln>
-        </p:spPr>
-      </p:sp>
-      <p:sp>
-        <p:nvSpPr>
-          <p:cNvPr id="13" name="tree-k0-text"/>
-          <p:cNvSpPr txBox="1"/>
-          <p:nvPr/>
-        </p:nvSpPr>
-        <p:spPr>
-          <a:xfrm>
-            <a:off x="548640" y="3429000"/>
-            <a:ext cx="2057400" cy="640080"/>
-          </a:xfrm>
-          <a:prstGeom prst="rect">
-            <a:avLst/>
-          </a:prstGeom>
-          <a:noFill/>
-          <a:ln/>
-        </p:spPr>
-        <p:txBody>
-          <a:bodyPr wrap="square" lIns="0" tIns="0" rIns="0" bIns="0" rtlCol="0" anchor="ctr"/>
-          <a:lstStyle/>
-          <a:p>
-            <a:pPr algn="ctr" indent="0" marL="0">
-              <a:buNone/>
-            </a:pPr>
-            <a:r>
-              <a:rPr lang="en-US" sz="1400" b="1" dirty="0">
-                <a:solidFill>
-                  <a:schemeClr val="tx1"/>
-                </a:solidFill>
-              </a:rPr>
-              <a:t>KPIs / Data Products</a:t>
-            </a:r>
-            <a:endParaRPr lang="en-US" sz="1400" dirty="0"/>
-          </a:p>
-        </p:txBody>
-      </p:sp>
-      <p:sp>
-        <p:nvSpPr>
-          <p:cNvPr id="14" name="tree-k1-l"/>
-          <p:cNvSpPr/>
-          <p:nvPr/>
-        </p:nvSpPr>
-        <p:spPr>
-          <a:xfrm>
-            <a:off x="3931920" y="3200400"/>
-            <a:ext cx="0" cy="228600"/>
-          </a:xfrm>
-          <a:prstGeom prst="line">
-            <a:avLst/>
-          </a:prstGeom>
-          <a:noFill/>
-          <a:ln w="22225">
-            <a:solidFill>
-              <a:schemeClr val="accent2"/>
-            </a:solidFill>
-            <a:prstDash val="solid"/>
-          </a:ln>
-        </p:spPr>
-      </p:sp>
-      <p:sp>
-        <p:nvSpPr>
-          <p:cNvPr id="15" name="tree-k1"/>
-          <p:cNvSpPr/>
-          <p:nvPr/>
-        </p:nvSpPr>
-        <p:spPr>
-          <a:xfrm>
-            <a:off x="2903220" y="3429000"/>
-            <a:ext cx="2057400" cy="640080"/>
-          </a:xfrm>
-          <a:prstGeom prst="roundRect">
-            <a:avLst>
-              <a:gd name="adj" fmla="val 8571"/>
-            </a:avLst>
-          </a:prstGeom>
-          <a:solidFill>
-            <a:schemeClr val="bg2"/>
-          </a:solidFill>
-          <a:ln w="12700">
-            <a:solidFill>
-              <a:schemeClr val="accent5"/>
-            </a:solidFill>
-            <a:prstDash val="solid"/>
-          </a:ln>
-        </p:spPr>
-      </p:sp>
-      <p:sp>
-        <p:nvSpPr>
-          <p:cNvPr id="16" name="tree-k1-text"/>
-          <p:cNvSpPr txBox="1"/>
-          <p:nvPr/>
-        </p:nvSpPr>
-        <p:spPr>
-          <a:xfrm>
-            <a:off x="2903220" y="3429000"/>
-            <a:ext cx="2057400" cy="640080"/>
-          </a:xfrm>
-          <a:prstGeom prst="rect">
-            <a:avLst/>
-          </a:prstGeom>
-          <a:noFill/>
-          <a:ln/>
-        </p:spPr>
-        <p:txBody>
-          <a:bodyPr wrap="square" lIns="0" tIns="0" rIns="0" bIns="0" rtlCol="0" anchor="ctr"/>
-          <a:lstStyle/>
-          <a:p>
-            <a:pPr algn="ctr" indent="0" marL="0">
-              <a:buNone/>
-            </a:pPr>
-            <a:r>
-              <a:rPr lang="en-US" sz="1400" b="1" dirty="0">
-                <a:solidFill>
-                  <a:schemeClr val="tx1"/>
-                </a:solidFill>
-              </a:rPr>
-              <a:t>Dashboards</a:t>
-            </a:r>
-            <a:endParaRPr lang="en-US" sz="1400" dirty="0"/>
-          </a:p>
-        </p:txBody>
-      </p:sp>
-      <p:sp>
-        <p:nvSpPr>
-          <p:cNvPr id="17" name="tree-k2-l"/>
-          <p:cNvSpPr/>
-          <p:nvPr/>
-        </p:nvSpPr>
-        <p:spPr>
-          <a:xfrm>
-            <a:off x="6286500" y="3200400"/>
-            <a:ext cx="0" cy="228600"/>
-          </a:xfrm>
-          <a:prstGeom prst="line">
-            <a:avLst/>
-          </a:prstGeom>
-          <a:noFill/>
-          <a:ln w="22225">
-            <a:solidFill>
-              <a:schemeClr val="accent2"/>
-            </a:solidFill>
-            <a:prstDash val="solid"/>
-          </a:ln>
-        </p:spPr>
-      </p:sp>
-      <p:sp>
-        <p:nvSpPr>
-          <p:cNvPr id="18" name="!!erm"/>
-          <p:cNvSpPr/>
-          <p:nvPr/>
-        </p:nvSpPr>
-        <p:spPr>
-          <a:xfrm>
-            <a:off x="5257800" y="3429000"/>
-            <a:ext cx="2057400" cy="640080"/>
-          </a:xfrm>
-          <a:prstGeom prst="roundRect">
-            <a:avLst>
-              <a:gd name="adj" fmla="val 8571"/>
-            </a:avLst>
-          </a:prstGeom>
-          <a:solidFill>
-            <a:schemeClr val="accent1"/>
-          </a:solidFill>
-          <a:ln w="12700">
-            <a:solidFill>
-              <a:schemeClr val="accent1"/>
-            </a:solidFill>
-            <a:prstDash val="solid"/>
-          </a:ln>
-        </p:spPr>
-      </p:sp>
-      <p:sp>
-        <p:nvSpPr>
-          <p:cNvPr id="19" name="!!ermtext"/>
-          <p:cNvSpPr txBox="1"/>
-          <p:nvPr/>
-        </p:nvSpPr>
-        <p:spPr>
-          <a:xfrm>
-            <a:off x="5257800" y="3429000"/>
-            <a:ext cx="2057400" cy="640080"/>
-          </a:xfrm>
-          <a:prstGeom prst="rect">
-            <a:avLst/>
-          </a:prstGeom>
-          <a:noFill/>
-          <a:ln/>
-        </p:spPr>
-        <p:txBody>
-          <a:bodyPr wrap="square" lIns="0" tIns="0" rIns="0" bIns="0" rtlCol="0" anchor="ctr"/>
-          <a:lstStyle/>
-          <a:p>
-            <a:pPr algn="ctr" indent="0" marL="0">
-              <a:buNone/>
-            </a:pPr>
-            <a:r>
-              <a:rPr lang="en-US" sz="2000" b="1" dirty="0">
-                <a:solidFill>
-                  <a:schemeClr val="bg1"/>
-                </a:solidFill>
-              </a:rPr>
-              <a:t>ERM</a:t>
-            </a:r>
-            <a:endParaRPr lang="en-US" sz="2000" dirty="0"/>
-          </a:p>
-        </p:txBody>
-      </p:sp>
-      <p:sp>
-        <p:nvSpPr>
-          <p:cNvPr id="20" name="tree-l2"/>
-          <p:cNvSpPr/>
-          <p:nvPr/>
-        </p:nvSpPr>
-        <p:spPr>
-          <a:xfrm>
-            <a:off x="6286500" y="4069080"/>
-            <a:ext cx="0" cy="411480"/>
-          </a:xfrm>
-          <a:prstGeom prst="line">
-            <a:avLst/>
-          </a:prstGeom>
-          <a:noFill/>
-          <a:ln w="22225">
-            <a:solidFill>
-              <a:schemeClr val="accent2"/>
-            </a:solidFill>
-            <a:prstDash val="solid"/>
-          </a:ln>
-        </p:spPr>
-      </p:sp>
-      <p:sp>
-        <p:nvSpPr>
-          <p:cNvPr id="21" name="tree-fed"/>
-          <p:cNvSpPr txBox="1"/>
-          <p:nvPr/>
-        </p:nvSpPr>
-        <p:spPr>
-          <a:xfrm>
-            <a:off x="6377940" y="4142232"/>
-            <a:ext cx="1097280" cy="274320"/>
-          </a:xfrm>
-          <a:prstGeom prst="rect">
-            <a:avLst/>
-          </a:prstGeom>
-          <a:noFill/>
-          <a:ln/>
-        </p:spPr>
-        <p:txBody>
-          <a:bodyPr wrap="square" lIns="0" tIns="0" rIns="0" bIns="0" rtlCol="0" anchor="t"/>
-          <a:lstStyle/>
-          <a:p>
-            <a:pPr indent="0" marL="0">
-              <a:buNone/>
-            </a:pPr>
-            <a:r>
-              <a:rPr lang="en-US" sz="1100" i="1" dirty="0">
-                <a:solidFill>
-                  <a:schemeClr val="tx2"/>
-                </a:solidFill>
-              </a:rPr>
-              <a:t>fed by</a:t>
-            </a:r>
-            <a:endParaRPr lang="en-US" sz="1100" dirty="0"/>
-          </a:p>
-        </p:txBody>
-      </p:sp>
-      <p:sp>
-        <p:nvSpPr>
-          <p:cNvPr id="22" name="tree-arm"/>
-          <p:cNvSpPr/>
-          <p:nvPr/>
-        </p:nvSpPr>
-        <p:spPr>
-          <a:xfrm>
-            <a:off x="5257800" y="4480560"/>
-            <a:ext cx="2057400" cy="594360"/>
-          </a:xfrm>
-          <a:prstGeom prst="roundRect">
-            <a:avLst>
-              <a:gd name="adj" fmla="val 18462"/>
-            </a:avLst>
-          </a:prstGeom>
-          <a:solidFill>
-            <a:schemeClr val="bg1"/>
-          </a:solidFill>
-          <a:ln w="12700">
-            <a:solidFill>
-              <a:schemeClr val="accent5"/>
-            </a:solidFill>
-            <a:prstDash val="solid"/>
-          </a:ln>
-        </p:spPr>
-      </p:sp>
-      <p:sp>
-        <p:nvSpPr>
-          <p:cNvPr id="23" name="tree-arm-text"/>
-          <p:cNvSpPr txBox="1"/>
-          <p:nvPr/>
-        </p:nvSpPr>
-        <p:spPr>
-          <a:xfrm>
-            <a:off x="5257800" y="4480560"/>
-            <a:ext cx="2057400" cy="594360"/>
-          </a:xfrm>
-          <a:prstGeom prst="rect">
-            <a:avLst/>
-          </a:prstGeom>
-          <a:noFill/>
-          <a:ln/>
-        </p:spPr>
-        <p:txBody>
-          <a:bodyPr wrap="square" lIns="0" tIns="0" rIns="0" bIns="0" rtlCol="0" anchor="ctr"/>
-          <a:lstStyle/>
-          <a:p>
-            <a:pPr algn="ctr" indent="0" marL="0">
-              <a:buNone/>
-            </a:pPr>
-            <a:r>
-              <a:rPr lang="en-US" sz="1500" b="1" dirty="0">
-                <a:solidFill>
-                  <a:schemeClr val="tx1"/>
-                </a:solidFill>
-              </a:rPr>
-              <a:t>ARM </a:t>
-            </a:r>
-            <a:pPr algn="ctr" indent="0" marL="0">
-              <a:buNone/>
-            </a:pPr>
-            <a:r>
-              <a:rPr lang="en-US" sz="1100" dirty="0">
-                <a:solidFill>
-                  <a:schemeClr val="tx2"/>
-                </a:solidFill>
-              </a:rPr>
-              <a:t>(Riskonnect)</a:t>
-            </a:r>
-            <a:endParaRPr lang="en-US" sz="1500" dirty="0"/>
-          </a:p>
-        </p:txBody>
-      </p:sp>
-      <p:sp>
-        <p:nvSpPr>
-          <p:cNvPr id="24" name="tree-l3"/>
-          <p:cNvSpPr/>
-          <p:nvPr/>
-        </p:nvSpPr>
-        <p:spPr>
-          <a:xfrm>
-            <a:off x="6286500" y="5074920"/>
-            <a:ext cx="0" cy="365760"/>
-          </a:xfrm>
-          <a:prstGeom prst="line">
-            <a:avLst/>
-          </a:prstGeom>
-          <a:noFill/>
-          <a:ln w="22225">
-            <a:solidFill>
-              <a:schemeClr val="accent2"/>
-            </a:solidFill>
-            <a:prstDash val="solid"/>
-          </a:ln>
-        </p:spPr>
-      </p:sp>
-      <p:sp>
-        <p:nvSpPr>
-          <p:cNvPr id="25" name="tree-on"/>
-          <p:cNvSpPr txBox="1"/>
-          <p:nvPr/>
-        </p:nvSpPr>
-        <p:spPr>
-          <a:xfrm>
-            <a:off x="6377940" y="5120640"/>
-            <a:ext cx="1097280" cy="274320"/>
-          </a:xfrm>
-          <a:prstGeom prst="rect">
-            <a:avLst/>
-          </a:prstGeom>
-          <a:noFill/>
-          <a:ln/>
-        </p:spPr>
-        <p:txBody>
-          <a:bodyPr wrap="square" lIns="0" tIns="0" rIns="0" bIns="0" rtlCol="0" anchor="t"/>
-          <a:lstStyle/>
-          <a:p>
-            <a:pPr indent="0" marL="0">
-              <a:buNone/>
-            </a:pPr>
-            <a:r>
-              <a:rPr lang="en-US" sz="1100" i="1" dirty="0">
-                <a:solidFill>
-                  <a:schemeClr val="tx2"/>
-                </a:solidFill>
-              </a:rPr>
-              <a:t>built on</a:t>
-            </a:r>
-            <a:endParaRPr lang="en-US" sz="1100" dirty="0"/>
-          </a:p>
-        </p:txBody>
-      </p:sp>
-      <p:sp>
-        <p:nvSpPr>
-          <p:cNvPr id="26" name="tree-sky"/>
-          <p:cNvSpPr/>
-          <p:nvPr/>
-        </p:nvSpPr>
-        <p:spPr>
-          <a:xfrm>
-            <a:off x="4343400" y="5440680"/>
-            <a:ext cx="2971800" cy="868680"/>
-          </a:xfrm>
-          <a:prstGeom prst="roundRect">
-            <a:avLst>
-              <a:gd name="adj" fmla="val 12632"/>
-            </a:avLst>
-          </a:prstGeom>
-          <a:solidFill>
-            <a:schemeClr val="bg2"/>
-          </a:solidFill>
-          <a:ln w="15875">
-            <a:solidFill>
-              <a:schemeClr val="accent2"/>
-            </a:solidFill>
-            <a:prstDash val="solid"/>
-          </a:ln>
-        </p:spPr>
-      </p:sp>
-      <p:sp>
-        <p:nvSpPr>
-          <p:cNvPr id="27" name="tree-sky-text"/>
-          <p:cNvSpPr txBox="1"/>
-          <p:nvPr/>
-        </p:nvSpPr>
-        <p:spPr>
-          <a:xfrm>
-            <a:off x="4343400" y="5440680"/>
-            <a:ext cx="2971800" cy="868680"/>
-          </a:xfrm>
-          <a:prstGeom prst="rect">
-            <a:avLst/>
-          </a:prstGeom>
-          <a:noFill/>
-          <a:ln/>
-        </p:spPr>
-        <p:txBody>
-          <a:bodyPr wrap="square" lIns="0" tIns="0" rIns="0" bIns="0" rtlCol="0" anchor="ctr"/>
-          <a:lstStyle/>
-          <a:p>
-            <a:pPr algn="ctr" indent="0" marL="0">
-              <a:buNone/>
-            </a:pPr>
-            <a:r>
-              <a:rPr lang="en-US" sz="1500" b="1" dirty="0">
-                <a:solidFill>
-                  <a:schemeClr val="tx1"/>
-                </a:solidFill>
-              </a:rPr>
-              <a:t>Skywise Platform</a:t>
-            </a:r>
-            <a:endParaRPr lang="en-US" sz="1500" dirty="0"/>
-          </a:p>
-          <a:p>
-            <a:pPr algn="ctr" indent="0" marL="0">
-              <a:buNone/>
-            </a:pPr>
-            <a:r>
-              <a:rPr lang="en-US" sz="1200" dirty="0">
-                <a:solidFill>
-                  <a:schemeClr val="accent2"/>
-                </a:solidFill>
-              </a:rPr>
-              <a:t>Analytics &amp; Reporting</a:t>
-            </a:r>
-            <a:endParaRPr lang="en-US" sz="1500" dirty="0"/>
-          </a:p>
-        </p:txBody>
-      </p:sp>
-      <p:sp>
-        <p:nvSpPr>
-          <p:cNvPr id="28" name="does-card"/>
-          <p:cNvSpPr/>
-          <p:nvPr/>
-        </p:nvSpPr>
-        <p:spPr>
-          <a:xfrm>
-            <a:off x="7680960" y="1508760"/>
-            <a:ext cx="3962095" cy="4800600"/>
-          </a:xfrm>
-          <a:prstGeom prst="roundRect">
-            <a:avLst>
-              <a:gd name="adj" fmla="val 2769"/>
-            </a:avLst>
-          </a:prstGeom>
-          <a:solidFill>
-            <a:schemeClr val="tx1"/>
-          </a:solidFill>
-          <a:ln/>
-        </p:spPr>
-      </p:sp>
-      <p:sp>
-        <p:nvSpPr>
-          <p:cNvPr id="29" name="does-title"/>
-          <p:cNvSpPr txBox="1"/>
-          <p:nvPr/>
-        </p:nvSpPr>
-        <p:spPr>
-          <a:xfrm>
-            <a:off x="7955280" y="1737360"/>
-            <a:ext cx="3413455" cy="274320"/>
-          </a:xfrm>
-          <a:prstGeom prst="rect">
-            <a:avLst/>
-          </a:prstGeom>
-          <a:noFill/>
-          <a:ln/>
-        </p:spPr>
-        <p:txBody>
-          <a:bodyPr wrap="square" lIns="0" tIns="0" rIns="0" bIns="0" rtlCol="0" anchor="t"/>
-          <a:lstStyle/>
-          <a:p>
-            <a:pPr indent="0" marL="0">
-              <a:buNone/>
-            </a:pPr>
-            <a:r>
-              <a:rPr lang="en-US" sz="1100" b="1" spc="200" kern="0" dirty="0">
-                <a:solidFill>
-                  <a:schemeClr val="accent5"/>
-                </a:solidFill>
-              </a:rPr>
-              <a:t>WHAT ERM DOES</a:t>
-            </a:r>
-            <a:endParaRPr lang="en-US" sz="1100" dirty="0"/>
-          </a:p>
-        </p:txBody>
-      </p:sp>
-      <p:sp>
-        <p:nvSpPr>
-          <p:cNvPr id="30" name="does-list"/>
-          <p:cNvSpPr txBox="1"/>
-          <p:nvPr/>
-        </p:nvSpPr>
-        <p:spPr>
-          <a:xfrm>
-            <a:off x="7955280" y="2148840"/>
-            <a:ext cx="3413455" cy="3977640"/>
-          </a:xfrm>
-          <a:prstGeom prst="rect">
-            <a:avLst/>
-          </a:prstGeom>
-          <a:noFill/>
-          <a:ln/>
-        </p:spPr>
-        <p:txBody>
-          <a:bodyPr wrap="square" lIns="0" tIns="0" rIns="0" bIns="0" rtlCol="0" anchor="t"/>
-          <a:lstStyle/>
-          <a:p>
-            <a:pPr indent="0" marL="0">
-              <a:buNone/>
-            </a:pPr>
-            <a:r>
-              <a:rPr lang="en-US" sz="1700" b="1" dirty="0">
-                <a:solidFill>
-                  <a:schemeClr val="bg1"/>
-                </a:solidFill>
-              </a:rPr>
-              <a:t>One place for risks and opportunities</a:t>
-            </a:r>
-            <a:endParaRPr lang="en-US" sz="1700" dirty="0"/>
-          </a:p>
-          <a:p>
-            <a:pPr indent="0" marL="0">
-              <a:spcAft>
-                <a:spcPts val="2600"/>
-              </a:spcAft>
-              <a:buNone/>
-            </a:pPr>
-            <a:r>
-              <a:rPr lang="en-US" sz="1400" dirty="0">
-                <a:solidFill>
-                  <a:schemeClr val="accent5"/>
-                </a:solidFill>
-              </a:rPr>
-              <a:t>Brings ARM data into dashboards for every area</a:t>
-            </a:r>
-            <a:endParaRPr lang="en-US" sz="1700" dirty="0"/>
-          </a:p>
-          <a:p>
-            <a:pPr indent="0" marL="0">
-              <a:buNone/>
-            </a:pPr>
-            <a:r>
-              <a:rPr lang="en-US" sz="1700" b="1" dirty="0">
-                <a:solidFill>
-                  <a:schemeClr val="bg1"/>
-                </a:solidFill>
-              </a:rPr>
-              <a:t>Ready for every review</a:t>
-            </a:r>
-            <a:endParaRPr lang="en-US" sz="1700" dirty="0"/>
-          </a:p>
-          <a:p>
-            <a:pPr indent="0" marL="0">
-              <a:spcAft>
-                <a:spcPts val="2600"/>
-              </a:spcAft>
-              <a:buNone/>
-            </a:pPr>
-            <a:r>
-              <a:rPr lang="en-US" sz="1400" dirty="0">
-                <a:solidFill>
-                  <a:schemeClr val="accent5"/>
-                </a:solidFill>
-              </a:rPr>
-              <a:t>Heat maps, one-pagers, reports and action trackers</a:t>
-            </a:r>
-            <a:endParaRPr lang="en-US" sz="1700" dirty="0"/>
-          </a:p>
-          <a:p>
-            <a:pPr indent="0" marL="0">
-              <a:buNone/>
-            </a:pPr>
-            <a:r>
-              <a:rPr lang="en-US" sz="1700" b="1" dirty="0">
-                <a:solidFill>
-                  <a:schemeClr val="bg1"/>
-                </a:solidFill>
-              </a:rPr>
-              <a:t>A governed picture</a:t>
-            </a:r>
-            <a:endParaRPr lang="en-US" sz="1700" dirty="0"/>
-          </a:p>
-          <a:p>
-            <a:pPr indent="0" marL="0">
-              <a:spcAft>
-                <a:spcPts val="2600"/>
-              </a:spcAft>
-              <a:buNone/>
-            </a:pPr>
-            <a:r>
-              <a:rPr lang="en-US" sz="1400" dirty="0">
-                <a:solidFill>
-                  <a:schemeClr val="accent5"/>
-                </a:solidFill>
-              </a:rPr>
-              <a:t>Dashboards are validated and released every quarter</a:t>
-            </a:r>
-            <a:endParaRPr lang="en-US" sz="1700" dirty="0"/>
-          </a:p>
-          <a:p>
-            <a:pPr indent="0" marL="0">
-              <a:buNone/>
-            </a:pPr>
-            <a:r>
-              <a:rPr lang="en-US" sz="1700" b="1" dirty="0">
-                <a:solidFill>
-                  <a:schemeClr val="bg1"/>
-                </a:solidFill>
-              </a:rPr>
-              <a:t>Shared across Airbus</a:t>
-            </a:r>
-            <a:endParaRPr lang="en-US" sz="1700" dirty="0"/>
-          </a:p>
-          <a:p>
-            <a:pPr indent="0" marL="0">
-              <a:spcAft>
-                <a:spcPts val="2600"/>
-              </a:spcAft>
-              <a:buNone/>
-            </a:pPr>
-            <a:r>
-              <a:rPr lang="en-US" sz="1400" dirty="0">
-                <a:solidFill>
-                  <a:schemeClr val="accent5"/>
-                </a:solidFill>
-              </a:rPr>
-              <a:t>Used by many functions, across many sites</a:t>
-            </a:r>
-            <a:endParaRPr lang="en-US" sz="1700" dirty="0"/>
-          </a:p>
-        </p:txBody>
-      </p:sp>
-    </p:spTree>
-  </p:cSld>
-  <p:clrMapOvr>
-    <a:masterClrMapping/>
-  </p:clrMapOvr>
-  <mc:AlternateContent xmlns:mc="http://schemas.openxmlformats.org/markup-compatibility/2006">
-    <mc:Choice xmlns:p159="http://schemas.microsoft.com/office/powerpoint/2015/09/main" xmlns:p14="http://schemas.microsoft.com/office/powerpoint/2010/main" Requires="p159">
-      <p:transition spd="slow" p14:dur="1400">
-        <p159:morph option="byObject"/>
-      </p:transition>
-    </mc:Choice>
-    <mc:Fallback>
-      <p:transition spd="slow">
-        <p:fade/>
-      </p:transition>
-    </mc:Fallback>
-  </mc:AlternateContent>
-</p:sld>
-</file>
-
-<file path=ppt/slides/slide6.xml><?xml version="1.0" encoding="utf-8"?>
-<p:sld xmlns:a="http://schemas.openxmlformats.org/drawingml/2006/main" xmlns:r="http://schemas.openxmlformats.org/officeDocument/2006/relationships" xmlns:p="http://schemas.openxmlformats.org/presentationml/2006/main">
-  <p:cSld name="Slide 6">
     <p:spTree>
       <p:nvGrpSpPr>
         <p:cNvPr id="1" name=""/>
@@ -16362,9 +15689,9 @@
 </p:sld>
 </file>
 
-<file path=ppt/slides/slide7.xml><?xml version="1.0" encoding="utf-8"?>
+<file path=ppt/slides/slide6.xml><?xml version="1.0" encoding="utf-8"?>
 <p:sld xmlns:a="http://schemas.openxmlformats.org/drawingml/2006/main" xmlns:r="http://schemas.openxmlformats.org/officeDocument/2006/relationships" xmlns:p="http://schemas.openxmlformats.org/presentationml/2006/main">
-  <p:cSld name="Slide 7">
+  <p:cSld name="Slide 6">
     <p:spTree>
       <p:nvGrpSpPr>
         <p:cNvPr id="1" name=""/>
@@ -18309,9 +17636,9 @@
 </p:sld>
 </file>
 
-<file path=ppt/slides/slide8.xml><?xml version="1.0" encoding="utf-8"?>
+<file path=ppt/slides/slide7.xml><?xml version="1.0" encoding="utf-8"?>
 <p:sld xmlns:a="http://schemas.openxmlformats.org/drawingml/2006/main" xmlns:r="http://schemas.openxmlformats.org/officeDocument/2006/relationships" xmlns:p="http://schemas.openxmlformats.org/presentationml/2006/main">
-  <p:cSld name="Slide 8">
+  <p:cSld name="Slide 7">
     <p:spTree>
       <p:nvGrpSpPr>
         <p:cNvPr id="1" name=""/>
@@ -19602,9 +18929,9 @@
 </p:sld>
 </file>
 
-<file path=ppt/slides/slide9.xml><?xml version="1.0" encoding="utf-8"?>
+<file path=ppt/slides/slide8.xml><?xml version="1.0" encoding="utf-8"?>
 <p:sld xmlns:a="http://schemas.openxmlformats.org/drawingml/2006/main" xmlns:r="http://schemas.openxmlformats.org/officeDocument/2006/relationships" xmlns:p="http://schemas.openxmlformats.org/presentationml/2006/main">
-  <p:cSld name="Slide 9">
+  <p:cSld name="Slide 8">
     <p:spTree>
       <p:nvGrpSpPr>
         <p:cNvPr id="1" name=""/>
@@ -21711,6 +21038,1124 @@
       <p:bldP spid="26" grpId="0" animBg="1"/>
       <p:bldP spid="27" grpId="0" animBg="1"/>
       <p:bldP spid="28" grpId="0" animBg="1"/>
+    </p:bldLst>
+  </p:timing>
+</p:sld>
+</file>
+
+<file path=ppt/slides/slide9.xml><?xml version="1.0" encoding="utf-8"?>
+<p:sld xmlns:a="http://schemas.openxmlformats.org/drawingml/2006/main" xmlns:r="http://schemas.openxmlformats.org/officeDocument/2006/relationships" xmlns:p="http://schemas.openxmlformats.org/presentationml/2006/main">
+  <p:cSld name="Slide 9">
+    <p:spTree>
+      <p:nvGrpSpPr>
+        <p:cNvPr id="1" name=""/>
+        <p:cNvGrpSpPr/>
+        <p:nvPr/>
+      </p:nvGrpSpPr>
+      <p:grpSpPr>
+        <a:xfrm>
+          <a:off x="0" y="0"/>
+          <a:ext cx="0" cy="0"/>
+          <a:chOff x="0" y="0"/>
+          <a:chExt cx="0" cy="0"/>
+        </a:xfrm>
+      </p:grpSpPr>
+      <p:sp>
+        <p:nvSpPr>
+          <p:cNvPr id="2" name="criterion"/>
+          <p:cNvSpPr txBox="1"/>
+          <p:nvPr/>
+        </p:nvSpPr>
+        <p:spPr>
+          <a:xfrm>
+            <a:off x="548640" y="201168"/>
+            <a:ext cx="5486400" cy="256032"/>
+          </a:xfrm>
+          <a:prstGeom prst="rect">
+            <a:avLst/>
+          </a:prstGeom>
+          <a:noFill/>
+          <a:ln/>
+        </p:spPr>
+        <p:txBody>
+          <a:bodyPr wrap="square" lIns="0" tIns="0" rIns="0" bIns="0" rtlCol="0" anchor="t"/>
+          <a:lstStyle/>
+          <a:p>
+            <a:pPr indent="0" marL="0">
+              <a:buNone/>
+            </a:pPr>
+            <a:r>
+              <a:rPr lang="en-US" sz="1100" b="1" spc="200" kern="0" dirty="0">
+                <a:solidFill>
+                  <a:schemeClr val="accent3"/>
+                </a:solidFill>
+              </a:rPr>
+              <a:t>VOICE OF THE BUSINESS</a:t>
+            </a:r>
+            <a:endParaRPr lang="en-US" sz="1100" dirty="0"/>
+          </a:p>
+        </p:txBody>
+      </p:sp>
+      <p:sp>
+        <p:nvSpPr>
+          <p:cNvPr id="3" name="Text 1"/>
+          <p:cNvSpPr/>
+          <p:nvPr>
+            <p:ph idx="101" type="title" hasCustomPrompt="1"/>
+          </p:nvPr>
+        </p:nvSpPr>
+        <p:spPr>
+          <a:xfrm>
+            <a:off x="548640" y="502920"/>
+            <a:ext cx="11094415" cy="822960"/>
+          </a:xfrm>
+          <a:prstGeom prst="rect">
+            <a:avLst/>
+          </a:prstGeom>
+          <a:noFill/>
+          <a:ln/>
+        </p:spPr>
+        <p:txBody>
+          <a:bodyPr wrap="square" lIns="0" tIns="0" rIns="0" bIns="0" rtlCol="0" anchor="t"/>
+          <a:lstStyle/>
+          <a:p>
+            <a:pPr algn="l" indent="0" marL="0">
+              <a:buNone/>
+            </a:pPr>
+            <a:r>
+              <a:rPr lang="en-US" sz="3600" b="1" dirty="0">
+                <a:solidFill>
+                  <a:schemeClr val="tx1"/>
+                </a:solidFill>
+              </a:rPr>
+              <a:t>What the business says</a:t>
+            </a:r>
+            <a:endParaRPr lang="en-US" sz="3600" dirty="0"/>
+          </a:p>
+        </p:txBody>
+      </p:sp>
+      <p:sp>
+        <p:nvSpPr>
+          <p:cNvPr id="4" name="quote-sub"/>
+          <p:cNvSpPr txBox="1"/>
+          <p:nvPr/>
+        </p:nvSpPr>
+        <p:spPr>
+          <a:xfrm>
+            <a:off x="548640" y="1115568"/>
+            <a:ext cx="11094415" cy="320040"/>
+          </a:xfrm>
+          <a:prstGeom prst="rect">
+            <a:avLst/>
+          </a:prstGeom>
+          <a:noFill/>
+          <a:ln/>
+        </p:spPr>
+        <p:txBody>
+          <a:bodyPr wrap="square" lIns="0" tIns="0" rIns="0" bIns="0" rtlCol="0" anchor="t"/>
+          <a:lstStyle/>
+          <a:p>
+            <a:pPr indent="0" marL="0">
+              <a:buNone/>
+            </a:pPr>
+            <a:r>
+              <a:rPr lang="en-US" sz="1400" dirty="0">
+                <a:solidFill>
+                  <a:schemeClr val="tx2"/>
+                </a:solidFill>
+              </a:rPr>
+              <a:t>Feedback from ERM business stakeholders, September 2026</a:t>
+            </a:r>
+            <a:endParaRPr lang="en-US" sz="1400" dirty="0"/>
+          </a:p>
+        </p:txBody>
+      </p:sp>
+      <p:sp>
+        <p:nvSpPr>
+          <p:cNvPr id="5" name="quote-0-card"/>
+          <p:cNvSpPr/>
+          <p:nvPr/>
+        </p:nvSpPr>
+        <p:spPr>
+          <a:xfrm>
+            <a:off x="548640" y="1645920"/>
+            <a:ext cx="3515258" cy="4480560"/>
+          </a:xfrm>
+          <a:prstGeom prst="roundRect">
+            <a:avLst>
+              <a:gd name="adj" fmla="val 3121"/>
+            </a:avLst>
+          </a:prstGeom>
+          <a:solidFill>
+            <a:schemeClr val="tx1"/>
+          </a:solidFill>
+          <a:ln/>
+        </p:spPr>
+      </p:sp>
+      <p:sp>
+        <p:nvSpPr>
+          <p:cNvPr id="6" name="quote-0-mark"/>
+          <p:cNvSpPr txBox="1"/>
+          <p:nvPr/>
+        </p:nvSpPr>
+        <p:spPr>
+          <a:xfrm>
+            <a:off x="822960" y="1783080"/>
+            <a:ext cx="914400" cy="731520"/>
+          </a:xfrm>
+          <a:prstGeom prst="rect">
+            <a:avLst/>
+          </a:prstGeom>
+          <a:noFill/>
+          <a:ln/>
+        </p:spPr>
+        <p:txBody>
+          <a:bodyPr wrap="square" lIns="0" tIns="0" rIns="0" bIns="0" rtlCol="0" anchor="t"/>
+          <a:lstStyle/>
+          <a:p>
+            <a:pPr indent="0" marL="0">
+              <a:buNone/>
+            </a:pPr>
+            <a:r>
+              <a:rPr lang="en-US" sz="6000" b="1" dirty="0">
+                <a:solidFill>
+                  <a:schemeClr val="accent5"/>
+                </a:solidFill>
+              </a:rPr>
+              <a:t>“</a:t>
+            </a:r>
+            <a:endParaRPr lang="en-US" sz="6000" dirty="0"/>
+          </a:p>
+        </p:txBody>
+      </p:sp>
+      <p:sp>
+        <p:nvSpPr>
+          <p:cNvPr id="7" name="quote-0-text"/>
+          <p:cNvSpPr txBox="1"/>
+          <p:nvPr/>
+        </p:nvSpPr>
+        <p:spPr>
+          <a:xfrm>
+            <a:off x="822960" y="2514600"/>
+            <a:ext cx="2966618" cy="2606040"/>
+          </a:xfrm>
+          <a:prstGeom prst="rect">
+            <a:avLst/>
+          </a:prstGeom>
+          <a:noFill/>
+          <a:ln/>
+        </p:spPr>
+        <p:txBody>
+          <a:bodyPr wrap="square" lIns="0" tIns="0" rIns="0" bIns="0" rtlCol="0" anchor="t"/>
+          <a:lstStyle/>
+          <a:p>
+            <a:pPr indent="0" marL="0">
+              <a:buNone/>
+            </a:pPr>
+            <a:r>
+              <a:rPr lang="en-US" sz="1800" i="1" dirty="0">
+                <a:solidFill>
+                  <a:schemeClr val="bg1"/>
+                </a:solidFill>
+              </a:rPr>
+              <a:t>Thanks to a mix of regular teamwork with the business and strong IT skills, they have turned an idea into a user-friendly industrial [solution]… User interface and performance have significantly improved.</a:t>
+            </a:r>
+            <a:endParaRPr lang="en-US" sz="1800" dirty="0"/>
+          </a:p>
+        </p:txBody>
+      </p:sp>
+      <p:sp>
+        <p:nvSpPr>
+          <p:cNvPr id="8" name="quote-0-who"/>
+          <p:cNvSpPr txBox="1"/>
+          <p:nvPr/>
+        </p:nvSpPr>
+        <p:spPr>
+          <a:xfrm>
+            <a:off x="822960" y="5166360"/>
+            <a:ext cx="2966618" cy="731520"/>
+          </a:xfrm>
+          <a:prstGeom prst="rect">
+            <a:avLst/>
+          </a:prstGeom>
+          <a:noFill/>
+          <a:ln/>
+        </p:spPr>
+        <p:txBody>
+          <a:bodyPr wrap="square" lIns="0" tIns="0" rIns="0" bIns="0" rtlCol="0" anchor="b"/>
+          <a:lstStyle/>
+          <a:p>
+            <a:pPr indent="0" marL="0">
+              <a:buNone/>
+            </a:pPr>
+            <a:r>
+              <a:rPr lang="en-US" sz="1400" b="1" dirty="0">
+                <a:solidFill>
+                  <a:schemeClr val="bg1"/>
+                </a:solidFill>
+              </a:rPr>
+              <a:t>ERM Centre of Competence</a:t>
+            </a:r>
+            <a:endParaRPr lang="en-US" sz="1400" dirty="0"/>
+          </a:p>
+          <a:p>
+            <a:pPr indent="0" marL="0">
+              <a:buNone/>
+            </a:pPr>
+            <a:r>
+              <a:rPr lang="en-US" sz="1200" dirty="0">
+                <a:solidFill>
+                  <a:schemeClr val="accent5"/>
+                </a:solidFill>
+              </a:rPr>
+              <a:t>[Name]</a:t>
+            </a:r>
+            <a:endParaRPr lang="en-US" sz="1400" dirty="0"/>
+          </a:p>
+        </p:txBody>
+      </p:sp>
+      <p:sp>
+        <p:nvSpPr>
+          <p:cNvPr id="9" name="quote-1-card"/>
+          <p:cNvSpPr/>
+          <p:nvPr/>
+        </p:nvSpPr>
+        <p:spPr>
+          <a:xfrm>
+            <a:off x="4338218" y="1645920"/>
+            <a:ext cx="3515258" cy="4480560"/>
+          </a:xfrm>
+          <a:prstGeom prst="roundRect">
+            <a:avLst>
+              <a:gd name="adj" fmla="val 3121"/>
+            </a:avLst>
+          </a:prstGeom>
+          <a:solidFill>
+            <a:schemeClr val="bg1"/>
+          </a:solidFill>
+          <a:ln/>
+        </p:spPr>
+      </p:sp>
+      <p:sp>
+        <p:nvSpPr>
+          <p:cNvPr id="10" name="quote-1-mark"/>
+          <p:cNvSpPr txBox="1"/>
+          <p:nvPr/>
+        </p:nvSpPr>
+        <p:spPr>
+          <a:xfrm>
+            <a:off x="4612538" y="1783080"/>
+            <a:ext cx="914400" cy="731520"/>
+          </a:xfrm>
+          <a:prstGeom prst="rect">
+            <a:avLst/>
+          </a:prstGeom>
+          <a:noFill/>
+          <a:ln/>
+        </p:spPr>
+        <p:txBody>
+          <a:bodyPr wrap="square" lIns="0" tIns="0" rIns="0" bIns="0" rtlCol="0" anchor="t"/>
+          <a:lstStyle/>
+          <a:p>
+            <a:pPr indent="0" marL="0">
+              <a:buNone/>
+            </a:pPr>
+            <a:r>
+              <a:rPr lang="en-US" sz="6000" b="1" dirty="0">
+                <a:solidFill>
+                  <a:schemeClr val="accent3"/>
+                </a:solidFill>
+              </a:rPr>
+              <a:t>“</a:t>
+            </a:r>
+            <a:endParaRPr lang="en-US" sz="6000" dirty="0"/>
+          </a:p>
+        </p:txBody>
+      </p:sp>
+      <p:sp>
+        <p:nvSpPr>
+          <p:cNvPr id="11" name="quote-1-text"/>
+          <p:cNvSpPr txBox="1"/>
+          <p:nvPr/>
+        </p:nvSpPr>
+        <p:spPr>
+          <a:xfrm>
+            <a:off x="4612538" y="2514600"/>
+            <a:ext cx="2966618" cy="2606040"/>
+          </a:xfrm>
+          <a:prstGeom prst="rect">
+            <a:avLst/>
+          </a:prstGeom>
+          <a:noFill/>
+          <a:ln/>
+        </p:spPr>
+        <p:txBody>
+          <a:bodyPr wrap="square" lIns="0" tIns="0" rIns="0" bIns="0" rtlCol="0" anchor="t"/>
+          <a:lstStyle/>
+          <a:p>
+            <a:pPr indent="0" marL="0">
+              <a:buNone/>
+            </a:pPr>
+            <a:r>
+              <a:rPr lang="en-US" sz="1800" i="1" dirty="0">
+                <a:solidFill>
+                  <a:schemeClr val="tx1"/>
+                </a:solidFill>
+              </a:rPr>
+              <a:t>The Skywise ERM dashboard application is a tremendous addition to our ERM toolset… More and more users regularly prepare and facilitate risks &amp; opportunities reviews with the application.</a:t>
+            </a:r>
+            <a:endParaRPr lang="en-US" sz="1800" dirty="0"/>
+          </a:p>
+        </p:txBody>
+      </p:sp>
+      <p:sp>
+        <p:nvSpPr>
+          <p:cNvPr id="12" name="quote-1-who"/>
+          <p:cNvSpPr txBox="1"/>
+          <p:nvPr/>
+        </p:nvSpPr>
+        <p:spPr>
+          <a:xfrm>
+            <a:off x="4612538" y="5166360"/>
+            <a:ext cx="2966618" cy="731520"/>
+          </a:xfrm>
+          <a:prstGeom prst="rect">
+            <a:avLst/>
+          </a:prstGeom>
+          <a:noFill/>
+          <a:ln/>
+        </p:spPr>
+        <p:txBody>
+          <a:bodyPr wrap="square" lIns="0" tIns="0" rIns="0" bIns="0" rtlCol="0" anchor="b"/>
+          <a:lstStyle/>
+          <a:p>
+            <a:pPr indent="0" marL="0">
+              <a:buNone/>
+            </a:pPr>
+            <a:r>
+              <a:rPr lang="en-US" sz="1400" b="1" dirty="0">
+                <a:solidFill>
+                  <a:schemeClr val="tx1"/>
+                </a:solidFill>
+              </a:rPr>
+              <a:t>ERM Stakeholder</a:t>
+            </a:r>
+            <a:endParaRPr lang="en-US" sz="1400" dirty="0"/>
+          </a:p>
+          <a:p>
+            <a:pPr indent="0" marL="0">
+              <a:buNone/>
+            </a:pPr>
+            <a:r>
+              <a:rPr lang="en-US" sz="1200" dirty="0">
+                <a:solidFill>
+                  <a:schemeClr val="tx2"/>
+                </a:solidFill>
+              </a:rPr>
+              <a:t>[Name]</a:t>
+            </a:r>
+            <a:endParaRPr lang="en-US" sz="1400" dirty="0"/>
+          </a:p>
+        </p:txBody>
+      </p:sp>
+      <p:sp>
+        <p:nvSpPr>
+          <p:cNvPr id="13" name="quote-2-card"/>
+          <p:cNvSpPr/>
+          <p:nvPr/>
+        </p:nvSpPr>
+        <p:spPr>
+          <a:xfrm>
+            <a:off x="8127797" y="1645920"/>
+            <a:ext cx="3515258" cy="4480560"/>
+          </a:xfrm>
+          <a:prstGeom prst="roundRect">
+            <a:avLst>
+              <a:gd name="adj" fmla="val 3121"/>
+            </a:avLst>
+          </a:prstGeom>
+          <a:solidFill>
+            <a:schemeClr val="bg1"/>
+          </a:solidFill>
+          <a:ln/>
+        </p:spPr>
+      </p:sp>
+      <p:sp>
+        <p:nvSpPr>
+          <p:cNvPr id="14" name="quote-2-mark"/>
+          <p:cNvSpPr txBox="1"/>
+          <p:nvPr/>
+        </p:nvSpPr>
+        <p:spPr>
+          <a:xfrm>
+            <a:off x="8402117" y="1783080"/>
+            <a:ext cx="914400" cy="731520"/>
+          </a:xfrm>
+          <a:prstGeom prst="rect">
+            <a:avLst/>
+          </a:prstGeom>
+          <a:noFill/>
+          <a:ln/>
+        </p:spPr>
+        <p:txBody>
+          <a:bodyPr wrap="square" lIns="0" tIns="0" rIns="0" bIns="0" rtlCol="0" anchor="t"/>
+          <a:lstStyle/>
+          <a:p>
+            <a:pPr indent="0" marL="0">
+              <a:buNone/>
+            </a:pPr>
+            <a:r>
+              <a:rPr lang="en-US" sz="6000" b="1" dirty="0">
+                <a:solidFill>
+                  <a:schemeClr val="accent3"/>
+                </a:solidFill>
+              </a:rPr>
+              <a:t>“</a:t>
+            </a:r>
+            <a:endParaRPr lang="en-US" sz="6000" dirty="0"/>
+          </a:p>
+        </p:txBody>
+      </p:sp>
+      <p:sp>
+        <p:nvSpPr>
+          <p:cNvPr id="15" name="quote-2-text"/>
+          <p:cNvSpPr txBox="1"/>
+          <p:nvPr/>
+        </p:nvSpPr>
+        <p:spPr>
+          <a:xfrm>
+            <a:off x="8402117" y="2514600"/>
+            <a:ext cx="2966618" cy="2606040"/>
+          </a:xfrm>
+          <a:prstGeom prst="rect">
+            <a:avLst/>
+          </a:prstGeom>
+          <a:noFill/>
+          <a:ln/>
+        </p:spPr>
+        <p:txBody>
+          <a:bodyPr wrap="square" lIns="0" tIns="0" rIns="0" bIns="0" rtlCol="0" anchor="t"/>
+          <a:lstStyle/>
+          <a:p>
+            <a:pPr indent="0" marL="0">
+              <a:buNone/>
+            </a:pPr>
+            <a:r>
+              <a:rPr lang="en-US" sz="1800" i="1" dirty="0">
+                <a:solidFill>
+                  <a:schemeClr val="tx1"/>
+                </a:solidFill>
+              </a:rPr>
+              <a:t>They built great new features that make navigation easier and give us a much clearer view of our R&amp;O data. Whenever bugs or issues came up, they fixed them quickly and efficiently.</a:t>
+            </a:r>
+            <a:endParaRPr lang="en-US" sz="1800" dirty="0"/>
+          </a:p>
+        </p:txBody>
+      </p:sp>
+      <p:sp>
+        <p:nvSpPr>
+          <p:cNvPr id="16" name="quote-2-who"/>
+          <p:cNvSpPr txBox="1"/>
+          <p:nvPr/>
+        </p:nvSpPr>
+        <p:spPr>
+          <a:xfrm>
+            <a:off x="8402117" y="5166360"/>
+            <a:ext cx="2966618" cy="731520"/>
+          </a:xfrm>
+          <a:prstGeom prst="rect">
+            <a:avLst/>
+          </a:prstGeom>
+          <a:noFill/>
+          <a:ln/>
+        </p:spPr>
+        <p:txBody>
+          <a:bodyPr wrap="square" lIns="0" tIns="0" rIns="0" bIns="0" rtlCol="0" anchor="b"/>
+          <a:lstStyle/>
+          <a:p>
+            <a:pPr indent="0" marL="0">
+              <a:buNone/>
+            </a:pPr>
+            <a:r>
+              <a:rPr lang="en-US" sz="1400" b="1" dirty="0">
+                <a:solidFill>
+                  <a:schemeClr val="tx1"/>
+                </a:solidFill>
+              </a:rPr>
+              <a:t>Risk and Opportunity Manager</a:t>
+            </a:r>
+            <a:endParaRPr lang="en-US" sz="1400" dirty="0"/>
+          </a:p>
+          <a:p>
+            <a:pPr indent="0" marL="0">
+              <a:buNone/>
+            </a:pPr>
+            <a:r>
+              <a:rPr lang="en-US" sz="1200" dirty="0">
+                <a:solidFill>
+                  <a:schemeClr val="tx2"/>
+                </a:solidFill>
+              </a:rPr>
+              <a:t>[Name]</a:t>
+            </a:r>
+            <a:endParaRPr lang="en-US" sz="1400" dirty="0"/>
+          </a:p>
+        </p:txBody>
+      </p:sp>
+    </p:spTree>
+  </p:cSld>
+  <p:clrMapOvr>
+    <a:masterClrMapping/>
+  </p:clrMapOvr>
+  <p:transition spd="med">
+    <p:fade/>
+  </p:transition>
+  <p:timing>
+    <p:tnLst>
+      <p:par>
+        <p:cTn id="1" dur="indefinite" restart="never" nodeType="tmRoot">
+          <p:childTnLst>
+            <p:seq concurrent="1" nextAc="seek">
+              <p:cTn id="2" dur="indefinite" nodeType="mainSeq">
+                <p:childTnLst>
+                  <p:par>
+                    <p:cTn id="46" fill="hold">
+                      <p:stCondLst>
+                        <p:cond delay="indefinite"/>
+                        <p:cond evt="onBegin" delay="0">
+                          <p:tn val="2"/>
+                        </p:cond>
+                      </p:stCondLst>
+                      <p:childTnLst>
+                        <p:par>
+                          <p:cTn id="6" fill="hold">
+                            <p:stCondLst>
+                              <p:cond delay="0"/>
+                            </p:stCondLst>
+                            <p:childTnLst>
+                              <p:par>
+                                <p:cTn id="3" presetID="10" presetClass="entr" presetSubtype="0" fill="hold" grpId="0" nodeType="afterEffect">
+                                  <p:stCondLst>
+                                    <p:cond delay="0"/>
+                                  </p:stCondLst>
+                                  <p:childTnLst>
+                                    <p:set>
+                                      <p:cBhvr>
+                                        <p:cTn id="4" dur="1" fill="hold">
+                                          <p:stCondLst>
+                                            <p:cond delay="0"/>
+                                          </p:stCondLst>
+                                        </p:cTn>
+                                        <p:tgtEl>
+                                          <p:spTgt spid="4"/>
+                                        </p:tgtEl>
+                                        <p:attrNameLst>
+                                          <p:attrName>style.visibility</p:attrName>
+                                        </p:attrNameLst>
+                                      </p:cBhvr>
+                                      <p:to>
+                                        <p:strVal val="visible"/>
+                                      </p:to>
+                                    </p:set>
+                                    <p:animEffect transition="in" filter="fade">
+                                      <p:cBhvr>
+                                        <p:cTn id="5" dur="450"/>
+                                        <p:tgtEl>
+                                          <p:spTgt spid="4"/>
+                                        </p:tgtEl>
+                                      </p:cBhvr>
+                                    </p:animEffect>
+                                  </p:childTnLst>
+                                </p:cTn>
+                              </p:par>
+                            </p:childTnLst>
+                          </p:cTn>
+                        </p:par>
+                        <p:par>
+                          <p:cTn id="19" fill="hold">
+                            <p:stCondLst>
+                              <p:cond delay="600"/>
+                            </p:stCondLst>
+                            <p:childTnLst>
+                              <p:par>
+                                <p:cTn id="7" presetID="10" presetClass="entr" presetSubtype="0" fill="hold" grpId="0" nodeType="afterEffect">
+                                  <p:stCondLst>
+                                    <p:cond delay="0"/>
+                                  </p:stCondLst>
+                                  <p:childTnLst>
+                                    <p:set>
+                                      <p:cBhvr>
+                                        <p:cTn id="8" dur="1" fill="hold">
+                                          <p:stCondLst>
+                                            <p:cond delay="0"/>
+                                          </p:stCondLst>
+                                        </p:cTn>
+                                        <p:tgtEl>
+                                          <p:spTgt spid="5"/>
+                                        </p:tgtEl>
+                                        <p:attrNameLst>
+                                          <p:attrName>style.visibility</p:attrName>
+                                        </p:attrNameLst>
+                                      </p:cBhvr>
+                                      <p:to>
+                                        <p:strVal val="visible"/>
+                                      </p:to>
+                                    </p:set>
+                                    <p:animEffect transition="in" filter="fade">
+                                      <p:cBhvr>
+                                        <p:cTn id="9" dur="450"/>
+                                        <p:tgtEl>
+                                          <p:spTgt spid="5"/>
+                                        </p:tgtEl>
+                                      </p:cBhvr>
+                                    </p:animEffect>
+                                  </p:childTnLst>
+                                </p:cTn>
+                              </p:par>
+                              <p:par>
+                                <p:cTn id="10" presetID="10" presetClass="entr" presetSubtype="0" fill="hold" grpId="0" nodeType="withEffect">
+                                  <p:stCondLst>
+                                    <p:cond delay="0"/>
+                                  </p:stCondLst>
+                                  <p:childTnLst>
+                                    <p:set>
+                                      <p:cBhvr>
+                                        <p:cTn id="11" dur="1" fill="hold">
+                                          <p:stCondLst>
+                                            <p:cond delay="0"/>
+                                          </p:stCondLst>
+                                        </p:cTn>
+                                        <p:tgtEl>
+                                          <p:spTgt spid="6"/>
+                                        </p:tgtEl>
+                                        <p:attrNameLst>
+                                          <p:attrName>style.visibility</p:attrName>
+                                        </p:attrNameLst>
+                                      </p:cBhvr>
+                                      <p:to>
+                                        <p:strVal val="visible"/>
+                                      </p:to>
+                                    </p:set>
+                                    <p:animEffect transition="in" filter="fade">
+                                      <p:cBhvr>
+                                        <p:cTn id="12" dur="450"/>
+                                        <p:tgtEl>
+                                          <p:spTgt spid="6"/>
+                                        </p:tgtEl>
+                                      </p:cBhvr>
+                                    </p:animEffect>
+                                  </p:childTnLst>
+                                </p:cTn>
+                              </p:par>
+                              <p:par>
+                                <p:cTn id="13" presetID="10" presetClass="entr" presetSubtype="0" fill="hold" grpId="0" nodeType="withEffect">
+                                  <p:stCondLst>
+                                    <p:cond delay="0"/>
+                                  </p:stCondLst>
+                                  <p:childTnLst>
+                                    <p:set>
+                                      <p:cBhvr>
+                                        <p:cTn id="14" dur="1" fill="hold">
+                                          <p:stCondLst>
+                                            <p:cond delay="0"/>
+                                          </p:stCondLst>
+                                        </p:cTn>
+                                        <p:tgtEl>
+                                          <p:spTgt spid="7"/>
+                                        </p:tgtEl>
+                                        <p:attrNameLst>
+                                          <p:attrName>style.visibility</p:attrName>
+                                        </p:attrNameLst>
+                                      </p:cBhvr>
+                                      <p:to>
+                                        <p:strVal val="visible"/>
+                                      </p:to>
+                                    </p:set>
+                                    <p:animEffect transition="in" filter="fade">
+                                      <p:cBhvr>
+                                        <p:cTn id="15" dur="450"/>
+                                        <p:tgtEl>
+                                          <p:spTgt spid="7"/>
+                                        </p:tgtEl>
+                                      </p:cBhvr>
+                                    </p:animEffect>
+                                  </p:childTnLst>
+                                </p:cTn>
+                              </p:par>
+                              <p:par>
+                                <p:cTn id="16" presetID="10" presetClass="entr" presetSubtype="0" fill="hold" grpId="0" nodeType="withEffect">
+                                  <p:stCondLst>
+                                    <p:cond delay="0"/>
+                                  </p:stCondLst>
+                                  <p:childTnLst>
+                                    <p:set>
+                                      <p:cBhvr>
+                                        <p:cTn id="17" dur="1" fill="hold">
+                                          <p:stCondLst>
+                                            <p:cond delay="0"/>
+                                          </p:stCondLst>
+                                        </p:cTn>
+                                        <p:tgtEl>
+                                          <p:spTgt spid="8"/>
+                                        </p:tgtEl>
+                                        <p:attrNameLst>
+                                          <p:attrName>style.visibility</p:attrName>
+                                        </p:attrNameLst>
+                                      </p:cBhvr>
+                                      <p:to>
+                                        <p:strVal val="visible"/>
+                                      </p:to>
+                                    </p:set>
+                                    <p:animEffect transition="in" filter="fade">
+                                      <p:cBhvr>
+                                        <p:cTn id="18" dur="450"/>
+                                        <p:tgtEl>
+                                          <p:spTgt spid="8"/>
+                                        </p:tgtEl>
+                                      </p:cBhvr>
+                                    </p:animEffect>
+                                  </p:childTnLst>
+                                </p:cTn>
+                              </p:par>
+                            </p:childTnLst>
+                          </p:cTn>
+                        </p:par>
+                        <p:par>
+                          <p:cTn id="32" fill="hold">
+                            <p:stCondLst>
+                              <p:cond delay="1200"/>
+                            </p:stCondLst>
+                            <p:childTnLst>
+                              <p:par>
+                                <p:cTn id="20" presetID="10" presetClass="entr" presetSubtype="0" fill="hold" grpId="0" nodeType="afterEffect">
+                                  <p:stCondLst>
+                                    <p:cond delay="0"/>
+                                  </p:stCondLst>
+                                  <p:childTnLst>
+                                    <p:set>
+                                      <p:cBhvr>
+                                        <p:cTn id="21" dur="1" fill="hold">
+                                          <p:stCondLst>
+                                            <p:cond delay="0"/>
+                                          </p:stCondLst>
+                                        </p:cTn>
+                                        <p:tgtEl>
+                                          <p:spTgt spid="9"/>
+                                        </p:tgtEl>
+                                        <p:attrNameLst>
+                                          <p:attrName>style.visibility</p:attrName>
+                                        </p:attrNameLst>
+                                      </p:cBhvr>
+                                      <p:to>
+                                        <p:strVal val="visible"/>
+                                      </p:to>
+                                    </p:set>
+                                    <p:animEffect transition="in" filter="fade">
+                                      <p:cBhvr>
+                                        <p:cTn id="22" dur="450"/>
+                                        <p:tgtEl>
+                                          <p:spTgt spid="9"/>
+                                        </p:tgtEl>
+                                      </p:cBhvr>
+                                    </p:animEffect>
+                                  </p:childTnLst>
+                                </p:cTn>
+                              </p:par>
+                              <p:par>
+                                <p:cTn id="23" presetID="10" presetClass="entr" presetSubtype="0" fill="hold" grpId="0" nodeType="withEffect">
+                                  <p:stCondLst>
+                                    <p:cond delay="0"/>
+                                  </p:stCondLst>
+                                  <p:childTnLst>
+                                    <p:set>
+                                      <p:cBhvr>
+                                        <p:cTn id="24" dur="1" fill="hold">
+                                          <p:stCondLst>
+                                            <p:cond delay="0"/>
+                                          </p:stCondLst>
+                                        </p:cTn>
+                                        <p:tgtEl>
+                                          <p:spTgt spid="10"/>
+                                        </p:tgtEl>
+                                        <p:attrNameLst>
+                                          <p:attrName>style.visibility</p:attrName>
+                                        </p:attrNameLst>
+                                      </p:cBhvr>
+                                      <p:to>
+                                        <p:strVal val="visible"/>
+                                      </p:to>
+                                    </p:set>
+                                    <p:animEffect transition="in" filter="fade">
+                                      <p:cBhvr>
+                                        <p:cTn id="25" dur="450"/>
+                                        <p:tgtEl>
+                                          <p:spTgt spid="10"/>
+                                        </p:tgtEl>
+                                      </p:cBhvr>
+                                    </p:animEffect>
+                                  </p:childTnLst>
+                                </p:cTn>
+                              </p:par>
+                              <p:par>
+                                <p:cTn id="26" presetID="10" presetClass="entr" presetSubtype="0" fill="hold" grpId="0" nodeType="withEffect">
+                                  <p:stCondLst>
+                                    <p:cond delay="0"/>
+                                  </p:stCondLst>
+                                  <p:childTnLst>
+                                    <p:set>
+                                      <p:cBhvr>
+                                        <p:cTn id="27" dur="1" fill="hold">
+                                          <p:stCondLst>
+                                            <p:cond delay="0"/>
+                                          </p:stCondLst>
+                                        </p:cTn>
+                                        <p:tgtEl>
+                                          <p:spTgt spid="11"/>
+                                        </p:tgtEl>
+                                        <p:attrNameLst>
+                                          <p:attrName>style.visibility</p:attrName>
+                                        </p:attrNameLst>
+                                      </p:cBhvr>
+                                      <p:to>
+                                        <p:strVal val="visible"/>
+                                      </p:to>
+                                    </p:set>
+                                    <p:animEffect transition="in" filter="fade">
+                                      <p:cBhvr>
+                                        <p:cTn id="28" dur="450"/>
+                                        <p:tgtEl>
+                                          <p:spTgt spid="11"/>
+                                        </p:tgtEl>
+                                      </p:cBhvr>
+                                    </p:animEffect>
+                                  </p:childTnLst>
+                                </p:cTn>
+                              </p:par>
+                              <p:par>
+                                <p:cTn id="29" presetID="10" presetClass="entr" presetSubtype="0" fill="hold" grpId="0" nodeType="withEffect">
+                                  <p:stCondLst>
+                                    <p:cond delay="0"/>
+                                  </p:stCondLst>
+                                  <p:childTnLst>
+                                    <p:set>
+                                      <p:cBhvr>
+                                        <p:cTn id="30" dur="1" fill="hold">
+                                          <p:stCondLst>
+                                            <p:cond delay="0"/>
+                                          </p:stCondLst>
+                                        </p:cTn>
+                                        <p:tgtEl>
+                                          <p:spTgt spid="12"/>
+                                        </p:tgtEl>
+                                        <p:attrNameLst>
+                                          <p:attrName>style.visibility</p:attrName>
+                                        </p:attrNameLst>
+                                      </p:cBhvr>
+                                      <p:to>
+                                        <p:strVal val="visible"/>
+                                      </p:to>
+                                    </p:set>
+                                    <p:animEffect transition="in" filter="fade">
+                                      <p:cBhvr>
+                                        <p:cTn id="31" dur="450"/>
+                                        <p:tgtEl>
+                                          <p:spTgt spid="12"/>
+                                        </p:tgtEl>
+                                      </p:cBhvr>
+                                    </p:animEffect>
+                                  </p:childTnLst>
+                                </p:cTn>
+                              </p:par>
+                            </p:childTnLst>
+                          </p:cTn>
+                        </p:par>
+                        <p:par>
+                          <p:cTn id="45" fill="hold">
+                            <p:stCondLst>
+                              <p:cond delay="1800"/>
+                            </p:stCondLst>
+                            <p:childTnLst>
+                              <p:par>
+                                <p:cTn id="33" presetID="10" presetClass="entr" presetSubtype="0" fill="hold" grpId="0" nodeType="afterEffect">
+                                  <p:stCondLst>
+                                    <p:cond delay="0"/>
+                                  </p:stCondLst>
+                                  <p:childTnLst>
+                                    <p:set>
+                                      <p:cBhvr>
+                                        <p:cTn id="34" dur="1" fill="hold">
+                                          <p:stCondLst>
+                                            <p:cond delay="0"/>
+                                          </p:stCondLst>
+                                        </p:cTn>
+                                        <p:tgtEl>
+                                          <p:spTgt spid="13"/>
+                                        </p:tgtEl>
+                                        <p:attrNameLst>
+                                          <p:attrName>style.visibility</p:attrName>
+                                        </p:attrNameLst>
+                                      </p:cBhvr>
+                                      <p:to>
+                                        <p:strVal val="visible"/>
+                                      </p:to>
+                                    </p:set>
+                                    <p:animEffect transition="in" filter="fade">
+                                      <p:cBhvr>
+                                        <p:cTn id="35" dur="450"/>
+                                        <p:tgtEl>
+                                          <p:spTgt spid="13"/>
+                                        </p:tgtEl>
+                                      </p:cBhvr>
+                                    </p:animEffect>
+                                  </p:childTnLst>
+                                </p:cTn>
+                              </p:par>
+                              <p:par>
+                                <p:cTn id="36" presetID="10" presetClass="entr" presetSubtype="0" fill="hold" grpId="0" nodeType="withEffect">
+                                  <p:stCondLst>
+                                    <p:cond delay="0"/>
+                                  </p:stCondLst>
+                                  <p:childTnLst>
+                                    <p:set>
+                                      <p:cBhvr>
+                                        <p:cTn id="37" dur="1" fill="hold">
+                                          <p:stCondLst>
+                                            <p:cond delay="0"/>
+                                          </p:stCondLst>
+                                        </p:cTn>
+                                        <p:tgtEl>
+                                          <p:spTgt spid="14"/>
+                                        </p:tgtEl>
+                                        <p:attrNameLst>
+                                          <p:attrName>style.visibility</p:attrName>
+                                        </p:attrNameLst>
+                                      </p:cBhvr>
+                                      <p:to>
+                                        <p:strVal val="visible"/>
+                                      </p:to>
+                                    </p:set>
+                                    <p:animEffect transition="in" filter="fade">
+                                      <p:cBhvr>
+                                        <p:cTn id="38" dur="450"/>
+                                        <p:tgtEl>
+                                          <p:spTgt spid="14"/>
+                                        </p:tgtEl>
+                                      </p:cBhvr>
+                                    </p:animEffect>
+                                  </p:childTnLst>
+                                </p:cTn>
+                              </p:par>
+                              <p:par>
+                                <p:cTn id="39" presetID="10" presetClass="entr" presetSubtype="0" fill="hold" grpId="0" nodeType="withEffect">
+                                  <p:stCondLst>
+                                    <p:cond delay="0"/>
+                                  </p:stCondLst>
+                                  <p:childTnLst>
+                                    <p:set>
+                                      <p:cBhvr>
+                                        <p:cTn id="40" dur="1" fill="hold">
+                                          <p:stCondLst>
+                                            <p:cond delay="0"/>
+                                          </p:stCondLst>
+                                        </p:cTn>
+                                        <p:tgtEl>
+                                          <p:spTgt spid="15"/>
+                                        </p:tgtEl>
+                                        <p:attrNameLst>
+                                          <p:attrName>style.visibility</p:attrName>
+                                        </p:attrNameLst>
+                                      </p:cBhvr>
+                                      <p:to>
+                                        <p:strVal val="visible"/>
+                                      </p:to>
+                                    </p:set>
+                                    <p:animEffect transition="in" filter="fade">
+                                      <p:cBhvr>
+                                        <p:cTn id="41" dur="450"/>
+                                        <p:tgtEl>
+                                          <p:spTgt spid="15"/>
+                                        </p:tgtEl>
+                                      </p:cBhvr>
+                                    </p:animEffect>
+                                  </p:childTnLst>
+                                </p:cTn>
+                              </p:par>
+                              <p:par>
+                                <p:cTn id="42" presetID="10" presetClass="entr" presetSubtype="0" fill="hold" grpId="0" nodeType="withEffect">
+                                  <p:stCondLst>
+                                    <p:cond delay="0"/>
+                                  </p:stCondLst>
+                                  <p:childTnLst>
+                                    <p:set>
+                                      <p:cBhvr>
+                                        <p:cTn id="43" dur="1" fill="hold">
+                                          <p:stCondLst>
+                                            <p:cond delay="0"/>
+                                          </p:stCondLst>
+                                        </p:cTn>
+                                        <p:tgtEl>
+                                          <p:spTgt spid="16"/>
+                                        </p:tgtEl>
+                                        <p:attrNameLst>
+                                          <p:attrName>style.visibility</p:attrName>
+                                        </p:attrNameLst>
+                                      </p:cBhvr>
+                                      <p:to>
+                                        <p:strVal val="visible"/>
+                                      </p:to>
+                                    </p:set>
+                                    <p:animEffect transition="in" filter="fade">
+                                      <p:cBhvr>
+                                        <p:cTn id="44" dur="450"/>
+                                        <p:tgtEl>
+                                          <p:spTgt spid="16"/>
+                                        </p:tgtEl>
+                                      </p:cBhvr>
+                                    </p:animEffect>
+                                  </p:childTnLst>
+                                </p:cTn>
+                              </p:par>
+                            </p:childTnLst>
+                          </p:cTn>
+                        </p:par>
+                      </p:childTnLst>
+                    </p:cTn>
+                  </p:par>
+                </p:childTnLst>
+              </p:cTn>
+              <p:prevCondLst>
+                <p:cond evt="onPrev" delay="0">
+                  <p:tgtEl>
+                    <p:sldTgt/>
+                  </p:tgtEl>
+                </p:cond>
+              </p:prevCondLst>
+              <p:nextCondLst>
+                <p:cond evt="onNext" delay="0">
+                  <p:tgtEl>
+                    <p:sldTgt/>
+                  </p:tgtEl>
+                </p:cond>
+              </p:nextCondLst>
+            </p:seq>
+          </p:childTnLst>
+        </p:cTn>
+      </p:par>
+    </p:tnLst>
+    <p:bldLst>
+      <p:bldP spid="4" grpId="0" animBg="1"/>
+      <p:bldP spid="5" grpId="0" animBg="1"/>
+      <p:bldP spid="6" grpId="0" animBg="1"/>
+      <p:bldP spid="7" grpId="0" animBg="1"/>
+      <p:bldP spid="8" grpId="0" animBg="1"/>
+      <p:bldP spid="9" grpId="0" animBg="1"/>
+      <p:bldP spid="10" grpId="0" animBg="1"/>
+      <p:bldP spid="11" grpId="0" animBg="1"/>
+      <p:bldP spid="12" grpId="0" animBg="1"/>
+      <p:bldP spid="13" grpId="0" animBg="1"/>
+      <p:bldP spid="14" grpId="0" animBg="1"/>
+      <p:bldP spid="15" grpId="0" animBg="1"/>
+      <p:bldP spid="16" grpId="0" animBg="1"/>
     </p:bldLst>
   </p:timing>
 </p:sld>

--- a/erm-migration/docs/ERM-Migration-Pitch-v3.pptx
+++ b/erm-migration/docs/ERM-Migration-Pitch-v3.pptx
@@ -16,9 +16,10 @@
     <p:sldId id="264" r:id="rId10"/>
     <p:sldId id="265" r:id="rId11"/>
     <p:sldId id="266" r:id="rId12"/>
+    <p:sldId id="267" r:id="rId13"/>
   </p:sldIdLst>
   <p:notesMasterIdLst>
-    <p:notesMasterId r:id="rId13"/>
+    <p:notesMasterId r:id="rId14"/>
   </p:notesMasterIdLst>
   <p:sldSz cx="12192000" cy="6858000"/>
   <p:notesSz cx="6858000" cy="12192000"/>
@@ -117,7 +118,7 @@
   <p:extLst>
     <p:ext uri="{521415D9-36F7-43E2-AB2F-B90AF26B5E84}">
       <p14:sectionLst xmlns:p14="http://schemas.microsoft.com/office/powerpoint/2010/main">
-        <p14:section name="Context" id="{74acef77-42fe-5d1d-5426-c8099ced7e3d}">
+        <p14:section name="Context" id="{83b98163-8de8-7538-4933-e60bb01742b6}">
           <p14:sldIdLst>
             <p14:sldId id="256"/>
             <p14:sldId id="257"/>
@@ -126,22 +127,23 @@
             <p14:sldId id="260"/>
           </p14:sldIdLst>
         </p14:section>
-        <p14:section name="Stakes" id="{5339293c-92ff-7bbd-baec-998a96db5c81}">
+        <p14:section name="Stakes" id="{2885cb0c-3426-ed8b-be78-117e48e7f1b5}">
           <p14:sldIdLst>
             <p14:sldId id="261"/>
           </p14:sldIdLst>
         </p14:section>
-        <p14:section name="Transformation" id="{9c753879-8158-37f2-e115-7edee465dcf6}">
+        <p14:section name="Transformation" id="{430e8b60-58c9-bb00-6768-38da733dde31}">
           <p14:sldIdLst>
             <p14:sldId id="262"/>
             <p14:sldId id="263"/>
             <p14:sldId id="264"/>
           </p14:sldIdLst>
         </p14:section>
-        <p14:section name="Fit and next" id="{2635bc02-4200-3942-3a39-37dc309f44a5}">
+        <p14:section name="Fit and next" id="{b790d8d2-6745-f5f4-b944-6e497fedb133}">
           <p14:sldIdLst>
             <p14:sldId id="265"/>
             <p14:sldId id="266"/>
+            <p14:sldId id="267"/>
           </p14:sldIdLst>
         </p14:section>
       </p14:sectionLst>
@@ -151,643 +153,6 @@
     </p:ext>
   </p:extLst>
 </p:presentation>
-</file>
-
-<file path=ppt/charts/chart1.xml><?xml version="1.0" encoding="utf-8"?>
-<c:chartSpace xmlns:c="http://schemas.openxmlformats.org/drawingml/2006/chart" xmlns:a="http://schemas.openxmlformats.org/drawingml/2006/main" xmlns:r="http://schemas.openxmlformats.org/officeDocument/2006/relationships">
-  <c:date1904 val="0"/>
-  <c:roundedCorners val="1"/>
-  <c:chart>
-    <c:autoTitleDeleted val="1"/>
-    <c:plotArea>
-      <c:layout/>
-      <c:lineChart>
-        <c:varyColors val="0"/>
-        <c:ser>
-          <c:idx val="0"/>
-          <c:order val="0"/>
-          <c:tx>
-            <c:strRef>
-              <c:f>Sheet1!$B$1</c:f>
-              <c:strCache>
-                <c:ptCount val="1"/>
-                <c:pt idx="0">
-                  <c:v>Unique users</c:v>
-                </c:pt>
-              </c:strCache>
-            </c:strRef>
-          </c:tx>
-          <c:spPr>
-            <a:solidFill>
-              <a:srgbClr val="0085CA"/>
-            </a:solidFill>
-            <a:ln w="25400" cap="flat">
-              <a:solidFill>
-                <a:srgbClr val="0085CA"/>
-              </a:solidFill>
-              <a:prstDash val="solid"/>
-              <a:round/>
-            </a:ln>
-            <a:effectLst/>
-          </c:spPr>
-          <c:invertIfNegative val="0"/>
-          <c:dLbls>
-            <c:numFmt formatCode="#,##0" sourceLinked="0"/>
-            <c:txPr>
-              <a:bodyPr/>
-              <a:lstStyle/>
-              <a:p>
-                <a:pPr>
-                  <a:defRPr b="0" i="0" strike="noStrike" sz="1200" u="none">
-                    <a:solidFill>
-                      <a:srgbClr val="000000"/>
-                    </a:solidFill>
-                    <a:latin typeface="Arial"/>
-                  </a:defRPr>
-                </a:pPr>
-              </a:p>
-            </c:txPr>
-            <c:showLegendKey val="0"/>
-            <c:showVal val="0"/>
-            <c:showCatName val="0"/>
-            <c:showSerName val="0"/>
-            <c:showPercent val="0"/>
-            <c:showBubbleSize val="0"/>
-            <c:showLeaderLines val="0"/>
-          </c:dLbls>
-          <c:marker>
-            <c:symbol val="circle"/>
-            <c:size val="4"/>
-            <c:spPr>
-              <a:solidFill>
-                <a:srgbClr val="0085CA"/>
-              </a:solidFill>
-              <a:ln w="9525" cap="flat">
-                <a:solidFill>
-                  <a:srgbClr val="0085CA"/>
-                </a:solidFill>
-                <a:prstDash val="solid"/>
-                <a:round/>
-              </a:ln>
-              <a:effectLst/>
-            </c:spPr>
-          </c:marker>
-          <c:cat>
-            <c:strRef>
-              <c:f>Sheet1!$A$2:$A$24</c:f>
-              <c:strCache>
-                <c:ptCount val="23"/>
-                <c:pt idx="0">
-                  <c:v>Aug 2024</c:v>
-                </c:pt>
-                <c:pt idx="1">
-                  <c:v>Sep 2024</c:v>
-                </c:pt>
-                <c:pt idx="2">
-                  <c:v>Oct 2024</c:v>
-                </c:pt>
-                <c:pt idx="3">
-                  <c:v>Nov 2024</c:v>
-                </c:pt>
-                <c:pt idx="4">
-                  <c:v>Dec 2024</c:v>
-                </c:pt>
-                <c:pt idx="5">
-                  <c:v>Jan 2025</c:v>
-                </c:pt>
-                <c:pt idx="6">
-                  <c:v>Feb 2025</c:v>
-                </c:pt>
-                <c:pt idx="7">
-                  <c:v>Mar 2025</c:v>
-                </c:pt>
-                <c:pt idx="8">
-                  <c:v>Apr 2025</c:v>
-                </c:pt>
-                <c:pt idx="9">
-                  <c:v>May 2025</c:v>
-                </c:pt>
-                <c:pt idx="10">
-                  <c:v>Jun 2025</c:v>
-                </c:pt>
-                <c:pt idx="11">
-                  <c:v>Jul 2025</c:v>
-                </c:pt>
-                <c:pt idx="12">
-                  <c:v>Aug 2025</c:v>
-                </c:pt>
-                <c:pt idx="13">
-                  <c:v>Sep 2025</c:v>
-                </c:pt>
-                <c:pt idx="14">
-                  <c:v>Oct 2025</c:v>
-                </c:pt>
-                <c:pt idx="15">
-                  <c:v>Nov 2025</c:v>
-                </c:pt>
-                <c:pt idx="16">
-                  <c:v>Dec 2025</c:v>
-                </c:pt>
-                <c:pt idx="17">
-                  <c:v>Jan 2026</c:v>
-                </c:pt>
-                <c:pt idx="18">
-                  <c:v>Feb 2026</c:v>
-                </c:pt>
-                <c:pt idx="19">
-                  <c:v>Mar 2026</c:v>
-                </c:pt>
-                <c:pt idx="20">
-                  <c:v>Apr 2026</c:v>
-                </c:pt>
-                <c:pt idx="21">
-                  <c:v>May 2026</c:v>
-                </c:pt>
-                <c:pt idx="22">
-                  <c:v>Jun 2026</c:v>
-                </c:pt>
-              </c:strCache>
-            </c:strRef>
-          </c:cat>
-          <c:val>
-            <c:numRef>
-              <c:f>Sheet1!$B$2:$B$24</c:f>
-              <c:numCache>
-                <c:formatCode>General</c:formatCode>
-                <c:ptCount val="23"/>
-                <c:pt idx="0">
-                  <c:v>0</c:v>
-                </c:pt>
-                <c:pt idx="1">
-                  <c:v>50</c:v>
-                </c:pt>
-                <c:pt idx="2">
-                  <c:v>95</c:v>
-                </c:pt>
-                <c:pt idx="3">
-                  <c:v>105</c:v>
-                </c:pt>
-                <c:pt idx="4">
-                  <c:v>65</c:v>
-                </c:pt>
-                <c:pt idx="5">
-                  <c:v>110</c:v>
-                </c:pt>
-                <c:pt idx="6">
-                  <c:v>135</c:v>
-                </c:pt>
-                <c:pt idx="7">
-                  <c:v>125</c:v>
-                </c:pt>
-                <c:pt idx="8">
-                  <c:v>150</c:v>
-                </c:pt>
-                <c:pt idx="9">
-                  <c:v>245</c:v>
-                </c:pt>
-                <c:pt idx="10">
-                  <c:v>220</c:v>
-                </c:pt>
-                <c:pt idx="11">
-                  <c:v>230</c:v>
-                </c:pt>
-                <c:pt idx="12">
-                  <c:v>240</c:v>
-                </c:pt>
-                <c:pt idx="13">
-                  <c:v>265</c:v>
-                </c:pt>
-                <c:pt idx="14">
-                  <c:v>230</c:v>
-                </c:pt>
-                <c:pt idx="15">
-                  <c:v>300</c:v>
-                </c:pt>
-                <c:pt idx="16">
-                  <c:v>190</c:v>
-                </c:pt>
-                <c:pt idx="17">
-                  <c:v>210</c:v>
-                </c:pt>
-                <c:pt idx="18">
-                  <c:v>340</c:v>
-                </c:pt>
-                <c:pt idx="19">
-                  <c:v>280</c:v>
-                </c:pt>
-                <c:pt idx="20">
-                  <c:v>220</c:v>
-                </c:pt>
-                <c:pt idx="21">
-                  <c:v>305</c:v>
-                </c:pt>
-                <c:pt idx="22">
-                  <c:v>310</c:v>
-                </c:pt>
-              </c:numCache>
-            </c:numRef>
-          </c:val>
-          <c:smooth val="0"/>
-        </c:ser>
-        <c:dLbls>
-          <c:numFmt formatCode="#,##0" sourceLinked="0"/>
-          <c:txPr>
-            <a:bodyPr/>
-            <a:lstStyle/>
-            <a:p>
-              <a:pPr>
-                <a:defRPr b="0" i="0" strike="noStrike" sz="1200" u="none">
-                  <a:solidFill>
-                    <a:srgbClr val="000000"/>
-                  </a:solidFill>
-                  <a:latin typeface="Arial"/>
-                </a:defRPr>
-              </a:pPr>
-            </a:p>
-          </c:txPr>
-          <c:showLegendKey val="0"/>
-          <c:showVal val="0"/>
-          <c:showCatName val="0"/>
-          <c:showSerName val="0"/>
-          <c:showPercent val="0"/>
-          <c:showBubbleSize val="0"/>
-          <c:showLeaderLines val="0"/>
-        </c:dLbls>
-        <c:marker val="1"/>
-        <c:axId val="2094734554"/>
-        <c:axId val="2094734552"/>
-        <c:axId val="2094734556"/>
-      </c:lineChart>
-      <c:catAx>
-        <c:axId val="2094734554"/>
-        <c:scaling>
-          <c:orientation val="minMax"/>
-        </c:scaling>
-        <c:delete val="0"/>
-        <c:axPos val="b"/>
-        <c:numFmt formatCode="General" sourceLinked="1"/>
-        <c:majorTickMark val="out"/>
-        <c:minorTickMark val="none"/>
-        <c:tickLblPos val="low"/>
-        <c:spPr>
-          <a:ln w="12700" cap="flat">
-            <a:solidFill>
-              <a:srgbClr val="888888"/>
-            </a:solidFill>
-            <a:prstDash val="solid"/>
-            <a:round/>
-          </a:ln>
-        </c:spPr>
-        <c:txPr>
-          <a:bodyPr/>
-          <a:lstStyle/>
-          <a:p>
-            <a:pPr>
-              <a:defRPr sz="1000" b="0" i="0" u="none" strike="noStrike">
-                <a:solidFill>
-                  <a:srgbClr val="4A5568"/>
-                </a:solidFill>
-                <a:latin typeface="+mn-lt"/>
-              </a:defRPr>
-            </a:pPr>
-            <a:endParaRPr lang="en-US"/>
-          </a:p>
-        </c:txPr>
-        <c:crossAx val="2094734552"/>
-        <c:crosses val="autoZero"/>
-        <c:auto val="1"/>
-        <c:lblAlgn val="ctr"/>
-        <c:noMultiLvlLbl val="0"/>
-        <c:tickLblSkip val="5"/>
-      </c:catAx>
-      <c:valAx>
-        <c:axId val="2094734552"/>
-        <c:scaling>
-          <c:orientation val="minMax"/>
-          <c:max val="350"/>
-          <c:min val="0"/>
-        </c:scaling>
-        <c:delete val="0"/>
-        <c:axPos val="l"/>
-        <c:majorGridlines>
-          <c:spPr>
-            <a:ln w="9525" cap="flat">
-              <a:solidFill>
-                <a:srgbClr val="DCE3EE"/>
-              </a:solidFill>
-              <a:prstDash val="solid"/>
-              <a:round/>
-            </a:ln>
-          </c:spPr>
-        </c:majorGridlines>
-        <c:numFmt formatCode="General" sourceLinked="0"/>
-        <c:majorTickMark val="out"/>
-        <c:minorTickMark val="none"/>
-        <c:tickLblPos val="nextTo"/>
-        <c:spPr>
-          <a:ln w="12700" cap="flat">
-            <a:solidFill>
-              <a:srgbClr val="888888"/>
-            </a:solidFill>
-            <a:prstDash val="solid"/>
-            <a:round/>
-          </a:ln>
-        </c:spPr>
-        <c:txPr>
-          <a:bodyPr/>
-          <a:lstStyle/>
-          <a:p>
-            <a:pPr>
-              <a:defRPr sz="1000" b="0" i="0" u="none" strike="noStrike">
-                <a:solidFill>
-                  <a:srgbClr val="4A5568"/>
-                </a:solidFill>
-                <a:latin typeface="+mn-lt"/>
-              </a:defRPr>
-            </a:pPr>
-            <a:endParaRPr lang="en-US"/>
-          </a:p>
-        </c:txPr>
-        <c:crossAx val="2094734554"/>
-        <c:crosses val="autoZero"/>
-        <c:crossBetween val="between"/>
-        <c:majorUnit val="100"/>
-      </c:valAx>
-      <c:spPr>
-        <a:noFill/>
-        <a:ln>
-          <a:noFill/>
-        </a:ln>
-        <a:effectLst/>
-      </c:spPr>
-    </c:plotArea>
-    <c:plotVisOnly val="1"/>
-    <c:dispBlanksAs val="span"/>
-  </c:chart>
-  <c:spPr>
-    <a:noFill/>
-    <a:ln>
-      <a:noFill/>
-    </a:ln>
-    <a:effectLst/>
-  </c:spPr>
-  <c:externalData r:id="rId1">
-    <c:autoUpdate val="0"/>
-  </c:externalData>
-</c:chartSpace>
-</file>
-
-<file path=ppt/charts/chart2.xml><?xml version="1.0" encoding="utf-8"?>
-<c:chartSpace xmlns:c="http://schemas.openxmlformats.org/drawingml/2006/chart" xmlns:a="http://schemas.openxmlformats.org/drawingml/2006/main" xmlns:r="http://schemas.openxmlformats.org/officeDocument/2006/relationships">
-  <c:date1904 val="0"/>
-  <c:roundedCorners val="1"/>
-  <c:chart>
-    <c:autoTitleDeleted val="1"/>
-    <c:plotArea>
-      <c:layout/>
-      <c:barChart>
-        <c:barDir val="col"/>
-        <c:grouping val="clustered"/>
-        <c:varyColors val="0"/>
-        <c:ser>
-          <c:idx val="0"/>
-          <c:order val="0"/>
-          <c:tx>
-            <c:strRef>
-              <c:f>Sheet1!$B$1</c:f>
-              <c:strCache>
-                <c:ptCount val="1"/>
-                <c:pt idx="0">
-                  <c:v>Unique users</c:v>
-                </c:pt>
-              </c:strCache>
-            </c:strRef>
-          </c:tx>
-          <c:spPr>
-            <a:solidFill>
-              <a:srgbClr val="0085CA"/>
-            </a:solidFill>
-            <a:effectLst/>
-          </c:spPr>
-          <c:invertIfNegative val="0"/>
-          <c:dLbls>
-            <c:numFmt formatCode="#,##0" sourceLinked="0"/>
-            <c:txPr>
-              <a:bodyPr/>
-              <a:lstStyle/>
-              <a:p>
-                <a:pPr>
-                  <a:defRPr b="0" i="0" strike="noStrike" sz="1000" u="none">
-                    <a:solidFill>
-                      <a:srgbClr val="00205B"/>
-                    </a:solidFill>
-                    <a:latin typeface="+mn-lt"/>
-                  </a:defRPr>
-                </a:pPr>
-              </a:p>
-            </c:txPr>
-            <c:showLegendKey val="0"/>
-            <c:showVal val="1"/>
-            <c:showCatName val="0"/>
-            <c:showSerName val="0"/>
-            <c:showPercent val="0"/>
-            <c:showBubbleSize val="0"/>
-            <c:showLeaderLines val="0"/>
-          </c:dLbls>
-          <c:cat>
-            <c:strRef>
-              <c:f>Sheet1!$A$2:$A$8</c:f>
-              <c:strCache>
-                <c:ptCount val="7"/>
-                <c:pt idx="0">
-                  <c:v>B</c:v>
-                </c:pt>
-                <c:pt idx="1">
-                  <c:v>O</c:v>
-                </c:pt>
-                <c:pt idx="2">
-                  <c:v>P</c:v>
-                </c:pt>
-                <c:pt idx="3">
-                  <c:v>A</c:v>
-                </c:pt>
-                <c:pt idx="4">
-                  <c:v>L</c:v>
-                </c:pt>
-                <c:pt idx="5">
-                  <c:v>S</c:v>
-                </c:pt>
-                <c:pt idx="6">
-                  <c:v>K</c:v>
-                </c:pt>
-              </c:strCache>
-            </c:strRef>
-          </c:cat>
-          <c:val>
-            <c:numRef>
-              <c:f>Sheet1!$B$2:$B$8</c:f>
-              <c:numCache>
-                <c:formatCode>General</c:formatCode>
-                <c:ptCount val="7"/>
-                <c:pt idx="0">
-                  <c:v>345</c:v>
-                </c:pt>
-                <c:pt idx="1">
-                  <c:v>120</c:v>
-                </c:pt>
-                <c:pt idx="2">
-                  <c:v>95</c:v>
-                </c:pt>
-                <c:pt idx="3">
-                  <c:v>60</c:v>
-                </c:pt>
-                <c:pt idx="4">
-                  <c:v>55</c:v>
-                </c:pt>
-                <c:pt idx="5">
-                  <c:v>55</c:v>
-                </c:pt>
-                <c:pt idx="6">
-                  <c:v>50</c:v>
-                </c:pt>
-              </c:numCache>
-            </c:numRef>
-          </c:val>
-        </c:ser>
-        <c:dLbls>
-          <c:numFmt formatCode="#,##0" sourceLinked="0"/>
-          <c:txPr>
-            <a:bodyPr/>
-            <a:lstStyle/>
-            <a:p>
-              <a:pPr>
-                <a:defRPr b="0" i="0" strike="noStrike" sz="1000" u="none">
-                  <a:solidFill>
-                    <a:srgbClr val="00205B"/>
-                  </a:solidFill>
-                  <a:latin typeface="+mn-lt"/>
-                </a:defRPr>
-              </a:pPr>
-            </a:p>
-          </c:txPr>
-          <c:showLegendKey val="0"/>
-          <c:showVal val="1"/>
-          <c:showCatName val="0"/>
-          <c:showSerName val="0"/>
-          <c:showPercent val="0"/>
-          <c:showBubbleSize val="0"/>
-          <c:showLeaderLines val="0"/>
-        </c:dLbls>
-        <c:gapWidth val="45"/>
-        <c:overlap val="0"/>
-        <c:axId val="2094734554"/>
-        <c:axId val="2094734552"/>
-        <c:axId val="2094734556"/>
-      </c:barChart>
-      <c:catAx>
-        <c:axId val="2094734554"/>
-        <c:scaling>
-          <c:orientation val="minMax"/>
-        </c:scaling>
-        <c:delete val="0"/>
-        <c:axPos val="b"/>
-        <c:numFmt formatCode="General" sourceLinked="1"/>
-        <c:majorTickMark val="out"/>
-        <c:minorTickMark val="none"/>
-        <c:tickLblPos val="low"/>
-        <c:spPr>
-          <a:ln w="12700" cap="flat">
-            <a:solidFill>
-              <a:srgbClr val="888888"/>
-            </a:solidFill>
-            <a:prstDash val="solid"/>
-            <a:round/>
-          </a:ln>
-        </c:spPr>
-        <c:txPr>
-          <a:bodyPr/>
-          <a:lstStyle/>
-          <a:p>
-            <a:pPr>
-              <a:defRPr sz="1100" b="0" i="0" u="none" strike="noStrike">
-                <a:solidFill>
-                  <a:srgbClr val="4A5568"/>
-                </a:solidFill>
-                <a:latin typeface="+mn-lt"/>
-              </a:defRPr>
-            </a:pPr>
-            <a:endParaRPr lang="en-US"/>
-          </a:p>
-        </c:txPr>
-        <c:crossAx val="2094734552"/>
-        <c:crosses val="autoZero"/>
-        <c:auto val="1"/>
-        <c:lblAlgn val="ctr"/>
-        <c:noMultiLvlLbl val="0"/>
-      </c:catAx>
-      <c:valAx>
-        <c:axId val="2094734552"/>
-        <c:scaling>
-          <c:orientation val="minMax"/>
-          <c:max val="400"/>
-          <c:min val="0"/>
-        </c:scaling>
-        <c:delete val="1"/>
-        <c:axPos val="l"/>
-        <c:numFmt formatCode="General" sourceLinked="0"/>
-        <c:majorTickMark val="out"/>
-        <c:minorTickMark val="none"/>
-        <c:tickLblPos val="nextTo"/>
-        <c:spPr>
-          <a:ln w="12700" cap="flat">
-            <a:solidFill>
-              <a:srgbClr val="888888"/>
-            </a:solidFill>
-            <a:prstDash val="solid"/>
-            <a:round/>
-          </a:ln>
-        </c:spPr>
-        <c:txPr>
-          <a:bodyPr/>
-          <a:lstStyle/>
-          <a:p>
-            <a:pPr>
-              <a:defRPr sz="1200" b="0" i="0" u="none" strike="noStrike">
-                <a:solidFill>
-                  <a:srgbClr val="000000"/>
-                </a:solidFill>
-                <a:latin typeface="Arial"/>
-              </a:defRPr>
-            </a:pPr>
-            <a:endParaRPr lang="en-US"/>
-          </a:p>
-        </c:txPr>
-        <c:crossAx val="2094734554"/>
-        <c:crosses val="autoZero"/>
-        <c:crossBetween val="between"/>
-      </c:valAx>
-      <c:spPr>
-        <a:noFill/>
-        <a:ln>
-          <a:noFill/>
-        </a:ln>
-        <a:effectLst/>
-      </c:spPr>
-    </c:plotArea>
-    <c:plotVisOnly val="1"/>
-    <c:dispBlanksAs val="span"/>
-  </c:chart>
-  <c:spPr>
-    <a:noFill/>
-    <a:ln>
-      <a:noFill/>
-    </a:ln>
-    <a:effectLst/>
-  </c:spPr>
-  <c:externalData r:id="rId1">
-    <c:autoUpdate val="0"/>
-  </c:externalData>
-</c:chartSpace>
 </file>
 
 <file path=ppt/notesMasters/notesMaster1.xml><?xml version="1.0" encoding="utf-8"?>
@@ -1375,7 +740,7 @@
 Next for ERM itself is go-live and the run phase with FZR. Beyond that, the same method fits any Slate app, and really any business-built tool where the knowledge lives in configuration and nobody wrote it down. There are plenty of those in our landscape.
 So here's our ask. We'd like your support to make this playbook a standard way to move business-built tools to industrial apps. We've already aligned with [Architect] to propose it at the architecture sync. (If you have one, name the first team outside DMS.)
 To sum up: from a business-built tool to an industrial product, and a method for the next app.
-Thank you. I'm happy to take your questions.</a:t>
+Let me close by showing you ERM 2.0 itself.</a:t>
             </a:r>
             <a:endParaRPr lang="en-US" dirty="0"/>
           </a:p>
@@ -1399,6 +764,97 @@
             <a:fld id="{F7021451-1387-4CA6-816F-3879F97B5CBC}" type="slidenum">
               <a:rPr lang="en-US"/>
               <a:t>11</a:t>
+            </a:fld>
+            <a:endParaRPr lang="en-US"/>
+          </a:p>
+        </p:txBody>
+      </p:sp>
+    </p:spTree>
+    <p:extLst>
+      <p:ext uri="{BB962C8B-B14F-4D97-AF65-F5344CB8AC3E}">
+        <p14:creationId xmlns:p14="http://schemas.microsoft.com/office/powerpoint/2010/main" val="1024086991"/>
+      </p:ext>
+    </p:extLst>
+  </p:cSld>
+  <p:clrMapOvr>
+    <a:masterClrMapping/>
+  </p:clrMapOvr>
+</p:notes>
+</file>
+
+<file path=ppt/notesSlides/notesSlide12.xml><?xml version="1.0" encoding="utf-8"?>
+<p:notes xmlns:a="http://schemas.openxmlformats.org/drawingml/2006/main" xmlns:r="http://schemas.openxmlformats.org/officeDocument/2006/relationships" xmlns:p="http://schemas.openxmlformats.org/presentationml/2006/main">
+  <p:cSld>
+    <p:spTree>
+      <p:nvGrpSpPr>
+        <p:cNvPr id="1" name=""/>
+        <p:cNvGrpSpPr/>
+        <p:nvPr/>
+      </p:nvGrpSpPr>
+      <p:grpSpPr>
+        <a:xfrm>
+          <a:off x="0" y="0"/>
+          <a:ext cx="0" cy="0"/>
+          <a:chOff x="0" y="0"/>
+          <a:chExt cx="0" cy="0"/>
+        </a:xfrm>
+      </p:grpSpPr>
+      <p:sp>
+        <p:nvSpPr>
+          <p:cNvPr id="2" name="Slide Image Placeholder 1"/>
+          <p:cNvSpPr>
+            <a:spLocks noGrp="1" noRot="1" noChangeAspect="1"/>
+          </p:cNvSpPr>
+          <p:nvPr>
+            <p:ph type="sldImg"/>
+          </p:nvPr>
+        </p:nvSpPr>
+        <p:spPr/>
+      </p:sp>
+      <p:sp>
+        <p:nvSpPr>
+          <p:cNvPr id="3" name="Notes Placeholder 2"/>
+          <p:cNvSpPr>
+            <a:spLocks noGrp="1"/>
+          </p:cNvSpPr>
+          <p:nvPr>
+            <p:ph type="body" idx="1"/>
+          </p:nvPr>
+        </p:nvSpPr>
+        <p:spPr/>
+        <p:txBody>
+          <a:bodyPr/>
+          <a:lstStyle/>
+          <a:p>
+            <a:r>
+              <a:rPr lang="en-US" dirty="0"/>
+              <a:t>Play the trailer: 1 min 34 s, full screen, sound on. Let it run without talking over it. It shows sample data only and ends on "Coming soon", which matches where we are: the app isn't live yet.
+When it ends: That's ERM 2.0. Thank you, I'm happy to take your questions.
+— — —
+Before presenting: delete the poster image and play button, insert docs/trailer-storyboard/erm2-trailer-1080p.mp4 (in Google Slides, upload it to Drive first, then Insert › Video › Google Drive) and set it to play automatically. Add about 1 min 40 s to your timing.</a:t>
+            </a:r>
+            <a:endParaRPr lang="en-US" dirty="0"/>
+          </a:p>
+        </p:txBody>
+      </p:sp>
+      <p:sp>
+        <p:nvSpPr>
+          <p:cNvPr id="4" name="Slide Number Placeholder 3"/>
+          <p:cNvSpPr>
+            <a:spLocks noGrp="1"/>
+          </p:cNvSpPr>
+          <p:nvPr>
+            <p:ph type="sldNum" sz="quarter" idx="10"/>
+          </p:nvPr>
+        </p:nvSpPr>
+        <p:spPr/>
+        <p:txBody>
+          <a:bodyPr/>
+          <a:lstStyle/>
+          <a:p>
+            <a:fld id="{F7021451-1387-4CA6-816F-3879F97B5CBC}" type="slidenum">
+              <a:rPr lang="en-US"/>
+              <a:t>12</a:t>
             </a:fld>
             <a:endParaRPr lang="en-US"/>
           </a:p>
@@ -1918,10 +1374,7 @@
               <a:t>Here is the problem and the solution on one picture.
 On the left is the Slate app we inherited. It worked, but everything was tangled together: one click set off a chain reaction behind the scenes, so a small change in one place could break a dashboard somewhere else. Switching tabs was slow. And nothing was documented, so the knowledge of what it really did lived in configuration and in a few people's heads.
 We took it through the portal: an AI-assisted migration. The AI did the heavy lifting of reading the old app and listing everything it does, and we checked every single feature on the other side.
-What came out is ERM 2.0: the same app people know, but stable, faster, documented and easy to extend. Rather than describe it, let me show you.
-— — —
-Play the trailer here: 1 min 34 s, full screen, sound on. Let it run without talking over it. It shows sample data only and ends on "Coming soon", which matches where we are: the app isn't live yet.
-Before you start: have docs/trailer-storyboard/erm2-trailer-1080p.mp4 open and cued, or embed it on this slide. Add about 1 min 40 s to your timing.</a:t>
+What came out is ERM 2.0: the same app people know, but stable, faster, documented and easy to extend. And here is what that delivered.</a:t>
             </a:r>
             <a:endParaRPr lang="en-US" dirty="0"/>
           </a:p>
@@ -2009,7 +1462,7 @@
           <a:p>
             <a:r>
               <a:rPr lang="en-US" dirty="0"/>
-              <a:t>That was ERM 2.0. One PI, two developers. Every one of the hundred and five features people rely on was carried over and checked. On top of that there are eleven new ones, like custom one-pager layouts and a slideshow mode for reviews. It's faster to move around, seven security issues were found and fixed along the way, and the app went from no documentation to ten documents.
+              <a:t>One PI, two developers. Every one of the hundred and five features people rely on was carried over and checked. On top of that there are eleven new ones, like custom one-pager layouts and a slideshow mode for reviews. It's faster to move around, seven security issues were found and fixed along the way, and the app went from no documentation to ten documents.
 The number I'd like you to remember is this one: about seventy-six percent less effort than a traditional migration. Four sprints instead of roughly seventeen. That's around eighty thousand dollars saved, and roughly ten thousand a year less to maintain. These are estimates, and the basis is in the footnote.
 And it keeps paying back. Before, every change was risky. Now each feature stands on its own, so changes are quick and safe, and any team can pick it up.
 But I'd rather the business told you how it feels.
@@ -6830,6 +6283,207 @@
 </p:sld>
 </file>
 
+<file path=ppt/slides/slide12.xml><?xml version="1.0" encoding="utf-8"?>
+<p:sld xmlns:a="http://schemas.openxmlformats.org/drawingml/2006/main" xmlns:r="http://schemas.openxmlformats.org/officeDocument/2006/relationships" xmlns:p="http://schemas.openxmlformats.org/presentationml/2006/main">
+  <p:cSld name="Slide 12">
+    <p:spTree>
+      <p:nvGrpSpPr>
+        <p:cNvPr id="1" name=""/>
+        <p:cNvGrpSpPr/>
+        <p:nvPr/>
+      </p:nvGrpSpPr>
+      <p:grpSpPr>
+        <a:xfrm>
+          <a:off x="0" y="0"/>
+          <a:ext cx="0" cy="0"/>
+          <a:chOff x="0" y="0"/>
+          <a:chExt cx="0" cy="0"/>
+        </a:xfrm>
+      </p:grpSpPr>
+      <p:sp>
+        <p:nvSpPr>
+          <p:cNvPr id="2" name="criterion"/>
+          <p:cNvSpPr txBox="1"/>
+          <p:nvPr/>
+        </p:nvSpPr>
+        <p:spPr>
+          <a:xfrm>
+            <a:off x="548640" y="201168"/>
+            <a:ext cx="5486400" cy="256032"/>
+          </a:xfrm>
+          <a:prstGeom prst="rect">
+            <a:avLst/>
+          </a:prstGeom>
+          <a:noFill/>
+          <a:ln/>
+        </p:spPr>
+        <p:txBody>
+          <a:bodyPr wrap="square" lIns="0" tIns="0" rIns="0" bIns="0" rtlCol="0" anchor="t"/>
+          <a:lstStyle/>
+          <a:p>
+            <a:pPr indent="0" marL="0">
+              <a:buNone/>
+            </a:pPr>
+            <a:r>
+              <a:rPr lang="en-US" sz="1100" b="1" spc="200" kern="0" dirty="0">
+                <a:solidFill>
+                  <a:schemeClr val="accent5"/>
+                </a:solidFill>
+              </a:rPr>
+              <a:t>ERM 2.0</a:t>
+            </a:r>
+            <a:endParaRPr lang="en-US" sz="1100" dirty="0"/>
+          </a:p>
+        </p:txBody>
+      </p:sp>
+      <p:sp>
+        <p:nvSpPr>
+          <p:cNvPr id="3" name="Text 1"/>
+          <p:cNvSpPr/>
+          <p:nvPr>
+            <p:ph idx="101" type="title" hasCustomPrompt="1"/>
+          </p:nvPr>
+        </p:nvSpPr>
+        <p:spPr>
+          <a:xfrm>
+            <a:off x="548640" y="502920"/>
+            <a:ext cx="11094415" cy="822960"/>
+          </a:xfrm>
+          <a:prstGeom prst="rect">
+            <a:avLst/>
+          </a:prstGeom>
+          <a:noFill/>
+          <a:ln/>
+        </p:spPr>
+        <p:txBody>
+          <a:bodyPr wrap="square" lIns="0" tIns="0" rIns="0" bIns="0" rtlCol="0" anchor="t"/>
+          <a:lstStyle/>
+          <a:p>
+            <a:pPr algn="l" indent="0" marL="0">
+              <a:buNone/>
+            </a:pPr>
+            <a:r>
+              <a:rPr lang="en-US" sz="3600" b="1" dirty="0">
+                <a:solidFill>
+                  <a:schemeClr val="bg1"/>
+                </a:solidFill>
+              </a:rPr>
+              <a:t>See it in action</a:t>
+            </a:r>
+            <a:endParaRPr lang="en-US" sz="3600" dirty="0"/>
+          </a:p>
+        </p:txBody>
+      </p:sp>
+      <p:pic>
+        <p:nvPicPr>
+          <p:cNvPr id="4" name="trailer-poster" descr="Placeholder for the ERM 2.0 trailer video: replace with the video">    </p:cNvPr>
+          <p:cNvPicPr>
+            <a:picLocks noChangeAspect="1"/>
+          </p:cNvPicPr>
+          <p:nvPr/>
+        </p:nvPicPr>
+        <p:blipFill>
+          <a:blip r:embed="rId1"/>
+          <a:stretch>
+            <a:fillRect/>
+          </a:stretch>
+        </p:blipFill>
+        <p:spPr>
+          <a:xfrm>
+            <a:off x="1706728" y="1417320"/>
+            <a:ext cx="8778240" cy="4937760"/>
+          </a:xfrm>
+          <a:prstGeom prst="rect">
+            <a:avLst/>
+          </a:prstGeom>
+        </p:spPr>
+      </p:pic>
+      <p:sp>
+        <p:nvSpPr>
+          <p:cNvPr id="5" name="trailer-play"/>
+          <p:cNvSpPr/>
+          <p:nvPr/>
+        </p:nvSpPr>
+        <p:spPr>
+          <a:xfrm>
+            <a:off x="5592928" y="3383280"/>
+            <a:ext cx="1005840" cy="1005840"/>
+          </a:xfrm>
+          <a:prstGeom prst="ellipse">
+            <a:avLst/>
+          </a:prstGeom>
+          <a:solidFill>
+            <a:schemeClr val="bg1">
+              <a:alpha val="85000"/>
+            </a:schemeClr>
+          </a:solidFill>
+          <a:ln/>
+        </p:spPr>
+      </p:sp>
+      <p:sp>
+        <p:nvSpPr>
+          <p:cNvPr id="6" name="trailer-play-icon"/>
+          <p:cNvSpPr/>
+          <p:nvPr/>
+        </p:nvSpPr>
+        <p:spPr>
+          <a:xfrm rot="5400000">
+            <a:off x="5940400" y="3657600"/>
+            <a:ext cx="457200" cy="457200"/>
+          </a:xfrm>
+          <a:prstGeom prst="triangle">
+            <a:avLst/>
+          </a:prstGeom>
+          <a:solidFill>
+            <a:schemeClr val="accent1"/>
+          </a:solidFill>
+          <a:ln/>
+        </p:spPr>
+      </p:sp>
+      <p:sp>
+        <p:nvSpPr>
+          <p:cNvPr id="7" name="trailer-hint"/>
+          <p:cNvSpPr txBox="1"/>
+          <p:nvPr/>
+        </p:nvSpPr>
+        <p:spPr>
+          <a:xfrm>
+            <a:off x="1706728" y="6492240"/>
+            <a:ext cx="8778240" cy="320040"/>
+          </a:xfrm>
+          <a:prstGeom prst="rect">
+            <a:avLst/>
+          </a:prstGeom>
+          <a:noFill/>
+          <a:ln/>
+        </p:spPr>
+        <p:txBody>
+          <a:bodyPr wrap="square" lIns="0" tIns="0" rIns="0" bIns="0" rtlCol="0" anchor="t"/>
+          <a:lstStyle/>
+          <a:p>
+            <a:pPr algn="ctr" indent="0" marL="0">
+              <a:buNone/>
+            </a:pPr>
+            <a:r>
+              <a:rPr lang="en-US" sz="1200" i="1" dirty="0">
+                <a:solidFill>
+                  <a:schemeClr val="accent5"/>
+                </a:solidFill>
+              </a:rPr>
+              <a:t>Placeholder: replace with the trailer video (Insert › Video), 1 min 34 s</a:t>
+            </a:r>
+            <a:endParaRPr lang="en-US" sz="1200" dirty="0"/>
+          </a:p>
+        </p:txBody>
+      </p:sp>
+    </p:spTree>
+  </p:cSld>
+  <p:clrMapOvr>
+    <a:masterClrMapping/>
+  </p:clrMapOvr>
+</p:sld>
+</file>
+
 <file path=ppt/slides/slide2.xml><?xml version="1.0" encoding="utf-8"?>
 <p:sld xmlns:a="http://schemas.openxmlformats.org/drawingml/2006/main" xmlns:r="http://schemas.openxmlformats.org/officeDocument/2006/relationships" xmlns:p="http://schemas.openxmlformats.org/presentationml/2006/main">
   <p:cSld name="Slide 2">
@@ -16250,22 +15904,30 @@
           </a:p>
         </p:txBody>
       </p:sp>
-      <p:graphicFrame>
-        <p:nvGraphicFramePr>
-          <p:cNvPr id="19" name="users-trend" descr=""/>
-          <p:cNvGraphicFramePr/>
-          <p:nvPr/>
-        </p:nvGraphicFramePr>
-        <p:xfrm>
-          <a:off x="594360" y="3063240"/>
-          <a:ext cx="4480560" cy="2971800"/>
-        </p:xfrm>
-        <a:graphic xmlns:a="http://schemas.openxmlformats.org/drawingml/2006/main">
-          <a:graphicData uri="http://schemas.openxmlformats.org/drawingml/2006/chart">
-            <c:chart xmlns:c="http://schemas.openxmlformats.org/drawingml/2006/chart" r:id="rId1"/>
-          </a:graphicData>
-        </a:graphic>
-      </p:graphicFrame>
+      <p:pic>
+        <p:nvPicPr>
+          <p:cNvPr id="19" name="users-trend" descr="Animated line chart: monthly unique users grow from 0 in Aug 2024 to about 310 in Jun 2026, peaking at 340 in Feb 2026">    </p:cNvPr>
+          <p:cNvPicPr>
+            <a:picLocks noChangeAspect="1"/>
+          </p:cNvPicPr>
+          <p:nvPr/>
+        </p:nvPicPr>
+        <p:blipFill>
+          <a:blip r:embed="rId1"/>
+          <a:stretch>
+            <a:fillRect/>
+          </a:stretch>
+        </p:blipFill>
+        <p:spPr>
+          <a:xfrm>
+            <a:off x="594360" y="3108960"/>
+            <a:ext cx="4480560" cy="2971800"/>
+          </a:xfrm>
+          <a:prstGeom prst="rect">
+            <a:avLst/>
+          </a:prstGeom>
+        </p:spPr>
+      </p:pic>
       <p:sp>
         <p:nvSpPr>
           <p:cNvPr id="20" name="trend-caption"/>
@@ -16360,22 +16022,30 @@
           </a:p>
         </p:txBody>
       </p:sp>
-      <p:graphicFrame>
-        <p:nvGraphicFramePr>
-          <p:cNvPr id="23" name="org-chart" descr=""/>
-          <p:cNvGraphicFramePr/>
-          <p:nvPr/>
-        </p:nvGraphicFramePr>
-        <p:xfrm>
-          <a:off x="5394960" y="3063240"/>
-          <a:ext cx="3749040" cy="2971800"/>
-        </p:xfrm>
-        <a:graphic xmlns:a="http://schemas.openxmlformats.org/drawingml/2006/main">
-          <a:graphicData uri="http://schemas.openxmlformats.org/drawingml/2006/chart">
-            <c:chart xmlns:c="http://schemas.openxmlformats.org/drawingml/2006/chart" r:id="rId2"/>
-          </a:graphicData>
-        </a:graphic>
-      </p:graphicFrame>
+      <p:pic>
+        <p:nvPicPr>
+          <p:cNvPr id="23" name="org-chart" descr="Animated bar chart: unique users by function, B 345, O 120, P 95, A 60, L 55, S 55, K 50; each bar is highlighted in turn">    </p:cNvPr>
+          <p:cNvPicPr>
+            <a:picLocks noChangeAspect="1"/>
+          </p:cNvPicPr>
+          <p:nvPr/>
+        </p:nvPicPr>
+        <p:blipFill>
+          <a:blip r:embed="rId2"/>
+          <a:stretch>
+            <a:fillRect/>
+          </a:stretch>
+        </p:blipFill>
+        <p:spPr>
+          <a:xfrm>
+            <a:off x="5394960" y="3108960"/>
+            <a:ext cx="3749040" cy="2971800"/>
+          </a:xfrm>
+          <a:prstGeom prst="rect">
+            <a:avLst/>
+          </a:prstGeom>
+        </p:spPr>
+      </p:pic>
       <p:sp>
         <p:nvSpPr>
           <p:cNvPr id="24" name="org-caption"/>
@@ -17284,9 +16954,9 @@
                                 </p:cTn>
                               </p:par>
                               <p:par>
-                                <p:cTn id="56" presetID="22" presetClass="entr" presetSubtype="8" fill="hold" grpId="0" nodeType="withEffect">
+                                <p:cTn id="56" presetID="10" presetClass="entr" presetSubtype="0" fill="hold" grpId="0" nodeType="withEffect">
                                   <p:stCondLst>
-                                    <p:cond delay="200"/>
+                                    <p:cond delay="0"/>
                                   </p:stCondLst>
                                   <p:childTnLst>
                                     <p:set>
@@ -17307,7 +16977,7 @@
                                         <p:strVal val="visible"/>
                                       </p:to>
                                     </p:set>
-                                    <p:animEffect transition="in" filter="wipe(left)">
+                                    <p:animEffect transition="in" filter="fade">
                                       <p:cBhvr>
                                         <p:cTn id="58" dur="450"/>
                                         <p:tgtEl>
